--- a/images/images.pptx
+++ b/images/images.pptx
@@ -4,8 +4,16 @@
   <p:sldMasterIdLst>
     <p:sldMasterId id="2147483648" r:id="rId1"/>
   </p:sldMasterIdLst>
+  <p:notesMasterIdLst>
+    <p:notesMasterId r:id="rId8"/>
+  </p:notesMasterIdLst>
   <p:sldIdLst>
-    <p:sldId id="256" r:id="rId2"/>
+    <p:sldId id="4423" r:id="rId2"/>
+    <p:sldId id="4573" r:id="rId3"/>
+    <p:sldId id="4574" r:id="rId4"/>
+    <p:sldId id="4576" r:id="rId5"/>
+    <p:sldId id="4575" r:id="rId6"/>
+    <p:sldId id="256" r:id="rId7"/>
   </p:sldIdLst>
   <p:sldSz cx="12192000" cy="6858000"/>
   <p:notesSz cx="6858000" cy="9144000"/>
@@ -115,7 +123,7 @@
 <file path=ppt/revisionInfo.xml><?xml version="1.0" encoding="utf-8"?>
 <p1510:revInfo xmlns:a="http://schemas.openxmlformats.org/drawingml/2006/main" xmlns:r="http://schemas.openxmlformats.org/officeDocument/2006/relationships" xmlns:p1510="http://schemas.microsoft.com/office/powerpoint/2015/10/main">
   <p1510:revLst>
-    <p1510:client id="{10FFCFC5-1F1B-4E64-977F-0F12FFBE330F}" v="23" dt="2025-10-03T10:36:18.274"/>
+    <p1510:client id="{C9C44FA6-CC42-FE4A-AF89-1DCED5D05B69}" v="1" dt="2026-02-02T10:20:55.157"/>
   </p1510:revLst>
 </p1510:revInfo>
 </file>
@@ -123,158 +131,729 @@
 <file path=ppt/changesInfos/changesInfo1.xml><?xml version="1.0" encoding="utf-8"?>
 <pc:chgInfo xmlns:a="http://schemas.openxmlformats.org/drawingml/2006/main" xmlns:r="http://schemas.openxmlformats.org/officeDocument/2006/relationships" xmlns:ac="http://schemas.microsoft.com/office/drawing/2013/main/command" xmlns:pc="http://schemas.microsoft.com/office/powerpoint/2013/main/command">
   <pc:docChgLst>
-    <pc:chgData name="Noritsuna Imamura" userId="5b2da16fa1785921" providerId="LiveId" clId="{342DA2C4-B094-4B86-9045-6AA34CD7B848}"/>
-    <pc:docChg chg="undo custSel addSld modSld">
-      <pc:chgData name="Noritsuna Imamura" userId="5b2da16fa1785921" providerId="LiveId" clId="{342DA2C4-B094-4B86-9045-6AA34CD7B848}" dt="2025-10-04T01:39:37.258" v="295" actId="1035"/>
+    <pc:chgData name="Noritsuna Imamura" userId="5b2da16fa1785921" providerId="LiveId" clId="{33F32BBD-F384-5180-A48B-EBDC93943B01}"/>
+    <pc:docChg chg="custSel addSld delSld modSld">
+      <pc:chgData name="Noritsuna Imamura" userId="5b2da16fa1785921" providerId="LiveId" clId="{33F32BBD-F384-5180-A48B-EBDC93943B01}" dt="2026-02-02T10:23:06.766" v="47" actId="20577"/>
       <pc:docMkLst>
         <pc:docMk/>
       </pc:docMkLst>
-      <pc:sldChg chg="addSp delSp modSp new mod">
-        <pc:chgData name="Noritsuna Imamura" userId="5b2da16fa1785921" providerId="LiveId" clId="{342DA2C4-B094-4B86-9045-6AA34CD7B848}" dt="2025-10-04T01:39:37.258" v="295" actId="1035"/>
+      <pc:sldChg chg="del">
+        <pc:chgData name="Noritsuna Imamura" userId="5b2da16fa1785921" providerId="LiveId" clId="{33F32BBD-F384-5180-A48B-EBDC93943B01}" dt="2026-02-02T10:20:12.841" v="9" actId="2696"/>
+        <pc:sldMkLst>
+          <pc:docMk/>
+          <pc:sldMk cId="457667663" sldId="256"/>
+        </pc:sldMkLst>
+      </pc:sldChg>
+      <pc:sldChg chg="add">
+        <pc:chgData name="Noritsuna Imamura" userId="5b2da16fa1785921" providerId="LiveId" clId="{33F32BBD-F384-5180-A48B-EBDC93943B01}" dt="2026-02-02T10:20:55.151" v="14"/>
         <pc:sldMkLst>
           <pc:docMk/>
           <pc:sldMk cId="894218861" sldId="256"/>
         </pc:sldMkLst>
+      </pc:sldChg>
+      <pc:sldChg chg="del">
+        <pc:chgData name="Noritsuna Imamura" userId="5b2da16fa1785921" providerId="LiveId" clId="{33F32BBD-F384-5180-A48B-EBDC93943B01}" dt="2026-02-02T10:20:22.896" v="10" actId="2696"/>
+        <pc:sldMkLst>
+          <pc:docMk/>
+          <pc:sldMk cId="342297171" sldId="260"/>
+        </pc:sldMkLst>
+      </pc:sldChg>
+      <pc:sldChg chg="del">
+        <pc:chgData name="Noritsuna Imamura" userId="5b2da16fa1785921" providerId="LiveId" clId="{33F32BBD-F384-5180-A48B-EBDC93943B01}" dt="2026-02-02T10:20:22.896" v="10" actId="2696"/>
+        <pc:sldMkLst>
+          <pc:docMk/>
+          <pc:sldMk cId="3681333138" sldId="261"/>
+        </pc:sldMkLst>
+      </pc:sldChg>
+      <pc:sldChg chg="modSp del mod">
+        <pc:chgData name="Noritsuna Imamura" userId="5b2da16fa1785921" providerId="LiveId" clId="{33F32BBD-F384-5180-A48B-EBDC93943B01}" dt="2026-02-02T10:20:12.841" v="9" actId="2696"/>
+        <pc:sldMkLst>
+          <pc:docMk/>
+          <pc:sldMk cId="154660389" sldId="316"/>
+        </pc:sldMkLst>
+      </pc:sldChg>
+      <pc:sldChg chg="del">
+        <pc:chgData name="Noritsuna Imamura" userId="5b2da16fa1785921" providerId="LiveId" clId="{33F32BBD-F384-5180-A48B-EBDC93943B01}" dt="2026-02-02T10:20:12.841" v="9" actId="2696"/>
+        <pc:sldMkLst>
+          <pc:docMk/>
+          <pc:sldMk cId="286719847" sldId="317"/>
+        </pc:sldMkLst>
+      </pc:sldChg>
+      <pc:sldChg chg="del">
+        <pc:chgData name="Noritsuna Imamura" userId="5b2da16fa1785921" providerId="LiveId" clId="{33F32BBD-F384-5180-A48B-EBDC93943B01}" dt="2026-02-02T10:20:12.841" v="9" actId="2696"/>
+        <pc:sldMkLst>
+          <pc:docMk/>
+          <pc:sldMk cId="1655586770" sldId="318"/>
+        </pc:sldMkLst>
+      </pc:sldChg>
+      <pc:sldChg chg="del">
+        <pc:chgData name="Noritsuna Imamura" userId="5b2da16fa1785921" providerId="LiveId" clId="{33F32BBD-F384-5180-A48B-EBDC93943B01}" dt="2026-02-02T10:20:12.841" v="9" actId="2696"/>
+        <pc:sldMkLst>
+          <pc:docMk/>
+          <pc:sldMk cId="380209660" sldId="335"/>
+        </pc:sldMkLst>
+      </pc:sldChg>
+      <pc:sldChg chg="del">
+        <pc:chgData name="Noritsuna Imamura" userId="5b2da16fa1785921" providerId="LiveId" clId="{33F32BBD-F384-5180-A48B-EBDC93943B01}" dt="2026-02-02T10:20:12.841" v="9" actId="2696"/>
+        <pc:sldMkLst>
+          <pc:docMk/>
+          <pc:sldMk cId="652582140" sldId="338"/>
+        </pc:sldMkLst>
+      </pc:sldChg>
+      <pc:sldChg chg="del">
+        <pc:chgData name="Noritsuna Imamura" userId="5b2da16fa1785921" providerId="LiveId" clId="{33F32BBD-F384-5180-A48B-EBDC93943B01}" dt="2026-02-02T10:20:12.841" v="9" actId="2696"/>
+        <pc:sldMkLst>
+          <pc:docMk/>
+          <pc:sldMk cId="906409826" sldId="4351"/>
+        </pc:sldMkLst>
+      </pc:sldChg>
+      <pc:sldChg chg="del">
+        <pc:chgData name="Noritsuna Imamura" userId="5b2da16fa1785921" providerId="LiveId" clId="{33F32BBD-F384-5180-A48B-EBDC93943B01}" dt="2026-02-02T10:20:12.841" v="9" actId="2696"/>
+        <pc:sldMkLst>
+          <pc:docMk/>
+          <pc:sldMk cId="2541329781" sldId="4417"/>
+        </pc:sldMkLst>
+      </pc:sldChg>
+      <pc:sldChg chg="del">
+        <pc:chgData name="Noritsuna Imamura" userId="5b2da16fa1785921" providerId="LiveId" clId="{33F32BBD-F384-5180-A48B-EBDC93943B01}" dt="2026-02-02T10:20:22.896" v="10" actId="2696"/>
+        <pc:sldMkLst>
+          <pc:docMk/>
+          <pc:sldMk cId="2144489418" sldId="4422"/>
+        </pc:sldMkLst>
+      </pc:sldChg>
+      <pc:sldChg chg="del">
+        <pc:chgData name="Noritsuna Imamura" userId="5b2da16fa1785921" providerId="LiveId" clId="{33F32BBD-F384-5180-A48B-EBDC93943B01}" dt="2026-02-02T10:20:12.841" v="9" actId="2696"/>
+        <pc:sldMkLst>
+          <pc:docMk/>
+          <pc:sldMk cId="2460053199" sldId="4477"/>
+        </pc:sldMkLst>
+      </pc:sldChg>
+      <pc:sldChg chg="del">
+        <pc:chgData name="Noritsuna Imamura" userId="5b2da16fa1785921" providerId="LiveId" clId="{33F32BBD-F384-5180-A48B-EBDC93943B01}" dt="2026-02-02T10:20:12.841" v="9" actId="2696"/>
+        <pc:sldMkLst>
+          <pc:docMk/>
+          <pc:sldMk cId="936911519" sldId="4481"/>
+        </pc:sldMkLst>
+      </pc:sldChg>
+      <pc:sldChg chg="del">
+        <pc:chgData name="Noritsuna Imamura" userId="5b2da16fa1785921" providerId="LiveId" clId="{33F32BBD-F384-5180-A48B-EBDC93943B01}" dt="2026-02-02T10:20:12.841" v="9" actId="2696"/>
+        <pc:sldMkLst>
+          <pc:docMk/>
+          <pc:sldMk cId="2688144880" sldId="4484"/>
+        </pc:sldMkLst>
+      </pc:sldChg>
+      <pc:sldChg chg="del">
+        <pc:chgData name="Noritsuna Imamura" userId="5b2da16fa1785921" providerId="LiveId" clId="{33F32BBD-F384-5180-A48B-EBDC93943B01}" dt="2026-02-02T10:20:22.896" v="10" actId="2696"/>
+        <pc:sldMkLst>
+          <pc:docMk/>
+          <pc:sldMk cId="2832259459" sldId="4523"/>
+        </pc:sldMkLst>
+      </pc:sldChg>
+      <pc:sldChg chg="del">
+        <pc:chgData name="Noritsuna Imamura" userId="5b2da16fa1785921" providerId="LiveId" clId="{33F32BBD-F384-5180-A48B-EBDC93943B01}" dt="2026-02-02T10:20:12.841" v="9" actId="2696"/>
+        <pc:sldMkLst>
+          <pc:docMk/>
+          <pc:sldMk cId="3054844838" sldId="4524"/>
+        </pc:sldMkLst>
+      </pc:sldChg>
+      <pc:sldChg chg="del">
+        <pc:chgData name="Noritsuna Imamura" userId="5b2da16fa1785921" providerId="LiveId" clId="{33F32BBD-F384-5180-A48B-EBDC93943B01}" dt="2026-02-02T10:20:12.841" v="9" actId="2696"/>
+        <pc:sldMkLst>
+          <pc:docMk/>
+          <pc:sldMk cId="769980419" sldId="4525"/>
+        </pc:sldMkLst>
+      </pc:sldChg>
+      <pc:sldChg chg="del">
+        <pc:chgData name="Noritsuna Imamura" userId="5b2da16fa1785921" providerId="LiveId" clId="{33F32BBD-F384-5180-A48B-EBDC93943B01}" dt="2026-02-02T10:20:12.841" v="9" actId="2696"/>
+        <pc:sldMkLst>
+          <pc:docMk/>
+          <pc:sldMk cId="3292200973" sldId="4526"/>
+        </pc:sldMkLst>
+      </pc:sldChg>
+      <pc:sldChg chg="del">
+        <pc:chgData name="Noritsuna Imamura" userId="5b2da16fa1785921" providerId="LiveId" clId="{33F32BBD-F384-5180-A48B-EBDC93943B01}" dt="2026-02-02T10:20:12.841" v="9" actId="2696"/>
+        <pc:sldMkLst>
+          <pc:docMk/>
+          <pc:sldMk cId="3529138643" sldId="4527"/>
+        </pc:sldMkLst>
+      </pc:sldChg>
+      <pc:sldChg chg="del">
+        <pc:chgData name="Noritsuna Imamura" userId="5b2da16fa1785921" providerId="LiveId" clId="{33F32BBD-F384-5180-A48B-EBDC93943B01}" dt="2026-02-02T10:20:12.841" v="9" actId="2696"/>
+        <pc:sldMkLst>
+          <pc:docMk/>
+          <pc:sldMk cId="2368044935" sldId="4528"/>
+        </pc:sldMkLst>
+      </pc:sldChg>
+      <pc:sldChg chg="del">
+        <pc:chgData name="Noritsuna Imamura" userId="5b2da16fa1785921" providerId="LiveId" clId="{33F32BBD-F384-5180-A48B-EBDC93943B01}" dt="2026-02-02T10:20:12.841" v="9" actId="2696"/>
+        <pc:sldMkLst>
+          <pc:docMk/>
+          <pc:sldMk cId="2081605517" sldId="4530"/>
+        </pc:sldMkLst>
+      </pc:sldChg>
+      <pc:sldChg chg="del">
+        <pc:chgData name="Noritsuna Imamura" userId="5b2da16fa1785921" providerId="LiveId" clId="{33F32BBD-F384-5180-A48B-EBDC93943B01}" dt="2026-02-02T10:20:22.896" v="10" actId="2696"/>
+        <pc:sldMkLst>
+          <pc:docMk/>
+          <pc:sldMk cId="2835567474" sldId="4533"/>
+        </pc:sldMkLst>
+      </pc:sldChg>
+      <pc:sldChg chg="del">
+        <pc:chgData name="Noritsuna Imamura" userId="5b2da16fa1785921" providerId="LiveId" clId="{33F32BBD-F384-5180-A48B-EBDC93943B01}" dt="2026-02-02T10:20:12.841" v="9" actId="2696"/>
+        <pc:sldMkLst>
+          <pc:docMk/>
+          <pc:sldMk cId="1718001353" sldId="4534"/>
+        </pc:sldMkLst>
+      </pc:sldChg>
+      <pc:sldChg chg="del">
+        <pc:chgData name="Noritsuna Imamura" userId="5b2da16fa1785921" providerId="LiveId" clId="{33F32BBD-F384-5180-A48B-EBDC93943B01}" dt="2026-02-02T10:20:12.841" v="9" actId="2696"/>
+        <pc:sldMkLst>
+          <pc:docMk/>
+          <pc:sldMk cId="1326589852" sldId="4542"/>
+        </pc:sldMkLst>
+      </pc:sldChg>
+      <pc:sldChg chg="del">
+        <pc:chgData name="Noritsuna Imamura" userId="5b2da16fa1785921" providerId="LiveId" clId="{33F32BBD-F384-5180-A48B-EBDC93943B01}" dt="2026-02-02T10:20:12.841" v="9" actId="2696"/>
+        <pc:sldMkLst>
+          <pc:docMk/>
+          <pc:sldMk cId="1627817156" sldId="4543"/>
+        </pc:sldMkLst>
+      </pc:sldChg>
+      <pc:sldChg chg="del">
+        <pc:chgData name="Noritsuna Imamura" userId="5b2da16fa1785921" providerId="LiveId" clId="{33F32BBD-F384-5180-A48B-EBDC93943B01}" dt="2026-02-02T10:20:12.841" v="9" actId="2696"/>
+        <pc:sldMkLst>
+          <pc:docMk/>
+          <pc:sldMk cId="970155590" sldId="4545"/>
+        </pc:sldMkLst>
+      </pc:sldChg>
+      <pc:sldChg chg="del">
+        <pc:chgData name="Noritsuna Imamura" userId="5b2da16fa1785921" providerId="LiveId" clId="{33F32BBD-F384-5180-A48B-EBDC93943B01}" dt="2026-02-02T10:20:12.841" v="9" actId="2696"/>
+        <pc:sldMkLst>
+          <pc:docMk/>
+          <pc:sldMk cId="2441858952" sldId="4547"/>
+        </pc:sldMkLst>
+      </pc:sldChg>
+      <pc:sldChg chg="del">
+        <pc:chgData name="Noritsuna Imamura" userId="5b2da16fa1785921" providerId="LiveId" clId="{33F32BBD-F384-5180-A48B-EBDC93943B01}" dt="2026-02-02T10:20:12.841" v="9" actId="2696"/>
+        <pc:sldMkLst>
+          <pc:docMk/>
+          <pc:sldMk cId="2988580093" sldId="4552"/>
+        </pc:sldMkLst>
+      </pc:sldChg>
+      <pc:sldChg chg="del">
+        <pc:chgData name="Noritsuna Imamura" userId="5b2da16fa1785921" providerId="LiveId" clId="{33F32BBD-F384-5180-A48B-EBDC93943B01}" dt="2026-02-02T10:20:12.841" v="9" actId="2696"/>
+        <pc:sldMkLst>
+          <pc:docMk/>
+          <pc:sldMk cId="2042674501" sldId="4556"/>
+        </pc:sldMkLst>
+      </pc:sldChg>
+      <pc:sldChg chg="del">
+        <pc:chgData name="Noritsuna Imamura" userId="5b2da16fa1785921" providerId="LiveId" clId="{33F32BBD-F384-5180-A48B-EBDC93943B01}" dt="2026-02-02T10:20:12.841" v="9" actId="2696"/>
+        <pc:sldMkLst>
+          <pc:docMk/>
+          <pc:sldMk cId="810926" sldId="4558"/>
+        </pc:sldMkLst>
+      </pc:sldChg>
+      <pc:sldChg chg="del">
+        <pc:chgData name="Noritsuna Imamura" userId="5b2da16fa1785921" providerId="LiveId" clId="{33F32BBD-F384-5180-A48B-EBDC93943B01}" dt="2026-02-02T10:20:12.841" v="9" actId="2696"/>
+        <pc:sldMkLst>
+          <pc:docMk/>
+          <pc:sldMk cId="3537041651" sldId="4562"/>
+        </pc:sldMkLst>
+      </pc:sldChg>
+      <pc:sldChg chg="modSp del mod">
+        <pc:chgData name="Noritsuna Imamura" userId="5b2da16fa1785921" providerId="LiveId" clId="{33F32BBD-F384-5180-A48B-EBDC93943B01}" dt="2026-02-02T10:20:22.896" v="10" actId="2696"/>
+        <pc:sldMkLst>
+          <pc:docMk/>
+          <pc:sldMk cId="3028097871" sldId="4565"/>
+        </pc:sldMkLst>
+      </pc:sldChg>
+      <pc:sldChg chg="del">
+        <pc:chgData name="Noritsuna Imamura" userId="5b2da16fa1785921" providerId="LiveId" clId="{33F32BBD-F384-5180-A48B-EBDC93943B01}" dt="2026-02-02T10:20:22.896" v="10" actId="2696"/>
+        <pc:sldMkLst>
+          <pc:docMk/>
+          <pc:sldMk cId="4142390305" sldId="4566"/>
+        </pc:sldMkLst>
+      </pc:sldChg>
+      <pc:sldChg chg="del">
+        <pc:chgData name="Noritsuna Imamura" userId="5b2da16fa1785921" providerId="LiveId" clId="{33F32BBD-F384-5180-A48B-EBDC93943B01}" dt="2026-02-02T10:20:12.841" v="9" actId="2696"/>
+        <pc:sldMkLst>
+          <pc:docMk/>
+          <pc:sldMk cId="3977662701" sldId="4567"/>
+        </pc:sldMkLst>
+      </pc:sldChg>
+      <pc:sldChg chg="del">
+        <pc:chgData name="Noritsuna Imamura" userId="5b2da16fa1785921" providerId="LiveId" clId="{33F32BBD-F384-5180-A48B-EBDC93943B01}" dt="2026-02-02T10:20:22.896" v="10" actId="2696"/>
+        <pc:sldMkLst>
+          <pc:docMk/>
+          <pc:sldMk cId="2029528093" sldId="4568"/>
+        </pc:sldMkLst>
+      </pc:sldChg>
+      <pc:sldChg chg="del">
+        <pc:chgData name="Noritsuna Imamura" userId="5b2da16fa1785921" providerId="LiveId" clId="{33F32BBD-F384-5180-A48B-EBDC93943B01}" dt="2026-02-02T10:20:22.896" v="10" actId="2696"/>
+        <pc:sldMkLst>
+          <pc:docMk/>
+          <pc:sldMk cId="2782202577" sldId="4569"/>
+        </pc:sldMkLst>
+      </pc:sldChg>
+      <pc:sldChg chg="del">
+        <pc:chgData name="Noritsuna Imamura" userId="5b2da16fa1785921" providerId="LiveId" clId="{33F32BBD-F384-5180-A48B-EBDC93943B01}" dt="2026-02-02T10:20:22.896" v="10" actId="2696"/>
+        <pc:sldMkLst>
+          <pc:docMk/>
+          <pc:sldMk cId="1275167199" sldId="4570"/>
+        </pc:sldMkLst>
+      </pc:sldChg>
+      <pc:sldChg chg="del">
+        <pc:chgData name="Noritsuna Imamura" userId="5b2da16fa1785921" providerId="LiveId" clId="{33F32BBD-F384-5180-A48B-EBDC93943B01}" dt="2026-02-02T10:20:22.896" v="10" actId="2696"/>
+        <pc:sldMkLst>
+          <pc:docMk/>
+          <pc:sldMk cId="2377221949" sldId="4571"/>
+        </pc:sldMkLst>
+      </pc:sldChg>
+      <pc:sldChg chg="del">
+        <pc:chgData name="Noritsuna Imamura" userId="5b2da16fa1785921" providerId="LiveId" clId="{33F32BBD-F384-5180-A48B-EBDC93943B01}" dt="2026-02-02T10:20:22.896" v="10" actId="2696"/>
+        <pc:sldMkLst>
+          <pc:docMk/>
+          <pc:sldMk cId="4080351507" sldId="4572"/>
+        </pc:sldMkLst>
+      </pc:sldChg>
+      <pc:sldChg chg="delSp new mod">
+        <pc:chgData name="Noritsuna Imamura" userId="5b2da16fa1785921" providerId="LiveId" clId="{33F32BBD-F384-5180-A48B-EBDC93943B01}" dt="2026-02-02T10:20:32.624" v="13" actId="478"/>
+        <pc:sldMkLst>
+          <pc:docMk/>
+          <pc:sldMk cId="428239958" sldId="4575"/>
+        </pc:sldMkLst>
         <pc:spChg chg="del">
-          <ac:chgData name="Noritsuna Imamura" userId="5b2da16fa1785921" providerId="LiveId" clId="{342DA2C4-B094-4B86-9045-6AA34CD7B848}" dt="2025-10-03T10:27:45.024" v="1" actId="478"/>
+          <ac:chgData name="Noritsuna Imamura" userId="5b2da16fa1785921" providerId="LiveId" clId="{33F32BBD-F384-5180-A48B-EBDC93943B01}" dt="2026-02-02T10:20:32.624" v="13" actId="478"/>
           <ac:spMkLst>
             <pc:docMk/>
-            <pc:sldMk cId="894218861" sldId="256"/>
-            <ac:spMk id="2" creationId="{69A40A6C-7941-1F40-64D5-191B46AC17A6}"/>
+            <pc:sldMk cId="428239958" sldId="4575"/>
+            <ac:spMk id="2" creationId="{C174D431-8002-FF66-6853-0B2E56B19762}"/>
           </ac:spMkLst>
         </pc:spChg>
         <pc:spChg chg="del">
-          <ac:chgData name="Noritsuna Imamura" userId="5b2da16fa1785921" providerId="LiveId" clId="{342DA2C4-B094-4B86-9045-6AA34CD7B848}" dt="2025-10-03T10:27:46.836" v="2" actId="478"/>
+          <ac:chgData name="Noritsuna Imamura" userId="5b2da16fa1785921" providerId="LiveId" clId="{33F32BBD-F384-5180-A48B-EBDC93943B01}" dt="2026-02-02T10:20:30.512" v="12" actId="478"/>
           <ac:spMkLst>
             <pc:docMk/>
-            <pc:sldMk cId="894218861" sldId="256"/>
-            <ac:spMk id="3" creationId="{2164A4D3-F0C9-847E-5AFF-B17BD43A0292}"/>
+            <pc:sldMk cId="428239958" sldId="4575"/>
+            <ac:spMk id="3" creationId="{CCDC161D-8741-C11B-0CFB-D71E6E303DA3}"/>
           </ac:spMkLst>
         </pc:spChg>
-        <pc:spChg chg="add mod">
-          <ac:chgData name="Noritsuna Imamura" userId="5b2da16fa1785921" providerId="LiveId" clId="{342DA2C4-B094-4B86-9045-6AA34CD7B848}" dt="2025-10-03T10:37:11.476" v="253" actId="14100"/>
+      </pc:sldChg>
+      <pc:sldChg chg="modSp add mod">
+        <pc:chgData name="Noritsuna Imamura" userId="5b2da16fa1785921" providerId="LiveId" clId="{33F32BBD-F384-5180-A48B-EBDC93943B01}" dt="2026-02-02T10:23:06.766" v="47" actId="20577"/>
+        <pc:sldMkLst>
+          <pc:docMk/>
+          <pc:sldMk cId="3404309810" sldId="4576"/>
+        </pc:sldMkLst>
+        <pc:spChg chg="mod">
+          <ac:chgData name="Noritsuna Imamura" userId="5b2da16fa1785921" providerId="LiveId" clId="{33F32BBD-F384-5180-A48B-EBDC93943B01}" dt="2026-02-02T10:23:06.766" v="47" actId="20577"/>
           <ac:spMkLst>
             <pc:docMk/>
-            <pc:sldMk cId="894218861" sldId="256"/>
-            <ac:spMk id="6" creationId="{D15BBACB-26FA-A22B-B408-15DE62132CA1}"/>
+            <pc:sldMk cId="3404309810" sldId="4576"/>
+            <ac:spMk id="3" creationId="{D389D4F6-8676-A3B4-0F0D-6DDCBF19EE90}"/>
           </ac:spMkLst>
         </pc:spChg>
-        <pc:spChg chg="add mod">
-          <ac:chgData name="Noritsuna Imamura" userId="5b2da16fa1785921" providerId="LiveId" clId="{342DA2C4-B094-4B86-9045-6AA34CD7B848}" dt="2025-10-03T10:37:06.586" v="251" actId="14100"/>
-          <ac:spMkLst>
+      </pc:sldChg>
+      <pc:sldMasterChg chg="delSldLayout">
+        <pc:chgData name="Noritsuna Imamura" userId="5b2da16fa1785921" providerId="LiveId" clId="{33F32BBD-F384-5180-A48B-EBDC93943B01}" dt="2026-02-02T10:20:12.841" v="9" actId="2696"/>
+        <pc:sldMasterMkLst>
+          <pc:docMk/>
+          <pc:sldMasterMk cId="887606969" sldId="2147483648"/>
+        </pc:sldMasterMkLst>
+        <pc:sldLayoutChg chg="del">
+          <pc:chgData name="Noritsuna Imamura" userId="5b2da16fa1785921" providerId="LiveId" clId="{33F32BBD-F384-5180-A48B-EBDC93943B01}" dt="2026-02-02T10:20:12.841" v="9" actId="2696"/>
+          <pc:sldLayoutMkLst>
             <pc:docMk/>
-            <pc:sldMk cId="894218861" sldId="256"/>
-            <ac:spMk id="7" creationId="{2BD01E7B-32A6-15B0-117B-61664081B268}"/>
-          </ac:spMkLst>
-        </pc:spChg>
-        <pc:spChg chg="add mod">
-          <ac:chgData name="Noritsuna Imamura" userId="5b2da16fa1785921" providerId="LiveId" clId="{342DA2C4-B094-4B86-9045-6AA34CD7B848}" dt="2025-10-03T10:31:43.398" v="138" actId="1076"/>
-          <ac:spMkLst>
-            <pc:docMk/>
-            <pc:sldMk cId="894218861" sldId="256"/>
-            <ac:spMk id="8" creationId="{BF7BEC2D-6EEE-6FED-D682-56387F3BC425}"/>
-          </ac:spMkLst>
-        </pc:spChg>
-        <pc:spChg chg="add mod">
-          <ac:chgData name="Noritsuna Imamura" userId="5b2da16fa1785921" providerId="LiveId" clId="{342DA2C4-B094-4B86-9045-6AA34CD7B848}" dt="2025-10-03T10:31:40.924" v="137" actId="14100"/>
-          <ac:spMkLst>
-            <pc:docMk/>
-            <pc:sldMk cId="894218861" sldId="256"/>
-            <ac:spMk id="9" creationId="{62397DC1-C408-ED43-74DF-290EE4AC9F8E}"/>
-          </ac:spMkLst>
-        </pc:spChg>
-        <pc:spChg chg="add mod">
-          <ac:chgData name="Noritsuna Imamura" userId="5b2da16fa1785921" providerId="LiveId" clId="{342DA2C4-B094-4B86-9045-6AA34CD7B848}" dt="2025-10-03T10:37:22.252" v="254" actId="2"/>
-          <ac:spMkLst>
-            <pc:docMk/>
-            <pc:sldMk cId="894218861" sldId="256"/>
-            <ac:spMk id="10" creationId="{92C893C3-8644-8CB4-8851-B3F090F6D0EC}"/>
-          </ac:spMkLst>
-        </pc:spChg>
-        <pc:spChg chg="add mod">
-          <ac:chgData name="Noritsuna Imamura" userId="5b2da16fa1785921" providerId="LiveId" clId="{342DA2C4-B094-4B86-9045-6AA34CD7B848}" dt="2025-10-03T10:37:22.823" v="255" actId="2"/>
-          <ac:spMkLst>
-            <pc:docMk/>
-            <pc:sldMk cId="894218861" sldId="256"/>
-            <ac:spMk id="11" creationId="{168B1E9A-01B3-3872-25EF-2A0A7C4F1CAA}"/>
-          </ac:spMkLst>
-        </pc:spChg>
-        <pc:spChg chg="add mod">
-          <ac:chgData name="Noritsuna Imamura" userId="5b2da16fa1785921" providerId="LiveId" clId="{342DA2C4-B094-4B86-9045-6AA34CD7B848}" dt="2025-10-03T10:37:23.319" v="256" actId="2"/>
-          <ac:spMkLst>
-            <pc:docMk/>
-            <pc:sldMk cId="894218861" sldId="256"/>
-            <ac:spMk id="12" creationId="{CAF6E551-9B51-E26D-1748-5D5DF566234B}"/>
-          </ac:spMkLst>
-        </pc:spChg>
-        <pc:spChg chg="add mod">
-          <ac:chgData name="Noritsuna Imamura" userId="5b2da16fa1785921" providerId="LiveId" clId="{342DA2C4-B094-4B86-9045-6AA34CD7B848}" dt="2025-10-03T10:33:12.131" v="162" actId="20577"/>
-          <ac:spMkLst>
-            <pc:docMk/>
-            <pc:sldMk cId="894218861" sldId="256"/>
-            <ac:spMk id="13" creationId="{D68D0FDE-0FBF-0FEF-B019-0F5A3C99A994}"/>
-          </ac:spMkLst>
-        </pc:spChg>
-        <pc:spChg chg="add mod">
-          <ac:chgData name="Noritsuna Imamura" userId="5b2da16fa1785921" providerId="LiveId" clId="{342DA2C4-B094-4B86-9045-6AA34CD7B848}" dt="2025-10-03T10:37:23.806" v="257" actId="2"/>
-          <ac:spMkLst>
-            <pc:docMk/>
-            <pc:sldMk cId="894218861" sldId="256"/>
-            <ac:spMk id="14" creationId="{792C02DC-BF1A-3368-D1B1-0C324F0DC0D8}"/>
-          </ac:spMkLst>
-        </pc:spChg>
-        <pc:spChg chg="add mod">
-          <ac:chgData name="Noritsuna Imamura" userId="5b2da16fa1785921" providerId="LiveId" clId="{342DA2C4-B094-4B86-9045-6AA34CD7B848}" dt="2025-10-03T10:37:24.285" v="258" actId="2"/>
-          <ac:spMkLst>
-            <pc:docMk/>
-            <pc:sldMk cId="894218861" sldId="256"/>
-            <ac:spMk id="15" creationId="{BED7CF1F-4E81-72CA-A573-1996BA12E357}"/>
-          </ac:spMkLst>
-        </pc:spChg>
-        <pc:spChg chg="add mod">
-          <ac:chgData name="Noritsuna Imamura" userId="5b2da16fa1785921" providerId="LiveId" clId="{342DA2C4-B094-4B86-9045-6AA34CD7B848}" dt="2025-10-03T10:37:24.768" v="259" actId="2"/>
-          <ac:spMkLst>
-            <pc:docMk/>
-            <pc:sldMk cId="894218861" sldId="256"/>
-            <ac:spMk id="16" creationId="{2244FD30-8F06-C395-AFB2-D30BA605974B}"/>
-          </ac:spMkLst>
-        </pc:spChg>
-        <pc:spChg chg="add mod">
-          <ac:chgData name="Noritsuna Imamura" userId="5b2da16fa1785921" providerId="LiveId" clId="{342DA2C4-B094-4B86-9045-6AA34CD7B848}" dt="2025-10-03T10:36:46.735" v="244" actId="14100"/>
-          <ac:spMkLst>
-            <pc:docMk/>
-            <pc:sldMk cId="894218861" sldId="256"/>
-            <ac:spMk id="17" creationId="{1469A96D-E7C4-BCB4-20AB-06F84984A2F7}"/>
-          </ac:spMkLst>
-        </pc:spChg>
-        <pc:spChg chg="add mod ord">
-          <ac:chgData name="Noritsuna Imamura" userId="5b2da16fa1785921" providerId="LiveId" clId="{342DA2C4-B094-4B86-9045-6AA34CD7B848}" dt="2025-10-04T01:39:12.230" v="267" actId="167"/>
-          <ac:spMkLst>
-            <pc:docMk/>
-            <pc:sldMk cId="894218861" sldId="256"/>
-            <ac:spMk id="18" creationId="{803E280D-FF49-489A-A461-BE3D3FCA007E}"/>
-          </ac:spMkLst>
-        </pc:spChg>
-        <pc:picChg chg="add mod ord">
-          <ac:chgData name="Noritsuna Imamura" userId="5b2da16fa1785921" providerId="LiveId" clId="{342DA2C4-B094-4B86-9045-6AA34CD7B848}" dt="2025-10-04T01:39:37.258" v="295" actId="1035"/>
-          <ac:picMkLst>
-            <pc:docMk/>
-            <pc:sldMk cId="894218861" sldId="256"/>
-            <ac:picMk id="3" creationId="{9DDCE544-DA3E-1982-117E-4E27B4442E04}"/>
-          </ac:picMkLst>
-        </pc:picChg>
-        <pc:picChg chg="add del mod">
-          <ac:chgData name="Noritsuna Imamura" userId="5b2da16fa1785921" providerId="LiveId" clId="{342DA2C4-B094-4B86-9045-6AA34CD7B848}" dt="2025-10-04T01:39:01.951" v="263" actId="478"/>
-          <ac:picMkLst>
-            <pc:docMk/>
-            <pc:sldMk cId="894218861" sldId="256"/>
-            <ac:picMk id="5" creationId="{1787CEDC-1DA6-431E-E315-3F85CC04A613}"/>
-          </ac:picMkLst>
-        </pc:picChg>
-      </pc:sldChg>
+            <pc:sldMasterMk cId="887606969" sldId="2147483648"/>
+            <pc:sldLayoutMk cId="2970899804" sldId="2147483664"/>
+          </pc:sldLayoutMkLst>
+        </pc:sldLayoutChg>
+      </pc:sldMasterChg>
     </pc:docChg>
   </pc:docChgLst>
 </pc:chgInfo>
+</file>
+
+<file path=ppt/notesMasters/notesMaster1.xml><?xml version="1.0" encoding="utf-8"?>
+<p:notesMaster xmlns:a="http://schemas.openxmlformats.org/drawingml/2006/main" xmlns:r="http://schemas.openxmlformats.org/officeDocument/2006/relationships" xmlns:p="http://schemas.openxmlformats.org/presentationml/2006/main">
+  <p:cSld>
+    <p:bg>
+      <p:bgRef idx="1001">
+        <a:schemeClr val="bg1"/>
+      </p:bgRef>
+    </p:bg>
+    <p:spTree>
+      <p:nvGrpSpPr>
+        <p:cNvPr id="1" name=""/>
+        <p:cNvGrpSpPr/>
+        <p:nvPr/>
+      </p:nvGrpSpPr>
+      <p:grpSpPr>
+        <a:xfrm>
+          <a:off x="0" y="0"/>
+          <a:ext cx="0" cy="0"/>
+          <a:chOff x="0" y="0"/>
+          <a:chExt cx="0" cy="0"/>
+        </a:xfrm>
+      </p:grpSpPr>
+      <p:sp>
+        <p:nvSpPr>
+          <p:cNvPr id="2" name="ヘッダー プレースホルダー 1"/>
+          <p:cNvSpPr>
+            <a:spLocks noGrp="1"/>
+          </p:cNvSpPr>
+          <p:nvPr>
+            <p:ph type="hdr" sz="quarter"/>
+          </p:nvPr>
+        </p:nvSpPr>
+        <p:spPr>
+          <a:xfrm>
+            <a:off x="0" y="0"/>
+            <a:ext cx="2971800" cy="458788"/>
+          </a:xfrm>
+          <a:prstGeom prst="rect">
+            <a:avLst/>
+          </a:prstGeom>
+        </p:spPr>
+        <p:txBody>
+          <a:bodyPr vert="horz" lIns="91440" tIns="45720" rIns="91440" bIns="45720" rtlCol="0"/>
+          <a:lstStyle>
+            <a:lvl1pPr algn="l">
+              <a:defRPr sz="1200"/>
+            </a:lvl1pPr>
+          </a:lstStyle>
+          <a:p>
+            <a:endParaRPr kumimoji="1" lang="ja-JP" altLang="en-US"/>
+          </a:p>
+        </p:txBody>
+      </p:sp>
+      <p:sp>
+        <p:nvSpPr>
+          <p:cNvPr id="3" name="日付プレースホルダー 2"/>
+          <p:cNvSpPr>
+            <a:spLocks noGrp="1"/>
+          </p:cNvSpPr>
+          <p:nvPr>
+            <p:ph type="dt" idx="1"/>
+          </p:nvPr>
+        </p:nvSpPr>
+        <p:spPr>
+          <a:xfrm>
+            <a:off x="3884613" y="0"/>
+            <a:ext cx="2971800" cy="458788"/>
+          </a:xfrm>
+          <a:prstGeom prst="rect">
+            <a:avLst/>
+          </a:prstGeom>
+        </p:spPr>
+        <p:txBody>
+          <a:bodyPr vert="horz" lIns="91440" tIns="45720" rIns="91440" bIns="45720" rtlCol="0"/>
+          <a:lstStyle>
+            <a:lvl1pPr algn="r">
+              <a:defRPr sz="1200"/>
+            </a:lvl1pPr>
+          </a:lstStyle>
+          <a:p>
+            <a:fld id="{79121326-0080-475F-B3A7-C8B8FA1FF850}" type="datetimeFigureOut">
+              <a:rPr kumimoji="1" lang="ja-JP" altLang="en-US" smtClean="0"/>
+              <a:t>2026/2/2</a:t>
+            </a:fld>
+            <a:endParaRPr kumimoji="1" lang="ja-JP" altLang="en-US"/>
+          </a:p>
+        </p:txBody>
+      </p:sp>
+      <p:sp>
+        <p:nvSpPr>
+          <p:cNvPr id="4" name="スライド イメージ プレースホルダー 3"/>
+          <p:cNvSpPr>
+            <a:spLocks noGrp="1" noRot="1" noChangeAspect="1"/>
+          </p:cNvSpPr>
+          <p:nvPr>
+            <p:ph type="sldImg" idx="2"/>
+          </p:nvPr>
+        </p:nvSpPr>
+        <p:spPr>
+          <a:xfrm>
+            <a:off x="685800" y="1143000"/>
+            <a:ext cx="5486400" cy="3086100"/>
+          </a:xfrm>
+          <a:prstGeom prst="rect">
+            <a:avLst/>
+          </a:prstGeom>
+          <a:noFill/>
+          <a:ln w="12700">
+            <a:solidFill>
+              <a:prstClr val="black"/>
+            </a:solidFill>
+          </a:ln>
+        </p:spPr>
+        <p:txBody>
+          <a:bodyPr vert="horz" lIns="91440" tIns="45720" rIns="91440" bIns="45720" rtlCol="0" anchor="ctr"/>
+          <a:lstStyle/>
+          <a:p>
+            <a:endParaRPr lang="ja-JP" altLang="en-US"/>
+          </a:p>
+        </p:txBody>
+      </p:sp>
+      <p:sp>
+        <p:nvSpPr>
+          <p:cNvPr id="5" name="ノート プレースホルダー 4"/>
+          <p:cNvSpPr>
+            <a:spLocks noGrp="1"/>
+          </p:cNvSpPr>
+          <p:nvPr>
+            <p:ph type="body" sz="quarter" idx="3"/>
+          </p:nvPr>
+        </p:nvSpPr>
+        <p:spPr>
+          <a:xfrm>
+            <a:off x="685800" y="4400550"/>
+            <a:ext cx="5486400" cy="3600450"/>
+          </a:xfrm>
+          <a:prstGeom prst="rect">
+            <a:avLst/>
+          </a:prstGeom>
+        </p:spPr>
+        <p:txBody>
+          <a:bodyPr vert="horz" lIns="91440" tIns="45720" rIns="91440" bIns="45720" rtlCol="0"/>
+          <a:lstStyle/>
+          <a:p>
+            <a:pPr lvl="0"/>
+            <a:r>
+              <a:rPr kumimoji="1" lang="ja-JP" altLang="en-US"/>
+              <a:t>マスター テキストの書式設定</a:t>
+            </a:r>
+          </a:p>
+          <a:p>
+            <a:pPr lvl="1"/>
+            <a:r>
+              <a:rPr kumimoji="1" lang="ja-JP" altLang="en-US"/>
+              <a:t>第 </a:t>
+            </a:r>
+            <a:r>
+              <a:rPr kumimoji="1" lang="en-US" altLang="ja-JP"/>
+              <a:t>2 </a:t>
+            </a:r>
+            <a:r>
+              <a:rPr kumimoji="1" lang="ja-JP" altLang="en-US"/>
+              <a:t>レベル</a:t>
+            </a:r>
+          </a:p>
+          <a:p>
+            <a:pPr lvl="2"/>
+            <a:r>
+              <a:rPr kumimoji="1" lang="ja-JP" altLang="en-US"/>
+              <a:t>第 </a:t>
+            </a:r>
+            <a:r>
+              <a:rPr kumimoji="1" lang="en-US" altLang="ja-JP"/>
+              <a:t>3 </a:t>
+            </a:r>
+            <a:r>
+              <a:rPr kumimoji="1" lang="ja-JP" altLang="en-US"/>
+              <a:t>レベル</a:t>
+            </a:r>
+          </a:p>
+          <a:p>
+            <a:pPr lvl="3"/>
+            <a:r>
+              <a:rPr kumimoji="1" lang="ja-JP" altLang="en-US"/>
+              <a:t>第 </a:t>
+            </a:r>
+            <a:r>
+              <a:rPr kumimoji="1" lang="en-US" altLang="ja-JP"/>
+              <a:t>4 </a:t>
+            </a:r>
+            <a:r>
+              <a:rPr kumimoji="1" lang="ja-JP" altLang="en-US"/>
+              <a:t>レベル</a:t>
+            </a:r>
+          </a:p>
+          <a:p>
+            <a:pPr lvl="4"/>
+            <a:r>
+              <a:rPr kumimoji="1" lang="ja-JP" altLang="en-US"/>
+              <a:t>第 </a:t>
+            </a:r>
+            <a:r>
+              <a:rPr kumimoji="1" lang="en-US" altLang="ja-JP"/>
+              <a:t>5 </a:t>
+            </a:r>
+            <a:r>
+              <a:rPr kumimoji="1" lang="ja-JP" altLang="en-US"/>
+              <a:t>レベル</a:t>
+            </a:r>
+          </a:p>
+        </p:txBody>
+      </p:sp>
+      <p:sp>
+        <p:nvSpPr>
+          <p:cNvPr id="6" name="フッター プレースホルダー 5"/>
+          <p:cNvSpPr>
+            <a:spLocks noGrp="1"/>
+          </p:cNvSpPr>
+          <p:nvPr>
+            <p:ph type="ftr" sz="quarter" idx="4"/>
+          </p:nvPr>
+        </p:nvSpPr>
+        <p:spPr>
+          <a:xfrm>
+            <a:off x="0" y="8685213"/>
+            <a:ext cx="2971800" cy="458787"/>
+          </a:xfrm>
+          <a:prstGeom prst="rect">
+            <a:avLst/>
+          </a:prstGeom>
+        </p:spPr>
+        <p:txBody>
+          <a:bodyPr vert="horz" lIns="91440" tIns="45720" rIns="91440" bIns="45720" rtlCol="0" anchor="b"/>
+          <a:lstStyle>
+            <a:lvl1pPr algn="l">
+              <a:defRPr sz="1200"/>
+            </a:lvl1pPr>
+          </a:lstStyle>
+          <a:p>
+            <a:endParaRPr kumimoji="1" lang="ja-JP" altLang="en-US"/>
+          </a:p>
+        </p:txBody>
+      </p:sp>
+      <p:sp>
+        <p:nvSpPr>
+          <p:cNvPr id="7" name="スライド番号プレースホルダー 6"/>
+          <p:cNvSpPr>
+            <a:spLocks noGrp="1"/>
+          </p:cNvSpPr>
+          <p:nvPr>
+            <p:ph type="sldNum" sz="quarter" idx="5"/>
+          </p:nvPr>
+        </p:nvSpPr>
+        <p:spPr>
+          <a:xfrm>
+            <a:off x="3884613" y="8685213"/>
+            <a:ext cx="2971800" cy="458787"/>
+          </a:xfrm>
+          <a:prstGeom prst="rect">
+            <a:avLst/>
+          </a:prstGeom>
+        </p:spPr>
+        <p:txBody>
+          <a:bodyPr vert="horz" lIns="91440" tIns="45720" rIns="91440" bIns="45720" rtlCol="0" anchor="b"/>
+          <a:lstStyle>
+            <a:lvl1pPr algn="r">
+              <a:defRPr sz="1200"/>
+            </a:lvl1pPr>
+          </a:lstStyle>
+          <a:p>
+            <a:fld id="{2B7622CD-9DB7-4903-8997-52FC5A06B5C7}" type="slidenum">
+              <a:rPr kumimoji="1" lang="ja-JP" altLang="en-US" smtClean="0"/>
+              <a:t>‹#›</a:t>
+            </a:fld>
+            <a:endParaRPr kumimoji="1" lang="ja-JP" altLang="en-US"/>
+          </a:p>
+        </p:txBody>
+      </p:sp>
+    </p:spTree>
+    <p:extLst>
+      <p:ext uri="{BB962C8B-B14F-4D97-AF65-F5344CB8AC3E}">
+        <p14:creationId xmlns:p14="http://schemas.microsoft.com/office/powerpoint/2010/main" val="2105467062"/>
+      </p:ext>
+    </p:extLst>
+  </p:cSld>
+  <p:clrMap bg1="lt1" tx1="dk1" bg2="lt2" tx2="dk2" accent1="accent1" accent2="accent2" accent3="accent3" accent4="accent4" accent5="accent5" accent6="accent6" hlink="hlink" folHlink="folHlink"/>
+  <p:notesStyle>
+    <a:lvl1pPr marL="0" algn="l" defTabSz="914400" rtl="0" eaLnBrk="1" latinLnBrk="0" hangingPunct="1">
+      <a:defRPr kumimoji="1" sz="1200" kern="1200">
+        <a:solidFill>
+          <a:schemeClr val="tx1"/>
+        </a:solidFill>
+        <a:latin typeface="+mn-lt"/>
+        <a:ea typeface="+mn-ea"/>
+        <a:cs typeface="+mn-cs"/>
+      </a:defRPr>
+    </a:lvl1pPr>
+    <a:lvl2pPr marL="457200" algn="l" defTabSz="914400" rtl="0" eaLnBrk="1" latinLnBrk="0" hangingPunct="1">
+      <a:defRPr kumimoji="1" sz="1200" kern="1200">
+        <a:solidFill>
+          <a:schemeClr val="tx1"/>
+        </a:solidFill>
+        <a:latin typeface="+mn-lt"/>
+        <a:ea typeface="+mn-ea"/>
+        <a:cs typeface="+mn-cs"/>
+      </a:defRPr>
+    </a:lvl2pPr>
+    <a:lvl3pPr marL="914400" algn="l" defTabSz="914400" rtl="0" eaLnBrk="1" latinLnBrk="0" hangingPunct="1">
+      <a:defRPr kumimoji="1" sz="1200" kern="1200">
+        <a:solidFill>
+          <a:schemeClr val="tx1"/>
+        </a:solidFill>
+        <a:latin typeface="+mn-lt"/>
+        <a:ea typeface="+mn-ea"/>
+        <a:cs typeface="+mn-cs"/>
+      </a:defRPr>
+    </a:lvl3pPr>
+    <a:lvl4pPr marL="1371600" algn="l" defTabSz="914400" rtl="0" eaLnBrk="1" latinLnBrk="0" hangingPunct="1">
+      <a:defRPr kumimoji="1" sz="1200" kern="1200">
+        <a:solidFill>
+          <a:schemeClr val="tx1"/>
+        </a:solidFill>
+        <a:latin typeface="+mn-lt"/>
+        <a:ea typeface="+mn-ea"/>
+        <a:cs typeface="+mn-cs"/>
+      </a:defRPr>
+    </a:lvl4pPr>
+    <a:lvl5pPr marL="1828800" algn="l" defTabSz="914400" rtl="0" eaLnBrk="1" latinLnBrk="0" hangingPunct="1">
+      <a:defRPr kumimoji="1" sz="1200" kern="1200">
+        <a:solidFill>
+          <a:schemeClr val="tx1"/>
+        </a:solidFill>
+        <a:latin typeface="+mn-lt"/>
+        <a:ea typeface="+mn-ea"/>
+        <a:cs typeface="+mn-cs"/>
+      </a:defRPr>
+    </a:lvl5pPr>
+    <a:lvl6pPr marL="2286000" algn="l" defTabSz="914400" rtl="0" eaLnBrk="1" latinLnBrk="0" hangingPunct="1">
+      <a:defRPr kumimoji="1" sz="1200" kern="1200">
+        <a:solidFill>
+          <a:schemeClr val="tx1"/>
+        </a:solidFill>
+        <a:latin typeface="+mn-lt"/>
+        <a:ea typeface="+mn-ea"/>
+        <a:cs typeface="+mn-cs"/>
+      </a:defRPr>
+    </a:lvl6pPr>
+    <a:lvl7pPr marL="2743200" algn="l" defTabSz="914400" rtl="0" eaLnBrk="1" latinLnBrk="0" hangingPunct="1">
+      <a:defRPr kumimoji="1" sz="1200" kern="1200">
+        <a:solidFill>
+          <a:schemeClr val="tx1"/>
+        </a:solidFill>
+        <a:latin typeface="+mn-lt"/>
+        <a:ea typeface="+mn-ea"/>
+        <a:cs typeface="+mn-cs"/>
+      </a:defRPr>
+    </a:lvl7pPr>
+    <a:lvl8pPr marL="3200400" algn="l" defTabSz="914400" rtl="0" eaLnBrk="1" latinLnBrk="0" hangingPunct="1">
+      <a:defRPr kumimoji="1" sz="1200" kern="1200">
+        <a:solidFill>
+          <a:schemeClr val="tx1"/>
+        </a:solidFill>
+        <a:latin typeface="+mn-lt"/>
+        <a:ea typeface="+mn-ea"/>
+        <a:cs typeface="+mn-cs"/>
+      </a:defRPr>
+    </a:lvl8pPr>
+    <a:lvl9pPr marL="3657600" algn="l" defTabSz="914400" rtl="0" eaLnBrk="1" latinLnBrk="0" hangingPunct="1">
+      <a:defRPr kumimoji="1" sz="1200" kern="1200">
+        <a:solidFill>
+          <a:schemeClr val="tx1"/>
+        </a:solidFill>
+        <a:latin typeface="+mn-lt"/>
+        <a:ea typeface="+mn-ea"/>
+        <a:cs typeface="+mn-cs"/>
+      </a:defRPr>
+    </a:lvl9pPr>
+  </p:notesStyle>
+</p:notesMaster>
 </file>
 
 <file path=ppt/slideLayouts/slideLayout1.xml><?xml version="1.0" encoding="utf-8"?>
@@ -299,7 +878,7 @@
           <p:cNvPr id="2" name="タイトル 1">
             <a:extLst>
               <a:ext uri="{FF2B5EF4-FFF2-40B4-BE49-F238E27FC236}">
-                <a16:creationId xmlns:a16="http://schemas.microsoft.com/office/drawing/2014/main" id="{9FA256AB-7761-4630-62A0-98B9141DD673}"/>
+                <a16:creationId xmlns:a16="http://schemas.microsoft.com/office/drawing/2014/main" id="{6FC93F5D-5A8F-FDB8-2312-7C365AD8B8EC}"/>
               </a:ext>
             </a:extLst>
           </p:cNvPr>
@@ -336,7 +915,7 @@
           <p:cNvPr id="3" name="字幕 2">
             <a:extLst>
               <a:ext uri="{FF2B5EF4-FFF2-40B4-BE49-F238E27FC236}">
-                <a16:creationId xmlns:a16="http://schemas.microsoft.com/office/drawing/2014/main" id="{E10428A1-3326-F3ED-BBC0-BA0633AA0008}"/>
+                <a16:creationId xmlns:a16="http://schemas.microsoft.com/office/drawing/2014/main" id="{C3FEFC5D-E911-2492-EBF4-7C560C93523F}"/>
               </a:ext>
             </a:extLst>
           </p:cNvPr>
@@ -406,7 +985,7 @@
           <p:cNvPr id="4" name="日付プレースホルダー 3">
             <a:extLst>
               <a:ext uri="{FF2B5EF4-FFF2-40B4-BE49-F238E27FC236}">
-                <a16:creationId xmlns:a16="http://schemas.microsoft.com/office/drawing/2014/main" id="{60FBA5BC-C543-FB87-8830-9440DE2443FF}"/>
+                <a16:creationId xmlns:a16="http://schemas.microsoft.com/office/drawing/2014/main" id="{7D3B3258-3956-C471-1ADB-DB8BF6962114}"/>
               </a:ext>
             </a:extLst>
           </p:cNvPr>
@@ -422,9 +1001,9 @@
           <a:bodyPr/>
           <a:lstStyle/>
           <a:p>
-            <a:fld id="{306D8DAA-D7DB-4FD6-93C2-8F8A77DFB3C0}" type="datetimeFigureOut">
+            <a:fld id="{6038B33F-4E30-40CF-8982-DA02651F1878}" type="datetimeFigureOut">
               <a:rPr kumimoji="1" lang="ja-JP" altLang="en-US" smtClean="0"/>
-              <a:t>2025/10/4</a:t>
+              <a:t>2026/2/2</a:t>
             </a:fld>
             <a:endParaRPr kumimoji="1" lang="ja-JP" altLang="en-US"/>
           </a:p>
@@ -435,7 +1014,7 @@
           <p:cNvPr id="5" name="フッター プレースホルダー 4">
             <a:extLst>
               <a:ext uri="{FF2B5EF4-FFF2-40B4-BE49-F238E27FC236}">
-                <a16:creationId xmlns:a16="http://schemas.microsoft.com/office/drawing/2014/main" id="{520D388B-5AD2-B535-9BD7-C6F74CFB7157}"/>
+                <a16:creationId xmlns:a16="http://schemas.microsoft.com/office/drawing/2014/main" id="{592FA95B-9B52-9CD7-0253-D859773DEF79}"/>
               </a:ext>
             </a:extLst>
           </p:cNvPr>
@@ -460,7 +1039,7 @@
           <p:cNvPr id="6" name="スライド番号プレースホルダー 5">
             <a:extLst>
               <a:ext uri="{FF2B5EF4-FFF2-40B4-BE49-F238E27FC236}">
-                <a16:creationId xmlns:a16="http://schemas.microsoft.com/office/drawing/2014/main" id="{11FE5BFC-F592-E743-53BA-143D329460DC}"/>
+                <a16:creationId xmlns:a16="http://schemas.microsoft.com/office/drawing/2014/main" id="{7B22BE04-F456-2AE2-4548-B04DECF62EAD}"/>
               </a:ext>
             </a:extLst>
           </p:cNvPr>
@@ -476,7 +1055,7 @@
           <a:bodyPr/>
           <a:lstStyle/>
           <a:p>
-            <a:fld id="{D3443494-0FF6-4EB1-BD44-CC717950BE1D}" type="slidenum">
+            <a:fld id="{7B41D653-1AB0-450A-82AC-266BF7C6548E}" type="slidenum">
               <a:rPr kumimoji="1" lang="ja-JP" altLang="en-US" smtClean="0"/>
               <a:t>‹#›</a:t>
             </a:fld>
@@ -487,7 +1066,7 @@
     </p:spTree>
     <p:extLst>
       <p:ext uri="{BB962C8B-B14F-4D97-AF65-F5344CB8AC3E}">
-        <p14:creationId xmlns:p14="http://schemas.microsoft.com/office/powerpoint/2010/main" val="197535806"/>
+        <p14:creationId xmlns:p14="http://schemas.microsoft.com/office/powerpoint/2010/main" val="4002356245"/>
       </p:ext>
     </p:extLst>
   </p:cSld>
@@ -519,7 +1098,7 @@
           <p:cNvPr id="2" name="タイトル 1">
             <a:extLst>
               <a:ext uri="{FF2B5EF4-FFF2-40B4-BE49-F238E27FC236}">
-                <a16:creationId xmlns:a16="http://schemas.microsoft.com/office/drawing/2014/main" id="{5CFBCF89-AE73-82D7-0176-657A031E01F7}"/>
+                <a16:creationId xmlns:a16="http://schemas.microsoft.com/office/drawing/2014/main" id="{24257FDA-8B10-4222-3F59-DAB8A187DA57}"/>
               </a:ext>
             </a:extLst>
           </p:cNvPr>
@@ -547,7 +1126,7 @@
           <p:cNvPr id="3" name="縦書きテキスト プレースホルダー 2">
             <a:extLst>
               <a:ext uri="{FF2B5EF4-FFF2-40B4-BE49-F238E27FC236}">
-                <a16:creationId xmlns:a16="http://schemas.microsoft.com/office/drawing/2014/main" id="{A1D3778B-3249-12EA-7255-22C7D1CC55B9}"/>
+                <a16:creationId xmlns:a16="http://schemas.microsoft.com/office/drawing/2014/main" id="{4E2089F2-3262-40ED-F06D-E1517651639C}"/>
               </a:ext>
             </a:extLst>
           </p:cNvPr>
@@ -636,7 +1215,7 @@
           <p:cNvPr id="4" name="日付プレースホルダー 3">
             <a:extLst>
               <a:ext uri="{FF2B5EF4-FFF2-40B4-BE49-F238E27FC236}">
-                <a16:creationId xmlns:a16="http://schemas.microsoft.com/office/drawing/2014/main" id="{80712FF2-6D29-96C2-25FA-51C94E6ECFB2}"/>
+                <a16:creationId xmlns:a16="http://schemas.microsoft.com/office/drawing/2014/main" id="{9C9F5A08-024F-5D32-D108-70A8B5686917}"/>
               </a:ext>
             </a:extLst>
           </p:cNvPr>
@@ -652,9 +1231,9 @@
           <a:bodyPr/>
           <a:lstStyle/>
           <a:p>
-            <a:fld id="{306D8DAA-D7DB-4FD6-93C2-8F8A77DFB3C0}" type="datetimeFigureOut">
+            <a:fld id="{6038B33F-4E30-40CF-8982-DA02651F1878}" type="datetimeFigureOut">
               <a:rPr kumimoji="1" lang="ja-JP" altLang="en-US" smtClean="0"/>
-              <a:t>2025/10/4</a:t>
+              <a:t>2026/2/2</a:t>
             </a:fld>
             <a:endParaRPr kumimoji="1" lang="ja-JP" altLang="en-US"/>
           </a:p>
@@ -665,7 +1244,7 @@
           <p:cNvPr id="5" name="フッター プレースホルダー 4">
             <a:extLst>
               <a:ext uri="{FF2B5EF4-FFF2-40B4-BE49-F238E27FC236}">
-                <a16:creationId xmlns:a16="http://schemas.microsoft.com/office/drawing/2014/main" id="{B6C66440-FAE5-6F0C-BD09-DD33E300258F}"/>
+                <a16:creationId xmlns:a16="http://schemas.microsoft.com/office/drawing/2014/main" id="{FE90CA08-2B2E-4DB2-C52F-6891A4D299D1}"/>
               </a:ext>
             </a:extLst>
           </p:cNvPr>
@@ -690,7 +1269,7 @@
           <p:cNvPr id="6" name="スライド番号プレースホルダー 5">
             <a:extLst>
               <a:ext uri="{FF2B5EF4-FFF2-40B4-BE49-F238E27FC236}">
-                <a16:creationId xmlns:a16="http://schemas.microsoft.com/office/drawing/2014/main" id="{64603AE4-7DA9-0A74-DE46-806A138AFDAC}"/>
+                <a16:creationId xmlns:a16="http://schemas.microsoft.com/office/drawing/2014/main" id="{A58F03D2-F662-D11F-B767-105EA4B8D4D3}"/>
               </a:ext>
             </a:extLst>
           </p:cNvPr>
@@ -706,7 +1285,7 @@
           <a:bodyPr/>
           <a:lstStyle/>
           <a:p>
-            <a:fld id="{D3443494-0FF6-4EB1-BD44-CC717950BE1D}" type="slidenum">
+            <a:fld id="{7B41D653-1AB0-450A-82AC-266BF7C6548E}" type="slidenum">
               <a:rPr kumimoji="1" lang="ja-JP" altLang="en-US" smtClean="0"/>
               <a:t>‹#›</a:t>
             </a:fld>
@@ -717,7 +1296,7 @@
     </p:spTree>
     <p:extLst>
       <p:ext uri="{BB962C8B-B14F-4D97-AF65-F5344CB8AC3E}">
-        <p14:creationId xmlns:p14="http://schemas.microsoft.com/office/powerpoint/2010/main" val="3393707582"/>
+        <p14:creationId xmlns:p14="http://schemas.microsoft.com/office/powerpoint/2010/main" val="1302184619"/>
       </p:ext>
     </p:extLst>
   </p:cSld>
@@ -749,7 +1328,7 @@
           <p:cNvPr id="2" name="縦書きタイトル 1">
             <a:extLst>
               <a:ext uri="{FF2B5EF4-FFF2-40B4-BE49-F238E27FC236}">
-                <a16:creationId xmlns:a16="http://schemas.microsoft.com/office/drawing/2014/main" id="{E5267AA7-62AC-16BB-E7D2-186ECEE5FA94}"/>
+                <a16:creationId xmlns:a16="http://schemas.microsoft.com/office/drawing/2014/main" id="{D3D17F1B-6923-610E-A2F0-00E67DDF9719}"/>
               </a:ext>
             </a:extLst>
           </p:cNvPr>
@@ -782,7 +1361,7 @@
           <p:cNvPr id="3" name="縦書きテキスト プレースホルダー 2">
             <a:extLst>
               <a:ext uri="{FF2B5EF4-FFF2-40B4-BE49-F238E27FC236}">
-                <a16:creationId xmlns:a16="http://schemas.microsoft.com/office/drawing/2014/main" id="{5B7E90A1-2995-3F10-2CF1-9D0E8A47174C}"/>
+                <a16:creationId xmlns:a16="http://schemas.microsoft.com/office/drawing/2014/main" id="{4FEFECBA-16C2-120C-7835-BFE596806005}"/>
               </a:ext>
             </a:extLst>
           </p:cNvPr>
@@ -876,7 +1455,7 @@
           <p:cNvPr id="4" name="日付プレースホルダー 3">
             <a:extLst>
               <a:ext uri="{FF2B5EF4-FFF2-40B4-BE49-F238E27FC236}">
-                <a16:creationId xmlns:a16="http://schemas.microsoft.com/office/drawing/2014/main" id="{8715A015-B2C7-6142-C4EE-F08EA51574FD}"/>
+                <a16:creationId xmlns:a16="http://schemas.microsoft.com/office/drawing/2014/main" id="{1DC56837-B10D-939E-7AF1-0F15E10B0593}"/>
               </a:ext>
             </a:extLst>
           </p:cNvPr>
@@ -892,9 +1471,9 @@
           <a:bodyPr/>
           <a:lstStyle/>
           <a:p>
-            <a:fld id="{306D8DAA-D7DB-4FD6-93C2-8F8A77DFB3C0}" type="datetimeFigureOut">
+            <a:fld id="{6038B33F-4E30-40CF-8982-DA02651F1878}" type="datetimeFigureOut">
               <a:rPr kumimoji="1" lang="ja-JP" altLang="en-US" smtClean="0"/>
-              <a:t>2025/10/4</a:t>
+              <a:t>2026/2/2</a:t>
             </a:fld>
             <a:endParaRPr kumimoji="1" lang="ja-JP" altLang="en-US"/>
           </a:p>
@@ -905,7 +1484,7 @@
           <p:cNvPr id="5" name="フッター プレースホルダー 4">
             <a:extLst>
               <a:ext uri="{FF2B5EF4-FFF2-40B4-BE49-F238E27FC236}">
-                <a16:creationId xmlns:a16="http://schemas.microsoft.com/office/drawing/2014/main" id="{E934ADA9-05D7-A01D-1CC3-69AE7AD4E73B}"/>
+                <a16:creationId xmlns:a16="http://schemas.microsoft.com/office/drawing/2014/main" id="{C8400E88-F4FB-BA69-F430-2AAEFF66AC61}"/>
               </a:ext>
             </a:extLst>
           </p:cNvPr>
@@ -930,7 +1509,7 @@
           <p:cNvPr id="6" name="スライド番号プレースホルダー 5">
             <a:extLst>
               <a:ext uri="{FF2B5EF4-FFF2-40B4-BE49-F238E27FC236}">
-                <a16:creationId xmlns:a16="http://schemas.microsoft.com/office/drawing/2014/main" id="{7C04A978-E9E9-3A14-F7FC-0CEEB9F7CC57}"/>
+                <a16:creationId xmlns:a16="http://schemas.microsoft.com/office/drawing/2014/main" id="{CFA45F3F-E688-8178-C24F-80B282347306}"/>
               </a:ext>
             </a:extLst>
           </p:cNvPr>
@@ -946,7 +1525,7 @@
           <a:bodyPr/>
           <a:lstStyle/>
           <a:p>
-            <a:fld id="{D3443494-0FF6-4EB1-BD44-CC717950BE1D}" type="slidenum">
+            <a:fld id="{7B41D653-1AB0-450A-82AC-266BF7C6548E}" type="slidenum">
               <a:rPr kumimoji="1" lang="ja-JP" altLang="en-US" smtClean="0"/>
               <a:t>‹#›</a:t>
             </a:fld>
@@ -957,7 +1536,7 @@
     </p:spTree>
     <p:extLst>
       <p:ext uri="{BB962C8B-B14F-4D97-AF65-F5344CB8AC3E}">
-        <p14:creationId xmlns:p14="http://schemas.microsoft.com/office/powerpoint/2010/main" val="3048379311"/>
+        <p14:creationId xmlns:p14="http://schemas.microsoft.com/office/powerpoint/2010/main" val="2277533278"/>
       </p:ext>
     </p:extLst>
   </p:cSld>
@@ -989,7 +1568,7 @@
           <p:cNvPr id="2" name="タイトル 1">
             <a:extLst>
               <a:ext uri="{FF2B5EF4-FFF2-40B4-BE49-F238E27FC236}">
-                <a16:creationId xmlns:a16="http://schemas.microsoft.com/office/drawing/2014/main" id="{94375616-1E32-482C-71C6-2A914A906914}"/>
+                <a16:creationId xmlns:a16="http://schemas.microsoft.com/office/drawing/2014/main" id="{BBFAF400-16E7-E995-08C1-2C0218762E4A}"/>
               </a:ext>
             </a:extLst>
           </p:cNvPr>
@@ -1017,7 +1596,7 @@
           <p:cNvPr id="3" name="コンテンツ プレースホルダー 2">
             <a:extLst>
               <a:ext uri="{FF2B5EF4-FFF2-40B4-BE49-F238E27FC236}">
-                <a16:creationId xmlns:a16="http://schemas.microsoft.com/office/drawing/2014/main" id="{F5624384-D580-1A34-8FC3-9995FA8BDB6B}"/>
+                <a16:creationId xmlns:a16="http://schemas.microsoft.com/office/drawing/2014/main" id="{A63EBF62-8C7A-7C59-44A8-8823C46B9830}"/>
               </a:ext>
             </a:extLst>
           </p:cNvPr>
@@ -1106,7 +1685,7 @@
           <p:cNvPr id="4" name="日付プレースホルダー 3">
             <a:extLst>
               <a:ext uri="{FF2B5EF4-FFF2-40B4-BE49-F238E27FC236}">
-                <a16:creationId xmlns:a16="http://schemas.microsoft.com/office/drawing/2014/main" id="{71484904-2AB5-9E11-DFD3-6F82618C5392}"/>
+                <a16:creationId xmlns:a16="http://schemas.microsoft.com/office/drawing/2014/main" id="{FDC12D1F-438B-987B-0E13-209BF4756154}"/>
               </a:ext>
             </a:extLst>
           </p:cNvPr>
@@ -1122,9 +1701,9 @@
           <a:bodyPr/>
           <a:lstStyle/>
           <a:p>
-            <a:fld id="{306D8DAA-D7DB-4FD6-93C2-8F8A77DFB3C0}" type="datetimeFigureOut">
+            <a:fld id="{6038B33F-4E30-40CF-8982-DA02651F1878}" type="datetimeFigureOut">
               <a:rPr kumimoji="1" lang="ja-JP" altLang="en-US" smtClean="0"/>
-              <a:t>2025/10/4</a:t>
+              <a:t>2026/2/2</a:t>
             </a:fld>
             <a:endParaRPr kumimoji="1" lang="ja-JP" altLang="en-US"/>
           </a:p>
@@ -1135,7 +1714,7 @@
           <p:cNvPr id="5" name="フッター プレースホルダー 4">
             <a:extLst>
               <a:ext uri="{FF2B5EF4-FFF2-40B4-BE49-F238E27FC236}">
-                <a16:creationId xmlns:a16="http://schemas.microsoft.com/office/drawing/2014/main" id="{B752E689-2D21-D68F-56DC-E144EF969E3D}"/>
+                <a16:creationId xmlns:a16="http://schemas.microsoft.com/office/drawing/2014/main" id="{2F3850D2-C198-C3DE-5F3E-A90C2CDBAC75}"/>
               </a:ext>
             </a:extLst>
           </p:cNvPr>
@@ -1160,7 +1739,7 @@
           <p:cNvPr id="6" name="スライド番号プレースホルダー 5">
             <a:extLst>
               <a:ext uri="{FF2B5EF4-FFF2-40B4-BE49-F238E27FC236}">
-                <a16:creationId xmlns:a16="http://schemas.microsoft.com/office/drawing/2014/main" id="{E3BEAE3B-5A28-8B56-28A0-AFC6E254C529}"/>
+                <a16:creationId xmlns:a16="http://schemas.microsoft.com/office/drawing/2014/main" id="{28CFAF48-9A80-07F4-6313-B54A98BC9D25}"/>
               </a:ext>
             </a:extLst>
           </p:cNvPr>
@@ -1176,7 +1755,7 @@
           <a:bodyPr/>
           <a:lstStyle/>
           <a:p>
-            <a:fld id="{D3443494-0FF6-4EB1-BD44-CC717950BE1D}" type="slidenum">
+            <a:fld id="{7B41D653-1AB0-450A-82AC-266BF7C6548E}" type="slidenum">
               <a:rPr kumimoji="1" lang="ja-JP" altLang="en-US" smtClean="0"/>
               <a:t>‹#›</a:t>
             </a:fld>
@@ -1187,7 +1766,7 @@
     </p:spTree>
     <p:extLst>
       <p:ext uri="{BB962C8B-B14F-4D97-AF65-F5344CB8AC3E}">
-        <p14:creationId xmlns:p14="http://schemas.microsoft.com/office/powerpoint/2010/main" val="4033611465"/>
+        <p14:creationId xmlns:p14="http://schemas.microsoft.com/office/powerpoint/2010/main" val="4213306750"/>
       </p:ext>
     </p:extLst>
   </p:cSld>
@@ -1219,7 +1798,7 @@
           <p:cNvPr id="2" name="タイトル 1">
             <a:extLst>
               <a:ext uri="{FF2B5EF4-FFF2-40B4-BE49-F238E27FC236}">
-                <a16:creationId xmlns:a16="http://schemas.microsoft.com/office/drawing/2014/main" id="{DB678E9A-C0D6-80E3-62E1-B1F43CA6BAF0}"/>
+                <a16:creationId xmlns:a16="http://schemas.microsoft.com/office/drawing/2014/main" id="{3E17D37A-2BED-2A6D-3DC1-3366B2B98CB2}"/>
               </a:ext>
             </a:extLst>
           </p:cNvPr>
@@ -1256,7 +1835,7 @@
           <p:cNvPr id="3" name="テキスト プレースホルダー 2">
             <a:extLst>
               <a:ext uri="{FF2B5EF4-FFF2-40B4-BE49-F238E27FC236}">
-                <a16:creationId xmlns:a16="http://schemas.microsoft.com/office/drawing/2014/main" id="{181117B7-968A-5CE7-E21B-BC798A1991B3}"/>
+                <a16:creationId xmlns:a16="http://schemas.microsoft.com/office/drawing/2014/main" id="{829E5F7D-DDFE-F9E4-DD54-378E23232FD9}"/>
               </a:ext>
             </a:extLst>
           </p:cNvPr>
@@ -1381,7 +1960,7 @@
           <p:cNvPr id="4" name="日付プレースホルダー 3">
             <a:extLst>
               <a:ext uri="{FF2B5EF4-FFF2-40B4-BE49-F238E27FC236}">
-                <a16:creationId xmlns:a16="http://schemas.microsoft.com/office/drawing/2014/main" id="{BE5DC3E1-E4BC-500E-04BD-F60075E3A50A}"/>
+                <a16:creationId xmlns:a16="http://schemas.microsoft.com/office/drawing/2014/main" id="{E4746527-D040-5443-0177-6E40053F588C}"/>
               </a:ext>
             </a:extLst>
           </p:cNvPr>
@@ -1397,9 +1976,9 @@
           <a:bodyPr/>
           <a:lstStyle/>
           <a:p>
-            <a:fld id="{306D8DAA-D7DB-4FD6-93C2-8F8A77DFB3C0}" type="datetimeFigureOut">
+            <a:fld id="{6038B33F-4E30-40CF-8982-DA02651F1878}" type="datetimeFigureOut">
               <a:rPr kumimoji="1" lang="ja-JP" altLang="en-US" smtClean="0"/>
-              <a:t>2025/10/4</a:t>
+              <a:t>2026/2/2</a:t>
             </a:fld>
             <a:endParaRPr kumimoji="1" lang="ja-JP" altLang="en-US"/>
           </a:p>
@@ -1410,7 +1989,7 @@
           <p:cNvPr id="5" name="フッター プレースホルダー 4">
             <a:extLst>
               <a:ext uri="{FF2B5EF4-FFF2-40B4-BE49-F238E27FC236}">
-                <a16:creationId xmlns:a16="http://schemas.microsoft.com/office/drawing/2014/main" id="{83A4FBCB-4723-3AA6-E30C-F6E81FA69E8C}"/>
+                <a16:creationId xmlns:a16="http://schemas.microsoft.com/office/drawing/2014/main" id="{B0D0907D-4C21-8883-E947-6448A2662396}"/>
               </a:ext>
             </a:extLst>
           </p:cNvPr>
@@ -1435,7 +2014,7 @@
           <p:cNvPr id="6" name="スライド番号プレースホルダー 5">
             <a:extLst>
               <a:ext uri="{FF2B5EF4-FFF2-40B4-BE49-F238E27FC236}">
-                <a16:creationId xmlns:a16="http://schemas.microsoft.com/office/drawing/2014/main" id="{EF31E0B8-1441-EBCA-142D-2DBCA579C9AD}"/>
+                <a16:creationId xmlns:a16="http://schemas.microsoft.com/office/drawing/2014/main" id="{FA7463B1-60A0-C6E4-E841-3B19AA77BCFC}"/>
               </a:ext>
             </a:extLst>
           </p:cNvPr>
@@ -1451,7 +2030,7 @@
           <a:bodyPr/>
           <a:lstStyle/>
           <a:p>
-            <a:fld id="{D3443494-0FF6-4EB1-BD44-CC717950BE1D}" type="slidenum">
+            <a:fld id="{7B41D653-1AB0-450A-82AC-266BF7C6548E}" type="slidenum">
               <a:rPr kumimoji="1" lang="ja-JP" altLang="en-US" smtClean="0"/>
               <a:t>‹#›</a:t>
             </a:fld>
@@ -1462,7 +2041,7 @@
     </p:spTree>
     <p:extLst>
       <p:ext uri="{BB962C8B-B14F-4D97-AF65-F5344CB8AC3E}">
-        <p14:creationId xmlns:p14="http://schemas.microsoft.com/office/powerpoint/2010/main" val="664127582"/>
+        <p14:creationId xmlns:p14="http://schemas.microsoft.com/office/powerpoint/2010/main" val="360314805"/>
       </p:ext>
     </p:extLst>
   </p:cSld>
@@ -1494,7 +2073,7 @@
           <p:cNvPr id="2" name="タイトル 1">
             <a:extLst>
               <a:ext uri="{FF2B5EF4-FFF2-40B4-BE49-F238E27FC236}">
-                <a16:creationId xmlns:a16="http://schemas.microsoft.com/office/drawing/2014/main" id="{C6ACA353-5A87-A1E2-7338-4CB7CC2900A0}"/>
+                <a16:creationId xmlns:a16="http://schemas.microsoft.com/office/drawing/2014/main" id="{4B159964-01BF-57FB-1CC0-19C0CC158ED5}"/>
               </a:ext>
             </a:extLst>
           </p:cNvPr>
@@ -1522,7 +2101,7 @@
           <p:cNvPr id="3" name="コンテンツ プレースホルダー 2">
             <a:extLst>
               <a:ext uri="{FF2B5EF4-FFF2-40B4-BE49-F238E27FC236}">
-                <a16:creationId xmlns:a16="http://schemas.microsoft.com/office/drawing/2014/main" id="{7F882ED8-0C68-4F37-07A8-33BC968903CE}"/>
+                <a16:creationId xmlns:a16="http://schemas.microsoft.com/office/drawing/2014/main" id="{9202D120-064F-01CF-5AFC-13C874239B1F}"/>
               </a:ext>
             </a:extLst>
           </p:cNvPr>
@@ -1616,7 +2195,7 @@
           <p:cNvPr id="4" name="コンテンツ プレースホルダー 3">
             <a:extLst>
               <a:ext uri="{FF2B5EF4-FFF2-40B4-BE49-F238E27FC236}">
-                <a16:creationId xmlns:a16="http://schemas.microsoft.com/office/drawing/2014/main" id="{5D2271B5-C4AC-1813-08DB-AABF3743C757}"/>
+                <a16:creationId xmlns:a16="http://schemas.microsoft.com/office/drawing/2014/main" id="{B6FE018C-6A77-5633-B8D9-D6CDFFCB4E69}"/>
               </a:ext>
             </a:extLst>
           </p:cNvPr>
@@ -1710,7 +2289,7 @@
           <p:cNvPr id="5" name="日付プレースホルダー 4">
             <a:extLst>
               <a:ext uri="{FF2B5EF4-FFF2-40B4-BE49-F238E27FC236}">
-                <a16:creationId xmlns:a16="http://schemas.microsoft.com/office/drawing/2014/main" id="{D22CA8CD-2787-E8BB-120A-47BCB15B650E}"/>
+                <a16:creationId xmlns:a16="http://schemas.microsoft.com/office/drawing/2014/main" id="{ABF5BCDA-9627-B7A3-BEA8-BD42F6A58C91}"/>
               </a:ext>
             </a:extLst>
           </p:cNvPr>
@@ -1726,9 +2305,9 @@
           <a:bodyPr/>
           <a:lstStyle/>
           <a:p>
-            <a:fld id="{306D8DAA-D7DB-4FD6-93C2-8F8A77DFB3C0}" type="datetimeFigureOut">
+            <a:fld id="{6038B33F-4E30-40CF-8982-DA02651F1878}" type="datetimeFigureOut">
               <a:rPr kumimoji="1" lang="ja-JP" altLang="en-US" smtClean="0"/>
-              <a:t>2025/10/4</a:t>
+              <a:t>2026/2/2</a:t>
             </a:fld>
             <a:endParaRPr kumimoji="1" lang="ja-JP" altLang="en-US"/>
           </a:p>
@@ -1739,7 +2318,7 @@
           <p:cNvPr id="6" name="フッター プレースホルダー 5">
             <a:extLst>
               <a:ext uri="{FF2B5EF4-FFF2-40B4-BE49-F238E27FC236}">
-                <a16:creationId xmlns:a16="http://schemas.microsoft.com/office/drawing/2014/main" id="{FE3B7CE0-A1A6-E20E-C19B-B7ADF837E9B6}"/>
+                <a16:creationId xmlns:a16="http://schemas.microsoft.com/office/drawing/2014/main" id="{5E46805F-154A-1405-1304-7A49F1C3258C}"/>
               </a:ext>
             </a:extLst>
           </p:cNvPr>
@@ -1764,7 +2343,7 @@
           <p:cNvPr id="7" name="スライド番号プレースホルダー 6">
             <a:extLst>
               <a:ext uri="{FF2B5EF4-FFF2-40B4-BE49-F238E27FC236}">
-                <a16:creationId xmlns:a16="http://schemas.microsoft.com/office/drawing/2014/main" id="{C444446F-812A-B483-6E5E-A3A0084CF726}"/>
+                <a16:creationId xmlns:a16="http://schemas.microsoft.com/office/drawing/2014/main" id="{FBD934C6-63F5-13B4-C47C-FE75C55E31A1}"/>
               </a:ext>
             </a:extLst>
           </p:cNvPr>
@@ -1780,7 +2359,7 @@
           <a:bodyPr/>
           <a:lstStyle/>
           <a:p>
-            <a:fld id="{D3443494-0FF6-4EB1-BD44-CC717950BE1D}" type="slidenum">
+            <a:fld id="{7B41D653-1AB0-450A-82AC-266BF7C6548E}" type="slidenum">
               <a:rPr kumimoji="1" lang="ja-JP" altLang="en-US" smtClean="0"/>
               <a:t>‹#›</a:t>
             </a:fld>
@@ -1791,7 +2370,7 @@
     </p:spTree>
     <p:extLst>
       <p:ext uri="{BB962C8B-B14F-4D97-AF65-F5344CB8AC3E}">
-        <p14:creationId xmlns:p14="http://schemas.microsoft.com/office/powerpoint/2010/main" val="2300161683"/>
+        <p14:creationId xmlns:p14="http://schemas.microsoft.com/office/powerpoint/2010/main" val="1714589311"/>
       </p:ext>
     </p:extLst>
   </p:cSld>
@@ -1823,7 +2402,7 @@
           <p:cNvPr id="2" name="タイトル 1">
             <a:extLst>
               <a:ext uri="{FF2B5EF4-FFF2-40B4-BE49-F238E27FC236}">
-                <a16:creationId xmlns:a16="http://schemas.microsoft.com/office/drawing/2014/main" id="{9627A37B-6442-A774-3B4F-01200C9B4346}"/>
+                <a16:creationId xmlns:a16="http://schemas.microsoft.com/office/drawing/2014/main" id="{31BF59BD-743C-1A3C-1E06-EC0400A6886E}"/>
               </a:ext>
             </a:extLst>
           </p:cNvPr>
@@ -1856,7 +2435,7 @@
           <p:cNvPr id="3" name="テキスト プレースホルダー 2">
             <a:extLst>
               <a:ext uri="{FF2B5EF4-FFF2-40B4-BE49-F238E27FC236}">
-                <a16:creationId xmlns:a16="http://schemas.microsoft.com/office/drawing/2014/main" id="{9FF16855-FD59-1C68-CC4E-B12500B8FF97}"/>
+                <a16:creationId xmlns:a16="http://schemas.microsoft.com/office/drawing/2014/main" id="{53F6E40B-496A-6A6B-A7C4-CF7C222CA11F}"/>
               </a:ext>
             </a:extLst>
           </p:cNvPr>
@@ -1927,7 +2506,7 @@
           <p:cNvPr id="4" name="コンテンツ プレースホルダー 3">
             <a:extLst>
               <a:ext uri="{FF2B5EF4-FFF2-40B4-BE49-F238E27FC236}">
-                <a16:creationId xmlns:a16="http://schemas.microsoft.com/office/drawing/2014/main" id="{C5C3F685-81C1-0714-5E45-D8209DAC32EA}"/>
+                <a16:creationId xmlns:a16="http://schemas.microsoft.com/office/drawing/2014/main" id="{C288F5C6-F0BB-14AC-664D-44F4C249F259}"/>
               </a:ext>
             </a:extLst>
           </p:cNvPr>
@@ -2021,7 +2600,7 @@
           <p:cNvPr id="5" name="テキスト プレースホルダー 4">
             <a:extLst>
               <a:ext uri="{FF2B5EF4-FFF2-40B4-BE49-F238E27FC236}">
-                <a16:creationId xmlns:a16="http://schemas.microsoft.com/office/drawing/2014/main" id="{DDF0166A-3F6A-9056-95A8-3FEC4152B297}"/>
+                <a16:creationId xmlns:a16="http://schemas.microsoft.com/office/drawing/2014/main" id="{D0F23BAD-5894-849A-FB08-DBAC3B7A722F}"/>
               </a:ext>
             </a:extLst>
           </p:cNvPr>
@@ -2092,7 +2671,7 @@
           <p:cNvPr id="6" name="コンテンツ プレースホルダー 5">
             <a:extLst>
               <a:ext uri="{FF2B5EF4-FFF2-40B4-BE49-F238E27FC236}">
-                <a16:creationId xmlns:a16="http://schemas.microsoft.com/office/drawing/2014/main" id="{0B6B514C-0266-9FEA-6F71-AD0F9C5E5269}"/>
+                <a16:creationId xmlns:a16="http://schemas.microsoft.com/office/drawing/2014/main" id="{39F7EE4B-E5D2-8485-7D50-9F7EE4A67446}"/>
               </a:ext>
             </a:extLst>
           </p:cNvPr>
@@ -2186,7 +2765,7 @@
           <p:cNvPr id="7" name="日付プレースホルダー 6">
             <a:extLst>
               <a:ext uri="{FF2B5EF4-FFF2-40B4-BE49-F238E27FC236}">
-                <a16:creationId xmlns:a16="http://schemas.microsoft.com/office/drawing/2014/main" id="{593A1FD1-2DF7-F7F5-C4B0-AB6AD94F1B90}"/>
+                <a16:creationId xmlns:a16="http://schemas.microsoft.com/office/drawing/2014/main" id="{F1497A9B-9487-E362-2EEC-84350C3EBEFD}"/>
               </a:ext>
             </a:extLst>
           </p:cNvPr>
@@ -2202,9 +2781,9 @@
           <a:bodyPr/>
           <a:lstStyle/>
           <a:p>
-            <a:fld id="{306D8DAA-D7DB-4FD6-93C2-8F8A77DFB3C0}" type="datetimeFigureOut">
+            <a:fld id="{6038B33F-4E30-40CF-8982-DA02651F1878}" type="datetimeFigureOut">
               <a:rPr kumimoji="1" lang="ja-JP" altLang="en-US" smtClean="0"/>
-              <a:t>2025/10/4</a:t>
+              <a:t>2026/2/2</a:t>
             </a:fld>
             <a:endParaRPr kumimoji="1" lang="ja-JP" altLang="en-US"/>
           </a:p>
@@ -2215,7 +2794,7 @@
           <p:cNvPr id="8" name="フッター プレースホルダー 7">
             <a:extLst>
               <a:ext uri="{FF2B5EF4-FFF2-40B4-BE49-F238E27FC236}">
-                <a16:creationId xmlns:a16="http://schemas.microsoft.com/office/drawing/2014/main" id="{4E9E915C-9292-D23C-B24C-537599517E68}"/>
+                <a16:creationId xmlns:a16="http://schemas.microsoft.com/office/drawing/2014/main" id="{14F98089-AE1C-4D0B-918A-D2F72444B5A0}"/>
               </a:ext>
             </a:extLst>
           </p:cNvPr>
@@ -2240,7 +2819,7 @@
           <p:cNvPr id="9" name="スライド番号プレースホルダー 8">
             <a:extLst>
               <a:ext uri="{FF2B5EF4-FFF2-40B4-BE49-F238E27FC236}">
-                <a16:creationId xmlns:a16="http://schemas.microsoft.com/office/drawing/2014/main" id="{8DAAFCB9-E5B8-635C-AD2B-62C40EB5A554}"/>
+                <a16:creationId xmlns:a16="http://schemas.microsoft.com/office/drawing/2014/main" id="{773869A7-0F05-037D-5575-90FA09918836}"/>
               </a:ext>
             </a:extLst>
           </p:cNvPr>
@@ -2256,7 +2835,7 @@
           <a:bodyPr/>
           <a:lstStyle/>
           <a:p>
-            <a:fld id="{D3443494-0FF6-4EB1-BD44-CC717950BE1D}" type="slidenum">
+            <a:fld id="{7B41D653-1AB0-450A-82AC-266BF7C6548E}" type="slidenum">
               <a:rPr kumimoji="1" lang="ja-JP" altLang="en-US" smtClean="0"/>
               <a:t>‹#›</a:t>
             </a:fld>
@@ -2267,7 +2846,7 @@
     </p:spTree>
     <p:extLst>
       <p:ext uri="{BB962C8B-B14F-4D97-AF65-F5344CB8AC3E}">
-        <p14:creationId xmlns:p14="http://schemas.microsoft.com/office/powerpoint/2010/main" val="381972167"/>
+        <p14:creationId xmlns:p14="http://schemas.microsoft.com/office/powerpoint/2010/main" val="2536036045"/>
       </p:ext>
     </p:extLst>
   </p:cSld>
@@ -2299,7 +2878,7 @@
           <p:cNvPr id="2" name="タイトル 1">
             <a:extLst>
               <a:ext uri="{FF2B5EF4-FFF2-40B4-BE49-F238E27FC236}">
-                <a16:creationId xmlns:a16="http://schemas.microsoft.com/office/drawing/2014/main" id="{6D5D90D9-8547-9666-B4A1-7FE1F0AD965C}"/>
+                <a16:creationId xmlns:a16="http://schemas.microsoft.com/office/drawing/2014/main" id="{D7C266B5-A3FD-2F5B-DA35-F62463E85DC3}"/>
               </a:ext>
             </a:extLst>
           </p:cNvPr>
@@ -2327,7 +2906,7 @@
           <p:cNvPr id="3" name="日付プレースホルダー 2">
             <a:extLst>
               <a:ext uri="{FF2B5EF4-FFF2-40B4-BE49-F238E27FC236}">
-                <a16:creationId xmlns:a16="http://schemas.microsoft.com/office/drawing/2014/main" id="{B505C095-1864-39ED-7E48-F8C1E9CA3D1B}"/>
+                <a16:creationId xmlns:a16="http://schemas.microsoft.com/office/drawing/2014/main" id="{1EE9F867-0389-BABB-FF08-49CC450DDF6B}"/>
               </a:ext>
             </a:extLst>
           </p:cNvPr>
@@ -2343,9 +2922,9 @@
           <a:bodyPr/>
           <a:lstStyle/>
           <a:p>
-            <a:fld id="{306D8DAA-D7DB-4FD6-93C2-8F8A77DFB3C0}" type="datetimeFigureOut">
+            <a:fld id="{6038B33F-4E30-40CF-8982-DA02651F1878}" type="datetimeFigureOut">
               <a:rPr kumimoji="1" lang="ja-JP" altLang="en-US" smtClean="0"/>
-              <a:t>2025/10/4</a:t>
+              <a:t>2026/2/2</a:t>
             </a:fld>
             <a:endParaRPr kumimoji="1" lang="ja-JP" altLang="en-US"/>
           </a:p>
@@ -2356,7 +2935,7 @@
           <p:cNvPr id="4" name="フッター プレースホルダー 3">
             <a:extLst>
               <a:ext uri="{FF2B5EF4-FFF2-40B4-BE49-F238E27FC236}">
-                <a16:creationId xmlns:a16="http://schemas.microsoft.com/office/drawing/2014/main" id="{5E3E65DE-F9C5-91AF-C1F7-DE3C41291195}"/>
+                <a16:creationId xmlns:a16="http://schemas.microsoft.com/office/drawing/2014/main" id="{17FC3487-4C5B-B907-947A-8EA8C83BF344}"/>
               </a:ext>
             </a:extLst>
           </p:cNvPr>
@@ -2381,7 +2960,7 @@
           <p:cNvPr id="5" name="スライド番号プレースホルダー 4">
             <a:extLst>
               <a:ext uri="{FF2B5EF4-FFF2-40B4-BE49-F238E27FC236}">
-                <a16:creationId xmlns:a16="http://schemas.microsoft.com/office/drawing/2014/main" id="{8445C5E2-9988-440D-AA09-FC9DBA3CFE94}"/>
+                <a16:creationId xmlns:a16="http://schemas.microsoft.com/office/drawing/2014/main" id="{04439496-1F32-61E8-C39A-D45B85527BD3}"/>
               </a:ext>
             </a:extLst>
           </p:cNvPr>
@@ -2397,7 +2976,7 @@
           <a:bodyPr/>
           <a:lstStyle/>
           <a:p>
-            <a:fld id="{D3443494-0FF6-4EB1-BD44-CC717950BE1D}" type="slidenum">
+            <a:fld id="{7B41D653-1AB0-450A-82AC-266BF7C6548E}" type="slidenum">
               <a:rPr kumimoji="1" lang="ja-JP" altLang="en-US" smtClean="0"/>
               <a:t>‹#›</a:t>
             </a:fld>
@@ -2408,7 +2987,7 @@
     </p:spTree>
     <p:extLst>
       <p:ext uri="{BB962C8B-B14F-4D97-AF65-F5344CB8AC3E}">
-        <p14:creationId xmlns:p14="http://schemas.microsoft.com/office/powerpoint/2010/main" val="808011857"/>
+        <p14:creationId xmlns:p14="http://schemas.microsoft.com/office/powerpoint/2010/main" val="2346469822"/>
       </p:ext>
     </p:extLst>
   </p:cSld>
@@ -2440,7 +3019,7 @@
           <p:cNvPr id="2" name="日付プレースホルダー 1">
             <a:extLst>
               <a:ext uri="{FF2B5EF4-FFF2-40B4-BE49-F238E27FC236}">
-                <a16:creationId xmlns:a16="http://schemas.microsoft.com/office/drawing/2014/main" id="{1DEB87BE-7042-1429-FFAB-00844E7C49A2}"/>
+                <a16:creationId xmlns:a16="http://schemas.microsoft.com/office/drawing/2014/main" id="{4C9428BF-1252-6C67-319E-E065E4855A90}"/>
               </a:ext>
             </a:extLst>
           </p:cNvPr>
@@ -2456,9 +3035,9 @@
           <a:bodyPr/>
           <a:lstStyle/>
           <a:p>
-            <a:fld id="{306D8DAA-D7DB-4FD6-93C2-8F8A77DFB3C0}" type="datetimeFigureOut">
+            <a:fld id="{6038B33F-4E30-40CF-8982-DA02651F1878}" type="datetimeFigureOut">
               <a:rPr kumimoji="1" lang="ja-JP" altLang="en-US" smtClean="0"/>
-              <a:t>2025/10/4</a:t>
+              <a:t>2026/2/2</a:t>
             </a:fld>
             <a:endParaRPr kumimoji="1" lang="ja-JP" altLang="en-US"/>
           </a:p>
@@ -2469,7 +3048,7 @@
           <p:cNvPr id="3" name="フッター プレースホルダー 2">
             <a:extLst>
               <a:ext uri="{FF2B5EF4-FFF2-40B4-BE49-F238E27FC236}">
-                <a16:creationId xmlns:a16="http://schemas.microsoft.com/office/drawing/2014/main" id="{A6303CF5-731F-3B95-9BFA-46B16389D681}"/>
+                <a16:creationId xmlns:a16="http://schemas.microsoft.com/office/drawing/2014/main" id="{024461D5-0D80-437B-3694-DDF8E1840C74}"/>
               </a:ext>
             </a:extLst>
           </p:cNvPr>
@@ -2494,7 +3073,7 @@
           <p:cNvPr id="4" name="スライド番号プレースホルダー 3">
             <a:extLst>
               <a:ext uri="{FF2B5EF4-FFF2-40B4-BE49-F238E27FC236}">
-                <a16:creationId xmlns:a16="http://schemas.microsoft.com/office/drawing/2014/main" id="{D88CB3DD-B5D9-0368-C477-4A33943EB8D3}"/>
+                <a16:creationId xmlns:a16="http://schemas.microsoft.com/office/drawing/2014/main" id="{36209D58-D1D3-B05C-8F82-6643571C4A72}"/>
               </a:ext>
             </a:extLst>
           </p:cNvPr>
@@ -2510,7 +3089,7 @@
           <a:bodyPr/>
           <a:lstStyle/>
           <a:p>
-            <a:fld id="{D3443494-0FF6-4EB1-BD44-CC717950BE1D}" type="slidenum">
+            <a:fld id="{7B41D653-1AB0-450A-82AC-266BF7C6548E}" type="slidenum">
               <a:rPr kumimoji="1" lang="ja-JP" altLang="en-US" smtClean="0"/>
               <a:t>‹#›</a:t>
             </a:fld>
@@ -2521,7 +3100,7 @@
     </p:spTree>
     <p:extLst>
       <p:ext uri="{BB962C8B-B14F-4D97-AF65-F5344CB8AC3E}">
-        <p14:creationId xmlns:p14="http://schemas.microsoft.com/office/powerpoint/2010/main" val="2525979840"/>
+        <p14:creationId xmlns:p14="http://schemas.microsoft.com/office/powerpoint/2010/main" val="1853087560"/>
       </p:ext>
     </p:extLst>
   </p:cSld>
@@ -2553,7 +3132,7 @@
           <p:cNvPr id="2" name="タイトル 1">
             <a:extLst>
               <a:ext uri="{FF2B5EF4-FFF2-40B4-BE49-F238E27FC236}">
-                <a16:creationId xmlns:a16="http://schemas.microsoft.com/office/drawing/2014/main" id="{46C24C25-853F-8132-63A0-6104528C8F84}"/>
+                <a16:creationId xmlns:a16="http://schemas.microsoft.com/office/drawing/2014/main" id="{77C296BB-62CA-F9BF-D33A-BE523E2C4C67}"/>
               </a:ext>
             </a:extLst>
           </p:cNvPr>
@@ -2590,7 +3169,7 @@
           <p:cNvPr id="3" name="コンテンツ プレースホルダー 2">
             <a:extLst>
               <a:ext uri="{FF2B5EF4-FFF2-40B4-BE49-F238E27FC236}">
-                <a16:creationId xmlns:a16="http://schemas.microsoft.com/office/drawing/2014/main" id="{B7F8B19C-6DAF-B4FC-6D19-59AC1BE56B59}"/>
+                <a16:creationId xmlns:a16="http://schemas.microsoft.com/office/drawing/2014/main" id="{ACC2CE8F-D3F1-84FD-7F58-3624D6960936}"/>
               </a:ext>
             </a:extLst>
           </p:cNvPr>
@@ -2712,7 +3291,7 @@
           <p:cNvPr id="4" name="テキスト プレースホルダー 3">
             <a:extLst>
               <a:ext uri="{FF2B5EF4-FFF2-40B4-BE49-F238E27FC236}">
-                <a16:creationId xmlns:a16="http://schemas.microsoft.com/office/drawing/2014/main" id="{505B89F7-0A13-8743-24D1-129BE5BCFFC4}"/>
+                <a16:creationId xmlns:a16="http://schemas.microsoft.com/office/drawing/2014/main" id="{81141728-00DD-F741-C725-5EA5889643E7}"/>
               </a:ext>
             </a:extLst>
           </p:cNvPr>
@@ -2783,7 +3362,7 @@
           <p:cNvPr id="5" name="日付プレースホルダー 4">
             <a:extLst>
               <a:ext uri="{FF2B5EF4-FFF2-40B4-BE49-F238E27FC236}">
-                <a16:creationId xmlns:a16="http://schemas.microsoft.com/office/drawing/2014/main" id="{29C74C42-83F3-6946-FCC9-C8D93EDDF6D2}"/>
+                <a16:creationId xmlns:a16="http://schemas.microsoft.com/office/drawing/2014/main" id="{85BAC48E-17F5-862E-6C47-9E90C5EF907C}"/>
               </a:ext>
             </a:extLst>
           </p:cNvPr>
@@ -2799,9 +3378,9 @@
           <a:bodyPr/>
           <a:lstStyle/>
           <a:p>
-            <a:fld id="{306D8DAA-D7DB-4FD6-93C2-8F8A77DFB3C0}" type="datetimeFigureOut">
+            <a:fld id="{6038B33F-4E30-40CF-8982-DA02651F1878}" type="datetimeFigureOut">
               <a:rPr kumimoji="1" lang="ja-JP" altLang="en-US" smtClean="0"/>
-              <a:t>2025/10/4</a:t>
+              <a:t>2026/2/2</a:t>
             </a:fld>
             <a:endParaRPr kumimoji="1" lang="ja-JP" altLang="en-US"/>
           </a:p>
@@ -2812,7 +3391,7 @@
           <p:cNvPr id="6" name="フッター プレースホルダー 5">
             <a:extLst>
               <a:ext uri="{FF2B5EF4-FFF2-40B4-BE49-F238E27FC236}">
-                <a16:creationId xmlns:a16="http://schemas.microsoft.com/office/drawing/2014/main" id="{ED114F61-F2ED-EEAE-96B5-0C3EAF8CA6B4}"/>
+                <a16:creationId xmlns:a16="http://schemas.microsoft.com/office/drawing/2014/main" id="{7A234C07-7608-48DC-D31A-4921EB416437}"/>
               </a:ext>
             </a:extLst>
           </p:cNvPr>
@@ -2837,7 +3416,7 @@
           <p:cNvPr id="7" name="スライド番号プレースホルダー 6">
             <a:extLst>
               <a:ext uri="{FF2B5EF4-FFF2-40B4-BE49-F238E27FC236}">
-                <a16:creationId xmlns:a16="http://schemas.microsoft.com/office/drawing/2014/main" id="{4CCAE477-9A99-3157-AB08-E388CB11E5BE}"/>
+                <a16:creationId xmlns:a16="http://schemas.microsoft.com/office/drawing/2014/main" id="{AE1BA1F6-CAD1-C8B3-4F85-773F4B3F0DD7}"/>
               </a:ext>
             </a:extLst>
           </p:cNvPr>
@@ -2853,7 +3432,7 @@
           <a:bodyPr/>
           <a:lstStyle/>
           <a:p>
-            <a:fld id="{D3443494-0FF6-4EB1-BD44-CC717950BE1D}" type="slidenum">
+            <a:fld id="{7B41D653-1AB0-450A-82AC-266BF7C6548E}" type="slidenum">
               <a:rPr kumimoji="1" lang="ja-JP" altLang="en-US" smtClean="0"/>
               <a:t>‹#›</a:t>
             </a:fld>
@@ -2864,7 +3443,7 @@
     </p:spTree>
     <p:extLst>
       <p:ext uri="{BB962C8B-B14F-4D97-AF65-F5344CB8AC3E}">
-        <p14:creationId xmlns:p14="http://schemas.microsoft.com/office/powerpoint/2010/main" val="1520851393"/>
+        <p14:creationId xmlns:p14="http://schemas.microsoft.com/office/powerpoint/2010/main" val="277615676"/>
       </p:ext>
     </p:extLst>
   </p:cSld>
@@ -2896,7 +3475,7 @@
           <p:cNvPr id="2" name="タイトル 1">
             <a:extLst>
               <a:ext uri="{FF2B5EF4-FFF2-40B4-BE49-F238E27FC236}">
-                <a16:creationId xmlns:a16="http://schemas.microsoft.com/office/drawing/2014/main" id="{CE5F32A1-FB04-75F6-4BB6-C968694DC9AB}"/>
+                <a16:creationId xmlns:a16="http://schemas.microsoft.com/office/drawing/2014/main" id="{F222E443-800B-9B00-582A-E7716B7A3AD7}"/>
               </a:ext>
             </a:extLst>
           </p:cNvPr>
@@ -2933,7 +3512,7 @@
           <p:cNvPr id="3" name="図プレースホルダー 2">
             <a:extLst>
               <a:ext uri="{FF2B5EF4-FFF2-40B4-BE49-F238E27FC236}">
-                <a16:creationId xmlns:a16="http://schemas.microsoft.com/office/drawing/2014/main" id="{D82E532E-89A6-B235-9562-8BD7D52F4721}"/>
+                <a16:creationId xmlns:a16="http://schemas.microsoft.com/office/drawing/2014/main" id="{BE6FBA55-244A-22B9-9FBA-3B26EF3466D2}"/>
               </a:ext>
             </a:extLst>
           </p:cNvPr>
@@ -3000,7 +3579,7 @@
           <p:cNvPr id="4" name="テキスト プレースホルダー 3">
             <a:extLst>
               <a:ext uri="{FF2B5EF4-FFF2-40B4-BE49-F238E27FC236}">
-                <a16:creationId xmlns:a16="http://schemas.microsoft.com/office/drawing/2014/main" id="{3DF71BE8-F6B0-6F83-0423-C09B7662CC82}"/>
+                <a16:creationId xmlns:a16="http://schemas.microsoft.com/office/drawing/2014/main" id="{45C9A178-486E-7B9E-98DC-B4F57D3E5791}"/>
               </a:ext>
             </a:extLst>
           </p:cNvPr>
@@ -3071,7 +3650,7 @@
           <p:cNvPr id="5" name="日付プレースホルダー 4">
             <a:extLst>
               <a:ext uri="{FF2B5EF4-FFF2-40B4-BE49-F238E27FC236}">
-                <a16:creationId xmlns:a16="http://schemas.microsoft.com/office/drawing/2014/main" id="{F134D9DD-C2B7-5C05-658C-1E667991CFE6}"/>
+                <a16:creationId xmlns:a16="http://schemas.microsoft.com/office/drawing/2014/main" id="{FFA21B99-B569-1EAF-B3BC-22A8D0A0201C}"/>
               </a:ext>
             </a:extLst>
           </p:cNvPr>
@@ -3087,9 +3666,9 @@
           <a:bodyPr/>
           <a:lstStyle/>
           <a:p>
-            <a:fld id="{306D8DAA-D7DB-4FD6-93C2-8F8A77DFB3C0}" type="datetimeFigureOut">
+            <a:fld id="{6038B33F-4E30-40CF-8982-DA02651F1878}" type="datetimeFigureOut">
               <a:rPr kumimoji="1" lang="ja-JP" altLang="en-US" smtClean="0"/>
-              <a:t>2025/10/4</a:t>
+              <a:t>2026/2/2</a:t>
             </a:fld>
             <a:endParaRPr kumimoji="1" lang="ja-JP" altLang="en-US"/>
           </a:p>
@@ -3100,7 +3679,7 @@
           <p:cNvPr id="6" name="フッター プレースホルダー 5">
             <a:extLst>
               <a:ext uri="{FF2B5EF4-FFF2-40B4-BE49-F238E27FC236}">
-                <a16:creationId xmlns:a16="http://schemas.microsoft.com/office/drawing/2014/main" id="{B9F85184-5134-1AE4-82EC-93D344AC1605}"/>
+                <a16:creationId xmlns:a16="http://schemas.microsoft.com/office/drawing/2014/main" id="{50B9A3BF-6B40-E5BD-F983-7CE74330486A}"/>
               </a:ext>
             </a:extLst>
           </p:cNvPr>
@@ -3125,7 +3704,7 @@
           <p:cNvPr id="7" name="スライド番号プレースホルダー 6">
             <a:extLst>
               <a:ext uri="{FF2B5EF4-FFF2-40B4-BE49-F238E27FC236}">
-                <a16:creationId xmlns:a16="http://schemas.microsoft.com/office/drawing/2014/main" id="{BAA4EC1A-DBF6-4CC1-F61B-CD2B0574FCD5}"/>
+                <a16:creationId xmlns:a16="http://schemas.microsoft.com/office/drawing/2014/main" id="{DCAE6CFA-6006-3095-1000-7B85E874950F}"/>
               </a:ext>
             </a:extLst>
           </p:cNvPr>
@@ -3141,7 +3720,7 @@
           <a:bodyPr/>
           <a:lstStyle/>
           <a:p>
-            <a:fld id="{D3443494-0FF6-4EB1-BD44-CC717950BE1D}" type="slidenum">
+            <a:fld id="{7B41D653-1AB0-450A-82AC-266BF7C6548E}" type="slidenum">
               <a:rPr kumimoji="1" lang="ja-JP" altLang="en-US" smtClean="0"/>
               <a:t>‹#›</a:t>
             </a:fld>
@@ -3152,7 +3731,7 @@
     </p:spTree>
     <p:extLst>
       <p:ext uri="{BB962C8B-B14F-4D97-AF65-F5344CB8AC3E}">
-        <p14:creationId xmlns:p14="http://schemas.microsoft.com/office/powerpoint/2010/main" val="31184074"/>
+        <p14:creationId xmlns:p14="http://schemas.microsoft.com/office/powerpoint/2010/main" val="1834096007"/>
       </p:ext>
     </p:extLst>
   </p:cSld>
@@ -3189,7 +3768,7 @@
           <p:cNvPr id="2" name="タイトル プレースホルダー 1">
             <a:extLst>
               <a:ext uri="{FF2B5EF4-FFF2-40B4-BE49-F238E27FC236}">
-                <a16:creationId xmlns:a16="http://schemas.microsoft.com/office/drawing/2014/main" id="{140BF341-32FD-6F3F-C507-E2923B6A07C8}"/>
+                <a16:creationId xmlns:a16="http://schemas.microsoft.com/office/drawing/2014/main" id="{8E3104D9-8B30-271E-216D-1EE578F41C4C}"/>
               </a:ext>
             </a:extLst>
           </p:cNvPr>
@@ -3227,7 +3806,7 @@
           <p:cNvPr id="3" name="テキスト プレースホルダー 2">
             <a:extLst>
               <a:ext uri="{FF2B5EF4-FFF2-40B4-BE49-F238E27FC236}">
-                <a16:creationId xmlns:a16="http://schemas.microsoft.com/office/drawing/2014/main" id="{2208814C-08F5-9F7B-FDA8-2AEFC45431CF}"/>
+                <a16:creationId xmlns:a16="http://schemas.microsoft.com/office/drawing/2014/main" id="{5D8251DA-8D21-09F0-F57E-00A5B3B6FCA7}"/>
               </a:ext>
             </a:extLst>
           </p:cNvPr>
@@ -3326,7 +3905,7 @@
           <p:cNvPr id="4" name="日付プレースホルダー 3">
             <a:extLst>
               <a:ext uri="{FF2B5EF4-FFF2-40B4-BE49-F238E27FC236}">
-                <a16:creationId xmlns:a16="http://schemas.microsoft.com/office/drawing/2014/main" id="{816915E5-2505-CD3B-ACF2-DAABAD75F226}"/>
+                <a16:creationId xmlns:a16="http://schemas.microsoft.com/office/drawing/2014/main" id="{ED3B0B8C-32D5-5533-6AE7-6AD1BFE32DEE}"/>
               </a:ext>
             </a:extLst>
           </p:cNvPr>
@@ -3360,9 +3939,9 @@
             </a:lvl1pPr>
           </a:lstStyle>
           <a:p>
-            <a:fld id="{306D8DAA-D7DB-4FD6-93C2-8F8A77DFB3C0}" type="datetimeFigureOut">
+            <a:fld id="{6038B33F-4E30-40CF-8982-DA02651F1878}" type="datetimeFigureOut">
               <a:rPr kumimoji="1" lang="ja-JP" altLang="en-US" smtClean="0"/>
-              <a:t>2025/10/4</a:t>
+              <a:t>2026/2/2</a:t>
             </a:fld>
             <a:endParaRPr kumimoji="1" lang="ja-JP" altLang="en-US"/>
           </a:p>
@@ -3373,7 +3952,7 @@
           <p:cNvPr id="5" name="フッター プレースホルダー 4">
             <a:extLst>
               <a:ext uri="{FF2B5EF4-FFF2-40B4-BE49-F238E27FC236}">
-                <a16:creationId xmlns:a16="http://schemas.microsoft.com/office/drawing/2014/main" id="{C59BE7CB-B983-BEEA-DD83-790CF1E889D5}"/>
+                <a16:creationId xmlns:a16="http://schemas.microsoft.com/office/drawing/2014/main" id="{21D8CDA1-39F0-D06D-1F0F-CAAFD6D2DAB0}"/>
               </a:ext>
             </a:extLst>
           </p:cNvPr>
@@ -3416,7 +3995,7 @@
           <p:cNvPr id="6" name="スライド番号プレースホルダー 5">
             <a:extLst>
               <a:ext uri="{FF2B5EF4-FFF2-40B4-BE49-F238E27FC236}">
-                <a16:creationId xmlns:a16="http://schemas.microsoft.com/office/drawing/2014/main" id="{C1C1AD72-3406-7F03-448E-F6B7AE591D93}"/>
+                <a16:creationId xmlns:a16="http://schemas.microsoft.com/office/drawing/2014/main" id="{6ABBBAB3-0A47-3C1D-2A1A-5A34411061DB}"/>
               </a:ext>
             </a:extLst>
           </p:cNvPr>
@@ -3450,7 +4029,7 @@
             </a:lvl1pPr>
           </a:lstStyle>
           <a:p>
-            <a:fld id="{D3443494-0FF6-4EB1-BD44-CC717950BE1D}" type="slidenum">
+            <a:fld id="{7B41D653-1AB0-450A-82AC-266BF7C6548E}" type="slidenum">
               <a:rPr kumimoji="1" lang="ja-JP" altLang="en-US" smtClean="0"/>
               <a:t>‹#›</a:t>
             </a:fld>
@@ -3461,7 +4040,7 @@
     </p:spTree>
     <p:extLst>
       <p:ext uri="{BB962C8B-B14F-4D97-AF65-F5344CB8AC3E}">
-        <p14:creationId xmlns:p14="http://schemas.microsoft.com/office/powerpoint/2010/main" val="31164154"/>
+        <p14:creationId xmlns:p14="http://schemas.microsoft.com/office/powerpoint/2010/main" val="887606969"/>
       </p:ext>
     </p:extLst>
   </p:cSld>
@@ -3763,6 +4342,3709 @@
 </file>
 
 <file path=ppt/slides/slide1.xml><?xml version="1.0" encoding="utf-8"?>
+<p:sld xmlns:a="http://schemas.openxmlformats.org/drawingml/2006/main" xmlns:r="http://schemas.openxmlformats.org/officeDocument/2006/relationships" xmlns:p="http://schemas.openxmlformats.org/presentationml/2006/main">
+  <p:cSld>
+    <p:bg>
+      <p:bgPr>
+        <a:solidFill>
+          <a:schemeClr val="bg1"/>
+        </a:solidFill>
+        <a:effectLst/>
+      </p:bgPr>
+    </p:bg>
+    <p:spTree>
+      <p:nvGrpSpPr>
+        <p:cNvPr id="1" name=""/>
+        <p:cNvGrpSpPr/>
+        <p:nvPr/>
+      </p:nvGrpSpPr>
+      <p:grpSpPr>
+        <a:xfrm>
+          <a:off x="0" y="0"/>
+          <a:ext cx="0" cy="0"/>
+          <a:chOff x="0" y="0"/>
+          <a:chExt cx="0" cy="0"/>
+        </a:xfrm>
+      </p:grpSpPr>
+      <p:sp useBgFill="1">
+        <p:nvSpPr>
+          <p:cNvPr id="17" name="Rectangle 19">
+            <a:extLst>
+              <a:ext uri="{FF2B5EF4-FFF2-40B4-BE49-F238E27FC236}">
+                <a16:creationId xmlns:a16="http://schemas.microsoft.com/office/drawing/2014/main" id="{2EB492CD-616E-47F8-933B-5E2D952A0593}"/>
+              </a:ext>
+              <a:ext uri="{C183D7F6-B498-43B3-948B-1728B52AA6E4}">
+                <adec:decorative xmlns:adec="http://schemas.microsoft.com/office/drawing/2017/decorative" val="1"/>
+              </a:ext>
+            </a:extLst>
+          </p:cNvPr>
+          <p:cNvSpPr>
+            <a:spLocks noGrp="1" noRot="1" noChangeAspect="1" noMove="1" noResize="1" noEditPoints="1" noAdjustHandles="1" noChangeArrowheads="1" noChangeShapeType="1" noTextEdit="1"/>
+          </p:cNvSpPr>
+          <p:nvPr>
+            <p:extLst>
+              <p:ext uri="{386F3935-93C4-4BCD-93E2-E3B085C9AB24}">
+                <p16:designElem xmlns:p16="http://schemas.microsoft.com/office/powerpoint/2015/main" val="1"/>
+              </p:ext>
+            </p:extLst>
+          </p:nvPr>
+        </p:nvSpPr>
+        <p:spPr bwMode="white">
+          <a:xfrm>
+            <a:off x="0" y="0"/>
+            <a:ext cx="12192000" cy="6858000"/>
+          </a:xfrm>
+          <a:prstGeom prst="rect">
+            <a:avLst/>
+          </a:prstGeom>
+          <a:ln>
+            <a:noFill/>
+          </a:ln>
+        </p:spPr>
+        <p:style>
+          <a:lnRef idx="2">
+            <a:schemeClr val="accent1">
+              <a:shade val="50000"/>
+            </a:schemeClr>
+          </a:lnRef>
+          <a:fillRef idx="1">
+            <a:schemeClr val="accent1"/>
+          </a:fillRef>
+          <a:effectRef idx="0">
+            <a:schemeClr val="accent1"/>
+          </a:effectRef>
+          <a:fontRef idx="minor">
+            <a:schemeClr val="lt1"/>
+          </a:fontRef>
+        </p:style>
+        <p:txBody>
+          <a:bodyPr rtlCol="0" anchor="ctr"/>
+          <a:lstStyle>
+            <a:defPPr>
+              <a:defRPr lang="en-US"/>
+            </a:defPPr>
+            <a:lvl1pPr marL="0" algn="l" defTabSz="914400" rtl="0" eaLnBrk="1" latinLnBrk="0" hangingPunct="1">
+              <a:defRPr sz="1800" kern="1200">
+                <a:solidFill>
+                  <a:schemeClr val="lt1"/>
+                </a:solidFill>
+                <a:latin typeface="+mn-lt"/>
+                <a:ea typeface="+mn-ea"/>
+                <a:cs typeface="+mn-cs"/>
+              </a:defRPr>
+            </a:lvl1pPr>
+            <a:lvl2pPr marL="457200" algn="l" defTabSz="914400" rtl="0" eaLnBrk="1" latinLnBrk="0" hangingPunct="1">
+              <a:defRPr sz="1800" kern="1200">
+                <a:solidFill>
+                  <a:schemeClr val="lt1"/>
+                </a:solidFill>
+                <a:latin typeface="+mn-lt"/>
+                <a:ea typeface="+mn-ea"/>
+                <a:cs typeface="+mn-cs"/>
+              </a:defRPr>
+            </a:lvl2pPr>
+            <a:lvl3pPr marL="914400" algn="l" defTabSz="914400" rtl="0" eaLnBrk="1" latinLnBrk="0" hangingPunct="1">
+              <a:defRPr sz="1800" kern="1200">
+                <a:solidFill>
+                  <a:schemeClr val="lt1"/>
+                </a:solidFill>
+                <a:latin typeface="+mn-lt"/>
+                <a:ea typeface="+mn-ea"/>
+                <a:cs typeface="+mn-cs"/>
+              </a:defRPr>
+            </a:lvl3pPr>
+            <a:lvl4pPr marL="1371600" algn="l" defTabSz="914400" rtl="0" eaLnBrk="1" latinLnBrk="0" hangingPunct="1">
+              <a:defRPr sz="1800" kern="1200">
+                <a:solidFill>
+                  <a:schemeClr val="lt1"/>
+                </a:solidFill>
+                <a:latin typeface="+mn-lt"/>
+                <a:ea typeface="+mn-ea"/>
+                <a:cs typeface="+mn-cs"/>
+              </a:defRPr>
+            </a:lvl4pPr>
+            <a:lvl5pPr marL="1828800" algn="l" defTabSz="914400" rtl="0" eaLnBrk="1" latinLnBrk="0" hangingPunct="1">
+              <a:defRPr sz="1800" kern="1200">
+                <a:solidFill>
+                  <a:schemeClr val="lt1"/>
+                </a:solidFill>
+                <a:latin typeface="+mn-lt"/>
+                <a:ea typeface="+mn-ea"/>
+                <a:cs typeface="+mn-cs"/>
+              </a:defRPr>
+            </a:lvl5pPr>
+            <a:lvl6pPr marL="2286000" algn="l" defTabSz="914400" rtl="0" eaLnBrk="1" latinLnBrk="0" hangingPunct="1">
+              <a:defRPr sz="1800" kern="1200">
+                <a:solidFill>
+                  <a:schemeClr val="lt1"/>
+                </a:solidFill>
+                <a:latin typeface="+mn-lt"/>
+                <a:ea typeface="+mn-ea"/>
+                <a:cs typeface="+mn-cs"/>
+              </a:defRPr>
+            </a:lvl6pPr>
+            <a:lvl7pPr marL="2743200" algn="l" defTabSz="914400" rtl="0" eaLnBrk="1" latinLnBrk="0" hangingPunct="1">
+              <a:defRPr sz="1800" kern="1200">
+                <a:solidFill>
+                  <a:schemeClr val="lt1"/>
+                </a:solidFill>
+                <a:latin typeface="+mn-lt"/>
+                <a:ea typeface="+mn-ea"/>
+                <a:cs typeface="+mn-cs"/>
+              </a:defRPr>
+            </a:lvl7pPr>
+            <a:lvl8pPr marL="3200400" algn="l" defTabSz="914400" rtl="0" eaLnBrk="1" latinLnBrk="0" hangingPunct="1">
+              <a:defRPr sz="1800" kern="1200">
+                <a:solidFill>
+                  <a:schemeClr val="lt1"/>
+                </a:solidFill>
+                <a:latin typeface="+mn-lt"/>
+                <a:ea typeface="+mn-ea"/>
+                <a:cs typeface="+mn-cs"/>
+              </a:defRPr>
+            </a:lvl8pPr>
+            <a:lvl9pPr marL="3657600" algn="l" defTabSz="914400" rtl="0" eaLnBrk="1" latinLnBrk="0" hangingPunct="1">
+              <a:defRPr sz="1800" kern="1200">
+                <a:solidFill>
+                  <a:schemeClr val="lt1"/>
+                </a:solidFill>
+                <a:latin typeface="+mn-lt"/>
+                <a:ea typeface="+mn-ea"/>
+                <a:cs typeface="+mn-cs"/>
+              </a:defRPr>
+            </a:lvl9pPr>
+          </a:lstStyle>
+          <a:p>
+            <a:pPr algn="ctr"/>
+            <a:endParaRPr lang="en-US" dirty="0"/>
+          </a:p>
+        </p:txBody>
+      </p:sp>
+      <p:sp>
+        <p:nvSpPr>
+          <p:cNvPr id="18" name="Arc 21">
+            <a:extLst>
+              <a:ext uri="{FF2B5EF4-FFF2-40B4-BE49-F238E27FC236}">
+                <a16:creationId xmlns:a16="http://schemas.microsoft.com/office/drawing/2014/main" id="{59383CF9-23B5-4335-9B21-1791C4CF1C75}"/>
+              </a:ext>
+              <a:ext uri="{C183D7F6-B498-43B3-948B-1728B52AA6E4}">
+                <adec:decorative xmlns:adec="http://schemas.microsoft.com/office/drawing/2017/decorative" val="1"/>
+              </a:ext>
+            </a:extLst>
+          </p:cNvPr>
+          <p:cNvSpPr>
+            <a:spLocks noGrp="1" noRot="1" noChangeAspect="1" noMove="1" noResize="1" noEditPoints="1" noAdjustHandles="1" noChangeArrowheads="1" noChangeShapeType="1" noTextEdit="1"/>
+          </p:cNvSpPr>
+          <p:nvPr>
+            <p:extLst>
+              <p:ext uri="{386F3935-93C4-4BCD-93E2-E3B085C9AB24}">
+                <p16:designElem xmlns:p16="http://schemas.microsoft.com/office/powerpoint/2015/main" val="1"/>
+              </p:ext>
+            </p:extLst>
+          </p:nvPr>
+        </p:nvSpPr>
+        <p:spPr>
+          <a:xfrm rot="3967198" flipH="1">
+            <a:off x="8631348" y="490493"/>
+            <a:ext cx="2987899" cy="2987899"/>
+          </a:xfrm>
+          <a:prstGeom prst="arc">
+            <a:avLst>
+              <a:gd name="adj1" fmla="val 14441841"/>
+              <a:gd name="adj2" fmla="val 0"/>
+            </a:avLst>
+          </a:prstGeom>
+          <a:ln w="127000" cap="rnd">
+            <a:solidFill>
+              <a:schemeClr val="accent4"/>
+            </a:solidFill>
+            <a:prstDash val="dash"/>
+            <a:miter lim="800000"/>
+          </a:ln>
+        </p:spPr>
+        <p:style>
+          <a:lnRef idx="1">
+            <a:schemeClr val="accent1"/>
+          </a:lnRef>
+          <a:fillRef idx="0">
+            <a:schemeClr val="accent1"/>
+          </a:fillRef>
+          <a:effectRef idx="0">
+            <a:schemeClr val="accent1"/>
+          </a:effectRef>
+          <a:fontRef idx="minor">
+            <a:schemeClr val="tx1"/>
+          </a:fontRef>
+        </p:style>
+        <p:txBody>
+          <a:bodyPr rtlCol="0" anchor="ctr"/>
+          <a:lstStyle/>
+          <a:p>
+            <a:pPr marL="0" marR="0" lvl="0" indent="0" algn="ctr" defTabSz="914400" rtl="0" eaLnBrk="1" fontAlgn="auto" latinLnBrk="0" hangingPunct="1">
+              <a:lnSpc>
+                <a:spcPct val="100000"/>
+              </a:lnSpc>
+              <a:spcBef>
+                <a:spcPts val="0"/>
+              </a:spcBef>
+              <a:spcAft>
+                <a:spcPts val="0"/>
+              </a:spcAft>
+              <a:buClrTx/>
+              <a:buSzTx/>
+              <a:buFontTx/>
+              <a:buNone/>
+              <a:tabLst/>
+              <a:defRPr/>
+            </a:pPr>
+            <a:endParaRPr kumimoji="0" lang="en-US" sz="1800" b="0" i="0" u="none" strike="noStrike" kern="1200" cap="none" spc="0" normalizeH="0" baseline="0" noProof="0" dirty="0">
+              <a:ln>
+                <a:noFill/>
+              </a:ln>
+              <a:solidFill>
+                <a:srgbClr val="000000"/>
+              </a:solidFill>
+              <a:effectLst/>
+              <a:uLnTx/>
+              <a:uFillTx/>
+              <a:latin typeface="Calibri" panose="020F0502020204030204"/>
+              <a:ea typeface="+mn-ea"/>
+              <a:cs typeface="+mn-cs"/>
+            </a:endParaRPr>
+          </a:p>
+        </p:txBody>
+      </p:sp>
+      <p:sp>
+        <p:nvSpPr>
+          <p:cNvPr id="2" name="タイトル 1">
+            <a:extLst>
+              <a:ext uri="{FF2B5EF4-FFF2-40B4-BE49-F238E27FC236}">
+                <a16:creationId xmlns:a16="http://schemas.microsoft.com/office/drawing/2014/main" id="{7E71F69C-C091-8FF0-4960-A5959FDDCF30}"/>
+              </a:ext>
+            </a:extLst>
+          </p:cNvPr>
+          <p:cNvSpPr>
+            <a:spLocks noGrp="1"/>
+          </p:cNvSpPr>
+          <p:nvPr>
+            <p:ph type="title"/>
+          </p:nvPr>
+        </p:nvSpPr>
+        <p:spPr>
+          <a:xfrm>
+            <a:off x="5894962" y="857865"/>
+            <a:ext cx="6297038" cy="1325563"/>
+          </a:xfrm>
+        </p:spPr>
+        <p:txBody>
+          <a:bodyPr>
+            <a:normAutofit/>
+          </a:bodyPr>
+          <a:lstStyle/>
+          <a:p>
+            <a:r>
+              <a:rPr kumimoji="1" lang="ja-JP" altLang="en-US" dirty="0"/>
+              <a:t>日本発の</a:t>
+            </a:r>
+            <a:r>
+              <a:rPr kumimoji="1" lang="en-US" altLang="ja-JP" dirty="0"/>
+              <a:t>OpenMPW</a:t>
+            </a:r>
+            <a:r>
+              <a:rPr kumimoji="1" lang="ja-JP" altLang="en-US" dirty="0"/>
+              <a:t>！</a:t>
+            </a:r>
+          </a:p>
+        </p:txBody>
+      </p:sp>
+      <p:sp>
+        <p:nvSpPr>
+          <p:cNvPr id="19" name="Freeform: Shape 23">
+            <a:extLst>
+              <a:ext uri="{FF2B5EF4-FFF2-40B4-BE49-F238E27FC236}">
+                <a16:creationId xmlns:a16="http://schemas.microsoft.com/office/drawing/2014/main" id="{0007FE00-9498-4706-B255-6437B0252C02}"/>
+              </a:ext>
+              <a:ext uri="{C183D7F6-B498-43B3-948B-1728B52AA6E4}">
+                <adec:decorative xmlns:adec="http://schemas.microsoft.com/office/drawing/2017/decorative" val="1"/>
+              </a:ext>
+            </a:extLst>
+          </p:cNvPr>
+          <p:cNvSpPr>
+            <a:spLocks noGrp="1" noRot="1" noChangeAspect="1" noMove="1" noResize="1" noEditPoints="1" noAdjustHandles="1" noChangeArrowheads="1" noChangeShapeType="1" noTextEdit="1"/>
+          </p:cNvSpPr>
+          <p:nvPr>
+            <p:extLst>
+              <p:ext uri="{386F3935-93C4-4BCD-93E2-E3B085C9AB24}">
+                <p16:designElem xmlns:p16="http://schemas.microsoft.com/office/powerpoint/2015/main" val="1"/>
+              </p:ext>
+            </p:extLst>
+          </p:nvPr>
+        </p:nvSpPr>
+        <p:spPr>
+          <a:xfrm flipH="1">
+            <a:off x="0" y="5486400"/>
+            <a:ext cx="2672863" cy="1371600"/>
+          </a:xfrm>
+          <a:custGeom>
+            <a:avLst/>
+            <a:gdLst>
+              <a:gd name="connsiteX0" fmla="*/ 1721734 w 2672863"/>
+              <a:gd name="connsiteY0" fmla="*/ 0 h 1371600"/>
+              <a:gd name="connsiteX1" fmla="*/ 2564444 w 2672863"/>
+              <a:gd name="connsiteY1" fmla="*/ 213382 h 1371600"/>
+              <a:gd name="connsiteX2" fmla="*/ 2672863 w 2672863"/>
+              <a:gd name="connsiteY2" fmla="*/ 279248 h 1371600"/>
+              <a:gd name="connsiteX3" fmla="*/ 2672863 w 2672863"/>
+              <a:gd name="connsiteY3" fmla="*/ 1371600 h 1371600"/>
+              <a:gd name="connsiteX4" fmla="*/ 0 w 2672863"/>
+              <a:gd name="connsiteY4" fmla="*/ 1371600 h 1371600"/>
+              <a:gd name="connsiteX5" fmla="*/ 33268 w 2672863"/>
+              <a:gd name="connsiteY5" fmla="*/ 1242216 h 1371600"/>
+              <a:gd name="connsiteX6" fmla="*/ 1721734 w 2672863"/>
+              <a:gd name="connsiteY6" fmla="*/ 0 h 1371600"/>
+            </a:gdLst>
+            <a:ahLst/>
+            <a:cxnLst>
+              <a:cxn ang="0">
+                <a:pos x="connsiteX0" y="connsiteY0"/>
+              </a:cxn>
+              <a:cxn ang="0">
+                <a:pos x="connsiteX1" y="connsiteY1"/>
+              </a:cxn>
+              <a:cxn ang="0">
+                <a:pos x="connsiteX2" y="connsiteY2"/>
+              </a:cxn>
+              <a:cxn ang="0">
+                <a:pos x="connsiteX3" y="connsiteY3"/>
+              </a:cxn>
+              <a:cxn ang="0">
+                <a:pos x="connsiteX4" y="connsiteY4"/>
+              </a:cxn>
+              <a:cxn ang="0">
+                <a:pos x="connsiteX5" y="connsiteY5"/>
+              </a:cxn>
+              <a:cxn ang="0">
+                <a:pos x="connsiteX6" y="connsiteY6"/>
+              </a:cxn>
+            </a:cxnLst>
+            <a:rect l="l" t="t" r="r" b="b"/>
+            <a:pathLst>
+              <a:path w="2672863" h="1371600">
+                <a:moveTo>
+                  <a:pt x="1721734" y="0"/>
+                </a:moveTo>
+                <a:cubicBezTo>
+                  <a:pt x="2026863" y="0"/>
+                  <a:pt x="2313937" y="77299"/>
+                  <a:pt x="2564444" y="213382"/>
+                </a:cubicBezTo>
+                <a:lnTo>
+                  <a:pt x="2672863" y="279248"/>
+                </a:lnTo>
+                <a:lnTo>
+                  <a:pt x="2672863" y="1371600"/>
+                </a:lnTo>
+                <a:lnTo>
+                  <a:pt x="0" y="1371600"/>
+                </a:lnTo>
+                <a:lnTo>
+                  <a:pt x="33268" y="1242216"/>
+                </a:lnTo>
+                <a:cubicBezTo>
+                  <a:pt x="257110" y="522539"/>
+                  <a:pt x="928399" y="0"/>
+                  <a:pt x="1721734" y="0"/>
+                </a:cubicBezTo>
+                <a:close/>
+              </a:path>
+            </a:pathLst>
+          </a:custGeom>
+          <a:solidFill>
+            <a:schemeClr val="accent4"/>
+          </a:solidFill>
+          <a:ln>
+            <a:noFill/>
+          </a:ln>
+        </p:spPr>
+        <p:style>
+          <a:lnRef idx="2">
+            <a:schemeClr val="accent1">
+              <a:shade val="50000"/>
+            </a:schemeClr>
+          </a:lnRef>
+          <a:fillRef idx="1">
+            <a:schemeClr val="accent1"/>
+          </a:fillRef>
+          <a:effectRef idx="0">
+            <a:schemeClr val="accent1"/>
+          </a:effectRef>
+          <a:fontRef idx="minor">
+            <a:schemeClr val="lt1"/>
+          </a:fontRef>
+        </p:style>
+        <p:txBody>
+          <a:bodyPr wrap="square" rtlCol="0" anchor="ctr">
+            <a:noAutofit/>
+          </a:bodyPr>
+          <a:lstStyle/>
+          <a:p>
+            <a:pPr algn="ctr"/>
+            <a:endParaRPr lang="en-US" dirty="0"/>
+          </a:p>
+        </p:txBody>
+      </p:sp>
+      <p:sp>
+        <p:nvSpPr>
+          <p:cNvPr id="3" name="コンテンツ プレースホルダー 2">
+            <a:extLst>
+              <a:ext uri="{FF2B5EF4-FFF2-40B4-BE49-F238E27FC236}">
+                <a16:creationId xmlns:a16="http://schemas.microsoft.com/office/drawing/2014/main" id="{4FB892F8-5F5B-0461-96B7-63C57EED7938}"/>
+              </a:ext>
+            </a:extLst>
+          </p:cNvPr>
+          <p:cNvSpPr>
+            <a:spLocks noGrp="1"/>
+          </p:cNvSpPr>
+          <p:nvPr>
+            <p:ph idx="1"/>
+          </p:nvPr>
+        </p:nvSpPr>
+        <p:spPr>
+          <a:xfrm>
+            <a:off x="5877746" y="2183428"/>
+            <a:ext cx="6206296" cy="3941691"/>
+          </a:xfrm>
+        </p:spPr>
+        <p:txBody>
+          <a:bodyPr>
+            <a:normAutofit/>
+          </a:bodyPr>
+          <a:lstStyle/>
+          <a:p>
+            <a:r>
+              <a:rPr lang="en-US" altLang="ja-JP" dirty="0"/>
+              <a:t>OpenMPW</a:t>
+            </a:r>
+            <a:r>
+              <a:rPr lang="ja-JP" altLang="en-US" dirty="0"/>
+              <a:t>構造のシャトル</a:t>
+            </a:r>
+            <a:endParaRPr lang="en-US" altLang="ja-JP" dirty="0"/>
+          </a:p>
+          <a:p>
+            <a:pPr lvl="1"/>
+            <a:r>
+              <a:rPr kumimoji="1" lang="ja-JP" altLang="en-US" dirty="0"/>
+              <a:t>コミュニティー</a:t>
+            </a:r>
+            <a:endParaRPr kumimoji="1" lang="en-US" altLang="ja-JP" dirty="0"/>
+          </a:p>
+          <a:p>
+            <a:pPr lvl="2"/>
+            <a:r>
+              <a:rPr kumimoji="1" lang="en-US" altLang="ja-JP" dirty="0"/>
+              <a:t>eFabless</a:t>
+            </a:r>
+            <a:r>
+              <a:rPr kumimoji="1" lang="ja-JP" altLang="en-US" dirty="0"/>
+              <a:t>社 ⇔ </a:t>
+            </a:r>
+            <a:r>
+              <a:rPr kumimoji="1" lang="en-US" altLang="ja-JP" dirty="0"/>
+              <a:t>ISHI</a:t>
+            </a:r>
+            <a:r>
+              <a:rPr kumimoji="1" lang="ja-JP" altLang="en-US" dirty="0"/>
+              <a:t>会</a:t>
+            </a:r>
+            <a:r>
+              <a:rPr kumimoji="1" lang="en-US" altLang="ja-JP" dirty="0"/>
+              <a:t>+SINBY+SIProp</a:t>
+            </a:r>
+            <a:endParaRPr lang="en-US" altLang="ja-JP" dirty="0"/>
+          </a:p>
+          <a:p>
+            <a:pPr lvl="1"/>
+            <a:r>
+              <a:rPr lang="ja-JP" altLang="en-US" dirty="0"/>
+              <a:t>スポンサー</a:t>
+            </a:r>
+            <a:endParaRPr lang="en-US" altLang="ja-JP" dirty="0"/>
+          </a:p>
+          <a:p>
+            <a:pPr lvl="2"/>
+            <a:r>
+              <a:rPr lang="en-US" altLang="ja-JP" dirty="0"/>
+              <a:t>Google</a:t>
+            </a:r>
+            <a:r>
+              <a:rPr lang="ja-JP" altLang="en-US" dirty="0"/>
+              <a:t>社 </a:t>
+            </a:r>
+            <a:r>
+              <a:rPr kumimoji="1" lang="ja-JP" altLang="en-US" dirty="0"/>
+              <a:t>⇔ </a:t>
+            </a:r>
+            <a:r>
+              <a:rPr lang="en-US" altLang="ja-JP" dirty="0"/>
+              <a:t>GxP</a:t>
+            </a:r>
+            <a:r>
+              <a:rPr lang="ja-JP" altLang="en-US" dirty="0"/>
+              <a:t>社</a:t>
+            </a:r>
+            <a:endParaRPr lang="en-US" altLang="ja-JP" dirty="0"/>
+          </a:p>
+          <a:p>
+            <a:pPr lvl="1"/>
+            <a:r>
+              <a:rPr kumimoji="1" lang="ja-JP" altLang="en-US" dirty="0"/>
+              <a:t>ファブ：</a:t>
+            </a:r>
+            <a:endParaRPr kumimoji="1" lang="en-US" altLang="ja-JP" dirty="0"/>
+          </a:p>
+          <a:p>
+            <a:pPr lvl="2"/>
+            <a:r>
+              <a:rPr lang="en-US" altLang="ja-JP" dirty="0"/>
+              <a:t>SkywaterPDK</a:t>
+            </a:r>
+            <a:r>
+              <a:rPr kumimoji="1" lang="ja-JP" altLang="en-US" dirty="0"/>
+              <a:t> ⇔ </a:t>
+            </a:r>
+            <a:r>
+              <a:rPr kumimoji="1" lang="en-US" altLang="ja-JP" dirty="0"/>
+              <a:t>OpenRule1umPDK</a:t>
+            </a:r>
+          </a:p>
+        </p:txBody>
+      </p:sp>
+      <p:grpSp>
+        <p:nvGrpSpPr>
+          <p:cNvPr id="15" name="グループ化 14">
+            <a:extLst>
+              <a:ext uri="{FF2B5EF4-FFF2-40B4-BE49-F238E27FC236}">
+                <a16:creationId xmlns:a16="http://schemas.microsoft.com/office/drawing/2014/main" id="{59831AC7-94C0-16A9-3CA4-EEDF5C480BC5}"/>
+              </a:ext>
+            </a:extLst>
+          </p:cNvPr>
+          <p:cNvGrpSpPr/>
+          <p:nvPr/>
+        </p:nvGrpSpPr>
+        <p:grpSpPr>
+          <a:xfrm>
+            <a:off x="1634476" y="214884"/>
+            <a:ext cx="4186137" cy="6428231"/>
+            <a:chOff x="1462722" y="88638"/>
+            <a:chExt cx="3601530" cy="6784983"/>
+          </a:xfrm>
+        </p:grpSpPr>
+        <p:pic>
+          <p:nvPicPr>
+            <p:cNvPr id="5" name="Google Shape;188;p35">
+              <a:extLst>
+                <a:ext uri="{FF2B5EF4-FFF2-40B4-BE49-F238E27FC236}">
+                  <a16:creationId xmlns:a16="http://schemas.microsoft.com/office/drawing/2014/main" id="{91F4A3B5-2C8F-0F1B-0542-A203D1BBD08D}"/>
+                </a:ext>
+              </a:extLst>
+            </p:cNvPr>
+            <p:cNvPicPr preferRelativeResize="0"/>
+            <p:nvPr/>
+          </p:nvPicPr>
+          <p:blipFill rotWithShape="1">
+            <a:blip r:embed="rId2"/>
+            <a:srcRect r="5355" b="3"/>
+            <a:stretch/>
+          </p:blipFill>
+          <p:spPr>
+            <a:xfrm>
+              <a:off x="1462722" y="88638"/>
+              <a:ext cx="3367380" cy="3178288"/>
+            </a:xfrm>
+            <a:prstGeom prst="rect">
+              <a:avLst/>
+            </a:prstGeom>
+            <a:noFill/>
+          </p:spPr>
+        </p:pic>
+        <p:grpSp>
+          <p:nvGrpSpPr>
+            <p:cNvPr id="14" name="グループ化 13">
+              <a:extLst>
+                <a:ext uri="{FF2B5EF4-FFF2-40B4-BE49-F238E27FC236}">
+                  <a16:creationId xmlns:a16="http://schemas.microsoft.com/office/drawing/2014/main" id="{6D306EE5-E04A-4DE6-73FD-A480324CDCFE}"/>
+                </a:ext>
+              </a:extLst>
+            </p:cNvPr>
+            <p:cNvGrpSpPr/>
+            <p:nvPr/>
+          </p:nvGrpSpPr>
+          <p:grpSpPr>
+            <a:xfrm>
+              <a:off x="1543362" y="3662239"/>
+              <a:ext cx="3520890" cy="3211382"/>
+              <a:chOff x="1543362" y="3662239"/>
+              <a:chExt cx="3520890" cy="3211382"/>
+            </a:xfrm>
+          </p:grpSpPr>
+          <p:pic>
+            <p:nvPicPr>
+              <p:cNvPr id="4" name="Google Shape;188;p35">
+                <a:extLst>
+                  <a:ext uri="{FF2B5EF4-FFF2-40B4-BE49-F238E27FC236}">
+                    <a16:creationId xmlns:a16="http://schemas.microsoft.com/office/drawing/2014/main" id="{B5642ABF-E237-CA80-37F5-134DF703711E}"/>
+                  </a:ext>
+                </a:extLst>
+              </p:cNvPr>
+              <p:cNvPicPr preferRelativeResize="0"/>
+              <p:nvPr/>
+            </p:nvPicPr>
+            <p:blipFill>
+              <a:blip r:embed="rId2"/>
+              <a:stretch>
+                <a:fillRect/>
+              </a:stretch>
+            </p:blipFill>
+            <p:spPr>
+              <a:xfrm>
+                <a:off x="1543363" y="3662239"/>
+                <a:ext cx="3475151" cy="3211382"/>
+              </a:xfrm>
+              <a:prstGeom prst="rect">
+                <a:avLst/>
+              </a:prstGeom>
+              <a:noFill/>
+            </p:spPr>
+          </p:pic>
+          <p:pic>
+            <p:nvPicPr>
+              <p:cNvPr id="9" name="図 8">
+                <a:extLst>
+                  <a:ext uri="{FF2B5EF4-FFF2-40B4-BE49-F238E27FC236}">
+                    <a16:creationId xmlns:a16="http://schemas.microsoft.com/office/drawing/2014/main" id="{1F4C3E83-B4DD-6C84-D82E-1B1ACEC3D479}"/>
+                  </a:ext>
+                </a:extLst>
+              </p:cNvPr>
+              <p:cNvPicPr>
+                <a:picLocks noChangeAspect="1"/>
+              </p:cNvPicPr>
+              <p:nvPr/>
+            </p:nvPicPr>
+            <p:blipFill rotWithShape="1">
+              <a:blip r:embed="rId3"/>
+              <a:srcRect r="61518" b="-2745"/>
+              <a:stretch/>
+            </p:blipFill>
+            <p:spPr>
+              <a:xfrm>
+                <a:off x="1543362" y="5836916"/>
+                <a:ext cx="989097" cy="486325"/>
+              </a:xfrm>
+              <a:prstGeom prst="rect">
+                <a:avLst/>
+              </a:prstGeom>
+            </p:spPr>
+          </p:pic>
+          <p:pic>
+            <p:nvPicPr>
+              <p:cNvPr id="10" name="図 9">
+                <a:extLst>
+                  <a:ext uri="{FF2B5EF4-FFF2-40B4-BE49-F238E27FC236}">
+                    <a16:creationId xmlns:a16="http://schemas.microsoft.com/office/drawing/2014/main" id="{A646C6AE-CD42-050E-2B7D-EBA8254D506A}"/>
+                  </a:ext>
+                </a:extLst>
+              </p:cNvPr>
+              <p:cNvPicPr>
+                <a:picLocks noChangeAspect="1"/>
+              </p:cNvPicPr>
+              <p:nvPr/>
+            </p:nvPicPr>
+            <p:blipFill>
+              <a:blip r:embed="rId4"/>
+              <a:stretch>
+                <a:fillRect/>
+              </a:stretch>
+            </p:blipFill>
+            <p:spPr>
+              <a:xfrm>
+                <a:off x="3594652" y="4162044"/>
+                <a:ext cx="795420" cy="253250"/>
+              </a:xfrm>
+              <a:prstGeom prst="rect">
+                <a:avLst/>
+              </a:prstGeom>
+            </p:spPr>
+          </p:pic>
+          <p:pic>
+            <p:nvPicPr>
+              <p:cNvPr id="11" name="図 10" descr="グラフ が含まれている画像&#10;&#10;自動的に生成された説明">
+                <a:extLst>
+                  <a:ext uri="{FF2B5EF4-FFF2-40B4-BE49-F238E27FC236}">
+                    <a16:creationId xmlns:a16="http://schemas.microsoft.com/office/drawing/2014/main" id="{287E095A-ED99-D423-7C1B-F31BC9BBD663}"/>
+                  </a:ext>
+                </a:extLst>
+              </p:cNvPr>
+              <p:cNvPicPr>
+                <a:picLocks noChangeAspect="1"/>
+              </p:cNvPicPr>
+              <p:nvPr/>
+            </p:nvPicPr>
+            <p:blipFill rotWithShape="1">
+              <a:blip r:embed="rId5">
+                <a:extLst>
+                  <a:ext uri="{28A0092B-C50C-407E-A947-70E740481C1C}">
+                    <a14:useLocalDpi xmlns:a14="http://schemas.microsoft.com/office/drawing/2010/main" val="0"/>
+                  </a:ext>
+                </a:extLst>
+              </a:blip>
+              <a:srcRect t="14461" b="25712"/>
+              <a:stretch/>
+            </p:blipFill>
+            <p:spPr>
+              <a:xfrm>
+                <a:off x="3706778" y="4415294"/>
+                <a:ext cx="563397" cy="337061"/>
+              </a:xfrm>
+              <a:prstGeom prst="rect">
+                <a:avLst/>
+              </a:prstGeom>
+            </p:spPr>
+          </p:pic>
+          <p:pic>
+            <p:nvPicPr>
+              <p:cNvPr id="8" name="Google Shape;265;p45">
+                <a:extLst>
+                  <a:ext uri="{FF2B5EF4-FFF2-40B4-BE49-F238E27FC236}">
+                    <a16:creationId xmlns:a16="http://schemas.microsoft.com/office/drawing/2014/main" id="{F8B2A4AA-AFA6-F0A9-3CB3-FA804227650F}"/>
+                  </a:ext>
+                </a:extLst>
+              </p:cNvPr>
+              <p:cNvPicPr preferRelativeResize="0"/>
+              <p:nvPr/>
+            </p:nvPicPr>
+            <p:blipFill>
+              <a:blip r:embed="rId6"/>
+              <a:stretch>
+                <a:fillRect/>
+              </a:stretch>
+            </p:blipFill>
+            <p:spPr>
+              <a:xfrm>
+                <a:off x="2818016" y="3839848"/>
+                <a:ext cx="888762" cy="731922"/>
+              </a:xfrm>
+              <a:prstGeom prst="rect">
+                <a:avLst/>
+              </a:prstGeom>
+              <a:noFill/>
+            </p:spPr>
+          </p:pic>
+          <p:pic>
+            <p:nvPicPr>
+              <p:cNvPr id="13" name="図 12">
+                <a:extLst>
+                  <a:ext uri="{FF2B5EF4-FFF2-40B4-BE49-F238E27FC236}">
+                    <a16:creationId xmlns:a16="http://schemas.microsoft.com/office/drawing/2014/main" id="{E3EBC7A2-15CA-EAB7-6F49-42F92D9A633A}"/>
+                  </a:ext>
+                </a:extLst>
+              </p:cNvPr>
+              <p:cNvPicPr>
+                <a:picLocks noChangeAspect="1"/>
+              </p:cNvPicPr>
+              <p:nvPr/>
+            </p:nvPicPr>
+            <p:blipFill>
+              <a:blip r:embed="rId7"/>
+              <a:stretch>
+                <a:fillRect/>
+              </a:stretch>
+            </p:blipFill>
+            <p:spPr>
+              <a:xfrm>
+                <a:off x="3542921" y="5986180"/>
+                <a:ext cx="1521331" cy="337060"/>
+              </a:xfrm>
+              <a:prstGeom prst="rect">
+                <a:avLst/>
+              </a:prstGeom>
+            </p:spPr>
+          </p:pic>
+        </p:grpSp>
+        <p:sp>
+          <p:nvSpPr>
+            <p:cNvPr id="6" name="矢印: 下 5">
+              <a:extLst>
+                <a:ext uri="{FF2B5EF4-FFF2-40B4-BE49-F238E27FC236}">
+                  <a16:creationId xmlns:a16="http://schemas.microsoft.com/office/drawing/2014/main" id="{0FCC5D3A-5E03-49AF-6840-2B597E810540}"/>
+                </a:ext>
+              </a:extLst>
+            </p:cNvPr>
+            <p:cNvSpPr/>
+            <p:nvPr/>
+          </p:nvSpPr>
+          <p:spPr>
+            <a:xfrm>
+              <a:off x="2818016" y="3050223"/>
+              <a:ext cx="888762" cy="644087"/>
+            </a:xfrm>
+            <a:prstGeom prst="downArrow">
+              <a:avLst/>
+            </a:prstGeom>
+          </p:spPr>
+          <p:style>
+            <a:lnRef idx="1">
+              <a:schemeClr val="accent6"/>
+            </a:lnRef>
+            <a:fillRef idx="2">
+              <a:schemeClr val="accent6"/>
+            </a:fillRef>
+            <a:effectRef idx="1">
+              <a:schemeClr val="accent6"/>
+            </a:effectRef>
+            <a:fontRef idx="minor">
+              <a:schemeClr val="dk1"/>
+            </a:fontRef>
+          </p:style>
+          <p:txBody>
+            <a:bodyPr rtlCol="0" anchor="ctr"/>
+            <a:lstStyle/>
+            <a:p>
+              <a:pPr algn="ctr"/>
+              <a:endParaRPr kumimoji="1" lang="ja-JP" altLang="en-US"/>
+            </a:p>
+          </p:txBody>
+        </p:sp>
+      </p:grpSp>
+      <p:sp>
+        <p:nvSpPr>
+          <p:cNvPr id="12" name="四角形: 角を丸くする 11">
+            <a:extLst>
+              <a:ext uri="{FF2B5EF4-FFF2-40B4-BE49-F238E27FC236}">
+                <a16:creationId xmlns:a16="http://schemas.microsoft.com/office/drawing/2014/main" id="{66712D7F-A8AF-3BAB-325F-CE15C05FFD2A}"/>
+              </a:ext>
+            </a:extLst>
+          </p:cNvPr>
+          <p:cNvSpPr/>
+          <p:nvPr/>
+        </p:nvSpPr>
+        <p:spPr>
+          <a:xfrm>
+            <a:off x="5820613" y="5256494"/>
+            <a:ext cx="6320562" cy="1235066"/>
+          </a:xfrm>
+          <a:prstGeom prst="roundRect">
+            <a:avLst/>
+          </a:prstGeom>
+        </p:spPr>
+        <p:style>
+          <a:lnRef idx="0">
+            <a:schemeClr val="accent4"/>
+          </a:lnRef>
+          <a:fillRef idx="3">
+            <a:schemeClr val="accent4"/>
+          </a:fillRef>
+          <a:effectRef idx="3">
+            <a:schemeClr val="accent4"/>
+          </a:effectRef>
+          <a:fontRef idx="minor">
+            <a:schemeClr val="lt1"/>
+          </a:fontRef>
+        </p:style>
+        <p:txBody>
+          <a:bodyPr rtlCol="0" anchor="ctr"/>
+          <a:lstStyle/>
+          <a:p>
+            <a:pPr algn="ctr"/>
+            <a:r>
+              <a:rPr kumimoji="1" lang="en-US" altLang="ja-JP" sz="2400" dirty="0"/>
+              <a:t>ISHI</a:t>
+            </a:r>
+            <a:r>
+              <a:rPr kumimoji="1" lang="ja-JP" altLang="en-US" sz="2400" dirty="0"/>
+              <a:t>会版</a:t>
+            </a:r>
+            <a:r>
+              <a:rPr kumimoji="1" lang="en-US" altLang="ja-JP" sz="2400" dirty="0"/>
+              <a:t>OpenMPW-PTC06-1</a:t>
+            </a:r>
+            <a:r>
+              <a:rPr kumimoji="1" lang="ja-JP" altLang="en-US" sz="2400" dirty="0"/>
+              <a:t>として開催！</a:t>
+            </a:r>
+          </a:p>
+        </p:txBody>
+      </p:sp>
+    </p:spTree>
+    <p:extLst>
+      <p:ext uri="{BB962C8B-B14F-4D97-AF65-F5344CB8AC3E}">
+        <p14:creationId xmlns:p14="http://schemas.microsoft.com/office/powerpoint/2010/main" val="3083720728"/>
+      </p:ext>
+    </p:extLst>
+  </p:cSld>
+  <p:clrMapOvr>
+    <a:masterClrMapping/>
+  </p:clrMapOvr>
+</p:sld>
+</file>
+
+<file path=ppt/slides/slide2.xml><?xml version="1.0" encoding="utf-8"?>
+<p:sld xmlns:a="http://schemas.openxmlformats.org/drawingml/2006/main" xmlns:r="http://schemas.openxmlformats.org/officeDocument/2006/relationships" xmlns:p="http://schemas.openxmlformats.org/presentationml/2006/main">
+  <p:cSld>
+    <p:bg>
+      <p:bgPr>
+        <a:solidFill>
+          <a:schemeClr val="bg1"/>
+        </a:solidFill>
+        <a:effectLst/>
+      </p:bgPr>
+    </p:bg>
+    <p:spTree>
+      <p:nvGrpSpPr>
+        <p:cNvPr id="1" name="">
+          <a:extLst>
+            <a:ext uri="{FF2B5EF4-FFF2-40B4-BE49-F238E27FC236}">
+              <a16:creationId xmlns:a16="http://schemas.microsoft.com/office/drawing/2014/main" id="{3300FE83-275A-E0ED-40D7-ED6B0C19B1A5}"/>
+            </a:ext>
+          </a:extLst>
+        </p:cNvPr>
+        <p:cNvGrpSpPr/>
+        <p:nvPr/>
+      </p:nvGrpSpPr>
+      <p:grpSpPr>
+        <a:xfrm>
+          <a:off x="0" y="0"/>
+          <a:ext cx="0" cy="0"/>
+          <a:chOff x="0" y="0"/>
+          <a:chExt cx="0" cy="0"/>
+        </a:xfrm>
+      </p:grpSpPr>
+      <p:sp useBgFill="1">
+        <p:nvSpPr>
+          <p:cNvPr id="17" name="Rectangle 19">
+            <a:extLst>
+              <a:ext uri="{FF2B5EF4-FFF2-40B4-BE49-F238E27FC236}">
+                <a16:creationId xmlns:a16="http://schemas.microsoft.com/office/drawing/2014/main" id="{EFA42377-9FC3-AB5C-8480-9FD47E652B07}"/>
+              </a:ext>
+              <a:ext uri="{C183D7F6-B498-43B3-948B-1728B52AA6E4}">
+                <adec:decorative xmlns:adec="http://schemas.microsoft.com/office/drawing/2017/decorative" val="1"/>
+              </a:ext>
+            </a:extLst>
+          </p:cNvPr>
+          <p:cNvSpPr>
+            <a:spLocks noGrp="1" noRot="1" noChangeAspect="1" noMove="1" noResize="1" noEditPoints="1" noAdjustHandles="1" noChangeArrowheads="1" noChangeShapeType="1" noTextEdit="1"/>
+          </p:cNvSpPr>
+          <p:nvPr>
+            <p:extLst>
+              <p:ext uri="{386F3935-93C4-4BCD-93E2-E3B085C9AB24}">
+                <p16:designElem xmlns:p16="http://schemas.microsoft.com/office/powerpoint/2015/main" val="1"/>
+              </p:ext>
+            </p:extLst>
+          </p:nvPr>
+        </p:nvSpPr>
+        <p:spPr bwMode="white">
+          <a:xfrm>
+            <a:off x="0" y="0"/>
+            <a:ext cx="12192000" cy="6858000"/>
+          </a:xfrm>
+          <a:prstGeom prst="rect">
+            <a:avLst/>
+          </a:prstGeom>
+          <a:ln>
+            <a:noFill/>
+          </a:ln>
+        </p:spPr>
+        <p:style>
+          <a:lnRef idx="2">
+            <a:schemeClr val="accent1">
+              <a:shade val="50000"/>
+            </a:schemeClr>
+          </a:lnRef>
+          <a:fillRef idx="1">
+            <a:schemeClr val="accent1"/>
+          </a:fillRef>
+          <a:effectRef idx="0">
+            <a:schemeClr val="accent1"/>
+          </a:effectRef>
+          <a:fontRef idx="minor">
+            <a:schemeClr val="lt1"/>
+          </a:fontRef>
+        </p:style>
+        <p:txBody>
+          <a:bodyPr rtlCol="0" anchor="ctr"/>
+          <a:lstStyle>
+            <a:defPPr>
+              <a:defRPr lang="en-US"/>
+            </a:defPPr>
+            <a:lvl1pPr marL="0" algn="l" defTabSz="914400" rtl="0" eaLnBrk="1" latinLnBrk="0" hangingPunct="1">
+              <a:defRPr sz="1800" kern="1200">
+                <a:solidFill>
+                  <a:schemeClr val="lt1"/>
+                </a:solidFill>
+                <a:latin typeface="+mn-lt"/>
+                <a:ea typeface="+mn-ea"/>
+                <a:cs typeface="+mn-cs"/>
+              </a:defRPr>
+            </a:lvl1pPr>
+            <a:lvl2pPr marL="457200" algn="l" defTabSz="914400" rtl="0" eaLnBrk="1" latinLnBrk="0" hangingPunct="1">
+              <a:defRPr sz="1800" kern="1200">
+                <a:solidFill>
+                  <a:schemeClr val="lt1"/>
+                </a:solidFill>
+                <a:latin typeface="+mn-lt"/>
+                <a:ea typeface="+mn-ea"/>
+                <a:cs typeface="+mn-cs"/>
+              </a:defRPr>
+            </a:lvl2pPr>
+            <a:lvl3pPr marL="914400" algn="l" defTabSz="914400" rtl="0" eaLnBrk="1" latinLnBrk="0" hangingPunct="1">
+              <a:defRPr sz="1800" kern="1200">
+                <a:solidFill>
+                  <a:schemeClr val="lt1"/>
+                </a:solidFill>
+                <a:latin typeface="+mn-lt"/>
+                <a:ea typeface="+mn-ea"/>
+                <a:cs typeface="+mn-cs"/>
+              </a:defRPr>
+            </a:lvl3pPr>
+            <a:lvl4pPr marL="1371600" algn="l" defTabSz="914400" rtl="0" eaLnBrk="1" latinLnBrk="0" hangingPunct="1">
+              <a:defRPr sz="1800" kern="1200">
+                <a:solidFill>
+                  <a:schemeClr val="lt1"/>
+                </a:solidFill>
+                <a:latin typeface="+mn-lt"/>
+                <a:ea typeface="+mn-ea"/>
+                <a:cs typeface="+mn-cs"/>
+              </a:defRPr>
+            </a:lvl4pPr>
+            <a:lvl5pPr marL="1828800" algn="l" defTabSz="914400" rtl="0" eaLnBrk="1" latinLnBrk="0" hangingPunct="1">
+              <a:defRPr sz="1800" kern="1200">
+                <a:solidFill>
+                  <a:schemeClr val="lt1"/>
+                </a:solidFill>
+                <a:latin typeface="+mn-lt"/>
+                <a:ea typeface="+mn-ea"/>
+                <a:cs typeface="+mn-cs"/>
+              </a:defRPr>
+            </a:lvl5pPr>
+            <a:lvl6pPr marL="2286000" algn="l" defTabSz="914400" rtl="0" eaLnBrk="1" latinLnBrk="0" hangingPunct="1">
+              <a:defRPr sz="1800" kern="1200">
+                <a:solidFill>
+                  <a:schemeClr val="lt1"/>
+                </a:solidFill>
+                <a:latin typeface="+mn-lt"/>
+                <a:ea typeface="+mn-ea"/>
+                <a:cs typeface="+mn-cs"/>
+              </a:defRPr>
+            </a:lvl6pPr>
+            <a:lvl7pPr marL="2743200" algn="l" defTabSz="914400" rtl="0" eaLnBrk="1" latinLnBrk="0" hangingPunct="1">
+              <a:defRPr sz="1800" kern="1200">
+                <a:solidFill>
+                  <a:schemeClr val="lt1"/>
+                </a:solidFill>
+                <a:latin typeface="+mn-lt"/>
+                <a:ea typeface="+mn-ea"/>
+                <a:cs typeface="+mn-cs"/>
+              </a:defRPr>
+            </a:lvl7pPr>
+            <a:lvl8pPr marL="3200400" algn="l" defTabSz="914400" rtl="0" eaLnBrk="1" latinLnBrk="0" hangingPunct="1">
+              <a:defRPr sz="1800" kern="1200">
+                <a:solidFill>
+                  <a:schemeClr val="lt1"/>
+                </a:solidFill>
+                <a:latin typeface="+mn-lt"/>
+                <a:ea typeface="+mn-ea"/>
+                <a:cs typeface="+mn-cs"/>
+              </a:defRPr>
+            </a:lvl8pPr>
+            <a:lvl9pPr marL="3657600" algn="l" defTabSz="914400" rtl="0" eaLnBrk="1" latinLnBrk="0" hangingPunct="1">
+              <a:defRPr sz="1800" kern="1200">
+                <a:solidFill>
+                  <a:schemeClr val="lt1"/>
+                </a:solidFill>
+                <a:latin typeface="+mn-lt"/>
+                <a:ea typeface="+mn-ea"/>
+                <a:cs typeface="+mn-cs"/>
+              </a:defRPr>
+            </a:lvl9pPr>
+          </a:lstStyle>
+          <a:p>
+            <a:pPr algn="ctr"/>
+            <a:endParaRPr lang="en-US" dirty="0"/>
+          </a:p>
+        </p:txBody>
+      </p:sp>
+      <p:sp>
+        <p:nvSpPr>
+          <p:cNvPr id="18" name="Arc 21">
+            <a:extLst>
+              <a:ext uri="{FF2B5EF4-FFF2-40B4-BE49-F238E27FC236}">
+                <a16:creationId xmlns:a16="http://schemas.microsoft.com/office/drawing/2014/main" id="{38C18541-D93E-F29B-ED6B-5A80549D676B}"/>
+              </a:ext>
+              <a:ext uri="{C183D7F6-B498-43B3-948B-1728B52AA6E4}">
+                <adec:decorative xmlns:adec="http://schemas.microsoft.com/office/drawing/2017/decorative" val="1"/>
+              </a:ext>
+            </a:extLst>
+          </p:cNvPr>
+          <p:cNvSpPr>
+            <a:spLocks noGrp="1" noRot="1" noChangeAspect="1" noMove="1" noResize="1" noEditPoints="1" noAdjustHandles="1" noChangeArrowheads="1" noChangeShapeType="1" noTextEdit="1"/>
+          </p:cNvSpPr>
+          <p:nvPr>
+            <p:extLst>
+              <p:ext uri="{386F3935-93C4-4BCD-93E2-E3B085C9AB24}">
+                <p16:designElem xmlns:p16="http://schemas.microsoft.com/office/powerpoint/2015/main" val="1"/>
+              </p:ext>
+            </p:extLst>
+          </p:nvPr>
+        </p:nvSpPr>
+        <p:spPr>
+          <a:xfrm rot="3967198" flipH="1">
+            <a:off x="8631348" y="490493"/>
+            <a:ext cx="2987899" cy="2987899"/>
+          </a:xfrm>
+          <a:prstGeom prst="arc">
+            <a:avLst>
+              <a:gd name="adj1" fmla="val 14441841"/>
+              <a:gd name="adj2" fmla="val 0"/>
+            </a:avLst>
+          </a:prstGeom>
+          <a:ln w="127000" cap="rnd">
+            <a:solidFill>
+              <a:schemeClr val="accent4"/>
+            </a:solidFill>
+            <a:prstDash val="dash"/>
+            <a:miter lim="800000"/>
+          </a:ln>
+        </p:spPr>
+        <p:style>
+          <a:lnRef idx="1">
+            <a:schemeClr val="accent1"/>
+          </a:lnRef>
+          <a:fillRef idx="0">
+            <a:schemeClr val="accent1"/>
+          </a:fillRef>
+          <a:effectRef idx="0">
+            <a:schemeClr val="accent1"/>
+          </a:effectRef>
+          <a:fontRef idx="minor">
+            <a:schemeClr val="tx1"/>
+          </a:fontRef>
+        </p:style>
+        <p:txBody>
+          <a:bodyPr rtlCol="0" anchor="ctr"/>
+          <a:lstStyle/>
+          <a:p>
+            <a:pPr marL="0" marR="0" lvl="0" indent="0" algn="ctr" defTabSz="914400" rtl="0" eaLnBrk="1" fontAlgn="auto" latinLnBrk="0" hangingPunct="1">
+              <a:lnSpc>
+                <a:spcPct val="100000"/>
+              </a:lnSpc>
+              <a:spcBef>
+                <a:spcPts val="0"/>
+              </a:spcBef>
+              <a:spcAft>
+                <a:spcPts val="0"/>
+              </a:spcAft>
+              <a:buClrTx/>
+              <a:buSzTx/>
+              <a:buFontTx/>
+              <a:buNone/>
+              <a:tabLst/>
+              <a:defRPr/>
+            </a:pPr>
+            <a:endParaRPr kumimoji="0" lang="en-US" sz="1800" b="0" i="0" u="none" strike="noStrike" kern="1200" cap="none" spc="0" normalizeH="0" baseline="0" noProof="0" dirty="0">
+              <a:ln>
+                <a:noFill/>
+              </a:ln>
+              <a:solidFill>
+                <a:srgbClr val="000000"/>
+              </a:solidFill>
+              <a:effectLst/>
+              <a:uLnTx/>
+              <a:uFillTx/>
+              <a:latin typeface="Calibri" panose="020F0502020204030204"/>
+              <a:ea typeface="+mn-ea"/>
+              <a:cs typeface="+mn-cs"/>
+            </a:endParaRPr>
+          </a:p>
+        </p:txBody>
+      </p:sp>
+      <p:sp>
+        <p:nvSpPr>
+          <p:cNvPr id="2" name="タイトル 1">
+            <a:extLst>
+              <a:ext uri="{FF2B5EF4-FFF2-40B4-BE49-F238E27FC236}">
+                <a16:creationId xmlns:a16="http://schemas.microsoft.com/office/drawing/2014/main" id="{55983248-B2A6-8BFE-025C-84BADCB39F3C}"/>
+              </a:ext>
+            </a:extLst>
+          </p:cNvPr>
+          <p:cNvSpPr>
+            <a:spLocks noGrp="1"/>
+          </p:cNvSpPr>
+          <p:nvPr>
+            <p:ph type="title"/>
+          </p:nvPr>
+        </p:nvSpPr>
+        <p:spPr>
+          <a:xfrm>
+            <a:off x="5894962" y="857865"/>
+            <a:ext cx="6297038" cy="1325563"/>
+          </a:xfrm>
+        </p:spPr>
+        <p:txBody>
+          <a:bodyPr>
+            <a:normAutofit/>
+          </a:bodyPr>
+          <a:lstStyle/>
+          <a:p>
+            <a:r>
+              <a:rPr lang="en-US" altLang="ja-JP" dirty="0"/>
+              <a:t>2025</a:t>
+            </a:r>
+            <a:r>
+              <a:rPr lang="ja-JP" altLang="en-US" dirty="0"/>
+              <a:t>年</a:t>
+            </a:r>
+            <a:r>
+              <a:rPr kumimoji="1" lang="ja-JP" altLang="en-US" dirty="0"/>
+              <a:t>の</a:t>
+            </a:r>
+            <a:r>
+              <a:rPr kumimoji="1" lang="en-US" altLang="ja-JP" dirty="0"/>
+              <a:t>OpenMPW</a:t>
+            </a:r>
+            <a:r>
+              <a:rPr kumimoji="1" lang="ja-JP" altLang="en-US" dirty="0"/>
+              <a:t>！</a:t>
+            </a:r>
+          </a:p>
+        </p:txBody>
+      </p:sp>
+      <p:sp>
+        <p:nvSpPr>
+          <p:cNvPr id="19" name="Freeform: Shape 23">
+            <a:extLst>
+              <a:ext uri="{FF2B5EF4-FFF2-40B4-BE49-F238E27FC236}">
+                <a16:creationId xmlns:a16="http://schemas.microsoft.com/office/drawing/2014/main" id="{F231D53A-ACCE-D220-7933-0DDFBD464747}"/>
+              </a:ext>
+              <a:ext uri="{C183D7F6-B498-43B3-948B-1728B52AA6E4}">
+                <adec:decorative xmlns:adec="http://schemas.microsoft.com/office/drawing/2017/decorative" val="1"/>
+              </a:ext>
+            </a:extLst>
+          </p:cNvPr>
+          <p:cNvSpPr>
+            <a:spLocks noGrp="1" noRot="1" noChangeAspect="1" noMove="1" noResize="1" noEditPoints="1" noAdjustHandles="1" noChangeArrowheads="1" noChangeShapeType="1" noTextEdit="1"/>
+          </p:cNvSpPr>
+          <p:nvPr>
+            <p:extLst>
+              <p:ext uri="{386F3935-93C4-4BCD-93E2-E3B085C9AB24}">
+                <p16:designElem xmlns:p16="http://schemas.microsoft.com/office/powerpoint/2015/main" val="1"/>
+              </p:ext>
+            </p:extLst>
+          </p:nvPr>
+        </p:nvSpPr>
+        <p:spPr>
+          <a:xfrm flipH="1">
+            <a:off x="0" y="5486400"/>
+            <a:ext cx="2672863" cy="1371600"/>
+          </a:xfrm>
+          <a:custGeom>
+            <a:avLst/>
+            <a:gdLst>
+              <a:gd name="connsiteX0" fmla="*/ 1721734 w 2672863"/>
+              <a:gd name="connsiteY0" fmla="*/ 0 h 1371600"/>
+              <a:gd name="connsiteX1" fmla="*/ 2564444 w 2672863"/>
+              <a:gd name="connsiteY1" fmla="*/ 213382 h 1371600"/>
+              <a:gd name="connsiteX2" fmla="*/ 2672863 w 2672863"/>
+              <a:gd name="connsiteY2" fmla="*/ 279248 h 1371600"/>
+              <a:gd name="connsiteX3" fmla="*/ 2672863 w 2672863"/>
+              <a:gd name="connsiteY3" fmla="*/ 1371600 h 1371600"/>
+              <a:gd name="connsiteX4" fmla="*/ 0 w 2672863"/>
+              <a:gd name="connsiteY4" fmla="*/ 1371600 h 1371600"/>
+              <a:gd name="connsiteX5" fmla="*/ 33268 w 2672863"/>
+              <a:gd name="connsiteY5" fmla="*/ 1242216 h 1371600"/>
+              <a:gd name="connsiteX6" fmla="*/ 1721734 w 2672863"/>
+              <a:gd name="connsiteY6" fmla="*/ 0 h 1371600"/>
+            </a:gdLst>
+            <a:ahLst/>
+            <a:cxnLst>
+              <a:cxn ang="0">
+                <a:pos x="connsiteX0" y="connsiteY0"/>
+              </a:cxn>
+              <a:cxn ang="0">
+                <a:pos x="connsiteX1" y="connsiteY1"/>
+              </a:cxn>
+              <a:cxn ang="0">
+                <a:pos x="connsiteX2" y="connsiteY2"/>
+              </a:cxn>
+              <a:cxn ang="0">
+                <a:pos x="connsiteX3" y="connsiteY3"/>
+              </a:cxn>
+              <a:cxn ang="0">
+                <a:pos x="connsiteX4" y="connsiteY4"/>
+              </a:cxn>
+              <a:cxn ang="0">
+                <a:pos x="connsiteX5" y="connsiteY5"/>
+              </a:cxn>
+              <a:cxn ang="0">
+                <a:pos x="connsiteX6" y="connsiteY6"/>
+              </a:cxn>
+            </a:cxnLst>
+            <a:rect l="l" t="t" r="r" b="b"/>
+            <a:pathLst>
+              <a:path w="2672863" h="1371600">
+                <a:moveTo>
+                  <a:pt x="1721734" y="0"/>
+                </a:moveTo>
+                <a:cubicBezTo>
+                  <a:pt x="2026863" y="0"/>
+                  <a:pt x="2313937" y="77299"/>
+                  <a:pt x="2564444" y="213382"/>
+                </a:cubicBezTo>
+                <a:lnTo>
+                  <a:pt x="2672863" y="279248"/>
+                </a:lnTo>
+                <a:lnTo>
+                  <a:pt x="2672863" y="1371600"/>
+                </a:lnTo>
+                <a:lnTo>
+                  <a:pt x="0" y="1371600"/>
+                </a:lnTo>
+                <a:lnTo>
+                  <a:pt x="33268" y="1242216"/>
+                </a:lnTo>
+                <a:cubicBezTo>
+                  <a:pt x="257110" y="522539"/>
+                  <a:pt x="928399" y="0"/>
+                  <a:pt x="1721734" y="0"/>
+                </a:cubicBezTo>
+                <a:close/>
+              </a:path>
+            </a:pathLst>
+          </a:custGeom>
+          <a:solidFill>
+            <a:schemeClr val="accent4"/>
+          </a:solidFill>
+          <a:ln>
+            <a:noFill/>
+          </a:ln>
+        </p:spPr>
+        <p:style>
+          <a:lnRef idx="2">
+            <a:schemeClr val="accent1">
+              <a:shade val="50000"/>
+            </a:schemeClr>
+          </a:lnRef>
+          <a:fillRef idx="1">
+            <a:schemeClr val="accent1"/>
+          </a:fillRef>
+          <a:effectRef idx="0">
+            <a:schemeClr val="accent1"/>
+          </a:effectRef>
+          <a:fontRef idx="minor">
+            <a:schemeClr val="lt1"/>
+          </a:fontRef>
+        </p:style>
+        <p:txBody>
+          <a:bodyPr wrap="square" rtlCol="0" anchor="ctr">
+            <a:noAutofit/>
+          </a:bodyPr>
+          <a:lstStyle/>
+          <a:p>
+            <a:pPr algn="ctr"/>
+            <a:endParaRPr lang="en-US" dirty="0"/>
+          </a:p>
+        </p:txBody>
+      </p:sp>
+      <p:sp>
+        <p:nvSpPr>
+          <p:cNvPr id="3" name="コンテンツ プレースホルダー 2">
+            <a:extLst>
+              <a:ext uri="{FF2B5EF4-FFF2-40B4-BE49-F238E27FC236}">
+                <a16:creationId xmlns:a16="http://schemas.microsoft.com/office/drawing/2014/main" id="{74DE9D05-D61B-6405-E798-AE9FAC1F4C39}"/>
+              </a:ext>
+            </a:extLst>
+          </p:cNvPr>
+          <p:cNvSpPr>
+            <a:spLocks noGrp="1"/>
+          </p:cNvSpPr>
+          <p:nvPr>
+            <p:ph idx="1"/>
+          </p:nvPr>
+        </p:nvSpPr>
+        <p:spPr>
+          <a:xfrm>
+            <a:off x="5877746" y="2183428"/>
+            <a:ext cx="6206296" cy="3941691"/>
+          </a:xfrm>
+        </p:spPr>
+        <p:txBody>
+          <a:bodyPr>
+            <a:normAutofit/>
+          </a:bodyPr>
+          <a:lstStyle/>
+          <a:p>
+            <a:r>
+              <a:rPr lang="en-US" altLang="ja-JP" dirty="0"/>
+              <a:t>OpenMPW</a:t>
+            </a:r>
+            <a:r>
+              <a:rPr lang="ja-JP" altLang="en-US" dirty="0"/>
+              <a:t>構造のシャトル</a:t>
+            </a:r>
+            <a:endParaRPr lang="en-US" altLang="ja-JP" dirty="0"/>
+          </a:p>
+          <a:p>
+            <a:pPr lvl="1"/>
+            <a:r>
+              <a:rPr kumimoji="1" lang="ja-JP" altLang="en-US" dirty="0"/>
+              <a:t>コミュニティー</a:t>
+            </a:r>
+            <a:endParaRPr kumimoji="1" lang="en-US" altLang="ja-JP" dirty="0"/>
+          </a:p>
+          <a:p>
+            <a:pPr lvl="2"/>
+            <a:r>
+              <a:rPr kumimoji="1" lang="en-US" altLang="ja-JP" dirty="0"/>
+              <a:t>eFabless</a:t>
+            </a:r>
+            <a:r>
+              <a:rPr kumimoji="1" lang="ja-JP" altLang="en-US" dirty="0"/>
+              <a:t>社 ⇔ </a:t>
+            </a:r>
+            <a:r>
+              <a:rPr kumimoji="1" lang="en-US" altLang="ja-JP" dirty="0"/>
+              <a:t>ISHI</a:t>
+            </a:r>
+            <a:r>
+              <a:rPr kumimoji="1" lang="ja-JP" altLang="en-US" dirty="0"/>
+              <a:t>会</a:t>
+            </a:r>
+            <a:endParaRPr lang="en-US" altLang="ja-JP" dirty="0"/>
+          </a:p>
+          <a:p>
+            <a:pPr lvl="1"/>
+            <a:r>
+              <a:rPr lang="ja-JP" altLang="en-US" dirty="0"/>
+              <a:t>スポンサー</a:t>
+            </a:r>
+            <a:endParaRPr lang="en-US" altLang="ja-JP" dirty="0"/>
+          </a:p>
+          <a:p>
+            <a:pPr lvl="2"/>
+            <a:r>
+              <a:rPr lang="en-US" altLang="ja-JP" dirty="0"/>
+              <a:t>Google</a:t>
+            </a:r>
+            <a:r>
+              <a:rPr lang="ja-JP" altLang="en-US" dirty="0"/>
+              <a:t>社 </a:t>
+            </a:r>
+            <a:r>
+              <a:rPr kumimoji="1" lang="ja-JP" altLang="en-US" dirty="0"/>
+              <a:t>⇔ サンケン電気</a:t>
+            </a:r>
+            <a:r>
+              <a:rPr lang="ja-JP" altLang="en-US" dirty="0"/>
+              <a:t>社</a:t>
+            </a:r>
+            <a:endParaRPr lang="en-US" altLang="ja-JP" dirty="0"/>
+          </a:p>
+          <a:p>
+            <a:pPr lvl="1"/>
+            <a:r>
+              <a:rPr kumimoji="1" lang="ja-JP" altLang="en-US" dirty="0"/>
+              <a:t>ファブ：</a:t>
+            </a:r>
+            <a:endParaRPr kumimoji="1" lang="en-US" altLang="ja-JP" dirty="0"/>
+          </a:p>
+          <a:p>
+            <a:pPr lvl="2"/>
+            <a:r>
+              <a:rPr lang="en-US" altLang="ja-JP" dirty="0"/>
+              <a:t>SkywaterPDK</a:t>
+            </a:r>
+            <a:r>
+              <a:rPr kumimoji="1" lang="ja-JP" altLang="en-US" dirty="0"/>
+              <a:t> ⇔ </a:t>
+            </a:r>
+            <a:r>
+              <a:rPr kumimoji="1" lang="en-US" altLang="ja-JP" dirty="0"/>
+              <a:t>OpenRule1umPDK</a:t>
+            </a:r>
+          </a:p>
+        </p:txBody>
+      </p:sp>
+      <p:pic>
+        <p:nvPicPr>
+          <p:cNvPr id="5" name="Google Shape;188;p35">
+            <a:extLst>
+              <a:ext uri="{FF2B5EF4-FFF2-40B4-BE49-F238E27FC236}">
+                <a16:creationId xmlns:a16="http://schemas.microsoft.com/office/drawing/2014/main" id="{1D2B4060-7D39-EB53-1F6F-F1EE9468E036}"/>
+              </a:ext>
+            </a:extLst>
+          </p:cNvPr>
+          <p:cNvPicPr preferRelativeResize="0"/>
+          <p:nvPr/>
+        </p:nvPicPr>
+        <p:blipFill rotWithShape="1">
+          <a:blip r:embed="rId2"/>
+          <a:srcRect r="5355" b="3"/>
+          <a:stretch/>
+        </p:blipFill>
+        <p:spPr>
+          <a:xfrm>
+            <a:off x="1624260" y="214884"/>
+            <a:ext cx="3913979" cy="3011175"/>
+          </a:xfrm>
+          <a:prstGeom prst="rect">
+            <a:avLst/>
+          </a:prstGeom>
+          <a:noFill/>
+        </p:spPr>
+      </p:pic>
+      <p:sp>
+        <p:nvSpPr>
+          <p:cNvPr id="6" name="矢印: 下 5">
+            <a:extLst>
+              <a:ext uri="{FF2B5EF4-FFF2-40B4-BE49-F238E27FC236}">
+                <a16:creationId xmlns:a16="http://schemas.microsoft.com/office/drawing/2014/main" id="{425671B2-62CE-E47C-9536-F68AF0209466}"/>
+              </a:ext>
+            </a:extLst>
+          </p:cNvPr>
+          <p:cNvSpPr/>
+          <p:nvPr/>
+        </p:nvSpPr>
+        <p:spPr>
+          <a:xfrm>
+            <a:off x="3199548" y="3020750"/>
+            <a:ext cx="1033027" cy="610221"/>
+          </a:xfrm>
+          <a:prstGeom prst="downArrow">
+            <a:avLst/>
+          </a:prstGeom>
+        </p:spPr>
+        <p:style>
+          <a:lnRef idx="1">
+            <a:schemeClr val="accent6"/>
+          </a:lnRef>
+          <a:fillRef idx="2">
+            <a:schemeClr val="accent6"/>
+          </a:fillRef>
+          <a:effectRef idx="1">
+            <a:schemeClr val="accent6"/>
+          </a:effectRef>
+          <a:fontRef idx="minor">
+            <a:schemeClr val="dk1"/>
+          </a:fontRef>
+        </p:style>
+        <p:txBody>
+          <a:bodyPr rtlCol="0" anchor="ctr"/>
+          <a:lstStyle/>
+          <a:p>
+            <a:pPr algn="ctr"/>
+            <a:endParaRPr kumimoji="1" lang="ja-JP" altLang="en-US"/>
+          </a:p>
+        </p:txBody>
+      </p:sp>
+      <p:sp>
+        <p:nvSpPr>
+          <p:cNvPr id="12" name="四角形: 角を丸くする 11">
+            <a:extLst>
+              <a:ext uri="{FF2B5EF4-FFF2-40B4-BE49-F238E27FC236}">
+                <a16:creationId xmlns:a16="http://schemas.microsoft.com/office/drawing/2014/main" id="{70782229-0DC9-6754-EF0C-774A087FD47C}"/>
+              </a:ext>
+            </a:extLst>
+          </p:cNvPr>
+          <p:cNvSpPr/>
+          <p:nvPr/>
+        </p:nvSpPr>
+        <p:spPr>
+          <a:xfrm>
+            <a:off x="5820613" y="5256494"/>
+            <a:ext cx="6320562" cy="1235066"/>
+          </a:xfrm>
+          <a:prstGeom prst="roundRect">
+            <a:avLst/>
+          </a:prstGeom>
+        </p:spPr>
+        <p:style>
+          <a:lnRef idx="0">
+            <a:schemeClr val="accent4"/>
+          </a:lnRef>
+          <a:fillRef idx="3">
+            <a:schemeClr val="accent4"/>
+          </a:fillRef>
+          <a:effectRef idx="3">
+            <a:schemeClr val="accent4"/>
+          </a:effectRef>
+          <a:fontRef idx="minor">
+            <a:schemeClr val="lt1"/>
+          </a:fontRef>
+        </p:style>
+        <p:txBody>
+          <a:bodyPr rtlCol="0" anchor="ctr"/>
+          <a:lstStyle/>
+          <a:p>
+            <a:pPr algn="ctr"/>
+            <a:r>
+              <a:rPr kumimoji="1" lang="en-US" altLang="ja-JP" sz="2400" dirty="0"/>
+              <a:t>ISHI</a:t>
+            </a:r>
+            <a:r>
+              <a:rPr kumimoji="1" lang="ja-JP" altLang="en-US" sz="2400" dirty="0"/>
+              <a:t>会版</a:t>
+            </a:r>
+            <a:r>
+              <a:rPr kumimoji="1" lang="en-US" altLang="ja-JP" sz="2400" dirty="0"/>
+              <a:t>OpenMPW-PTC06-2</a:t>
+            </a:r>
+            <a:r>
+              <a:rPr kumimoji="1" lang="ja-JP" altLang="en-US" sz="2400" dirty="0"/>
+              <a:t>として開催！</a:t>
+            </a:r>
+          </a:p>
+        </p:txBody>
+      </p:sp>
+      <p:grpSp>
+        <p:nvGrpSpPr>
+          <p:cNvPr id="16" name="グループ化 15">
+            <a:extLst>
+              <a:ext uri="{FF2B5EF4-FFF2-40B4-BE49-F238E27FC236}">
+                <a16:creationId xmlns:a16="http://schemas.microsoft.com/office/drawing/2014/main" id="{7407F25D-6236-3BB8-CC3E-8EC7C23D3648}"/>
+              </a:ext>
+            </a:extLst>
+          </p:cNvPr>
+          <p:cNvGrpSpPr/>
+          <p:nvPr/>
+        </p:nvGrpSpPr>
+        <p:grpSpPr>
+          <a:xfrm>
+            <a:off x="1699641" y="3630971"/>
+            <a:ext cx="4092406" cy="3042529"/>
+            <a:chOff x="1728207" y="3600586"/>
+            <a:chExt cx="4092406" cy="3042529"/>
+          </a:xfrm>
+        </p:grpSpPr>
+        <p:grpSp>
+          <p:nvGrpSpPr>
+            <p:cNvPr id="14" name="グループ化 13">
+              <a:extLst>
+                <a:ext uri="{FF2B5EF4-FFF2-40B4-BE49-F238E27FC236}">
+                  <a16:creationId xmlns:a16="http://schemas.microsoft.com/office/drawing/2014/main" id="{24055636-A8C5-BFA8-0706-FCE7186D3C6C}"/>
+                </a:ext>
+              </a:extLst>
+            </p:cNvPr>
+            <p:cNvGrpSpPr/>
+            <p:nvPr/>
+          </p:nvGrpSpPr>
+          <p:grpSpPr>
+            <a:xfrm>
+              <a:off x="1728207" y="3600586"/>
+              <a:ext cx="4092406" cy="3042529"/>
+              <a:chOff x="1543363" y="3662239"/>
+              <a:chExt cx="3520889" cy="3211382"/>
+            </a:xfrm>
+          </p:grpSpPr>
+          <p:pic>
+            <p:nvPicPr>
+              <p:cNvPr id="4" name="Google Shape;188;p35">
+                <a:extLst>
+                  <a:ext uri="{FF2B5EF4-FFF2-40B4-BE49-F238E27FC236}">
+                    <a16:creationId xmlns:a16="http://schemas.microsoft.com/office/drawing/2014/main" id="{34778E97-6CDB-222D-09AE-7C05F1CFF769}"/>
+                  </a:ext>
+                </a:extLst>
+              </p:cNvPr>
+              <p:cNvPicPr preferRelativeResize="0"/>
+              <p:nvPr/>
+            </p:nvPicPr>
+            <p:blipFill>
+              <a:blip r:embed="rId2"/>
+              <a:stretch>
+                <a:fillRect/>
+              </a:stretch>
+            </p:blipFill>
+            <p:spPr>
+              <a:xfrm>
+                <a:off x="1543363" y="3662239"/>
+                <a:ext cx="3475151" cy="3211382"/>
+              </a:xfrm>
+              <a:prstGeom prst="rect">
+                <a:avLst/>
+              </a:prstGeom>
+              <a:noFill/>
+            </p:spPr>
+          </p:pic>
+          <p:pic>
+            <p:nvPicPr>
+              <p:cNvPr id="8" name="Google Shape;265;p45">
+                <a:extLst>
+                  <a:ext uri="{FF2B5EF4-FFF2-40B4-BE49-F238E27FC236}">
+                    <a16:creationId xmlns:a16="http://schemas.microsoft.com/office/drawing/2014/main" id="{8C583372-30CE-5B87-EB82-7F26D5742F38}"/>
+                  </a:ext>
+                </a:extLst>
+              </p:cNvPr>
+              <p:cNvPicPr preferRelativeResize="0"/>
+              <p:nvPr/>
+            </p:nvPicPr>
+            <p:blipFill>
+              <a:blip r:embed="rId3"/>
+              <a:stretch>
+                <a:fillRect/>
+              </a:stretch>
+            </p:blipFill>
+            <p:spPr>
+              <a:xfrm>
+                <a:off x="2818016" y="3839848"/>
+                <a:ext cx="888762" cy="731922"/>
+              </a:xfrm>
+              <a:prstGeom prst="rect">
+                <a:avLst/>
+              </a:prstGeom>
+              <a:noFill/>
+            </p:spPr>
+          </p:pic>
+          <p:pic>
+            <p:nvPicPr>
+              <p:cNvPr id="13" name="図 12">
+                <a:extLst>
+                  <a:ext uri="{FF2B5EF4-FFF2-40B4-BE49-F238E27FC236}">
+                    <a16:creationId xmlns:a16="http://schemas.microsoft.com/office/drawing/2014/main" id="{C2705329-EB80-A45A-84E7-049F9B50B38C}"/>
+                  </a:ext>
+                </a:extLst>
+              </p:cNvPr>
+              <p:cNvPicPr>
+                <a:picLocks noChangeAspect="1"/>
+              </p:cNvPicPr>
+              <p:nvPr/>
+            </p:nvPicPr>
+            <p:blipFill>
+              <a:blip r:embed="rId4"/>
+              <a:stretch>
+                <a:fillRect/>
+              </a:stretch>
+            </p:blipFill>
+            <p:spPr>
+              <a:xfrm>
+                <a:off x="3542921" y="5986180"/>
+                <a:ext cx="1521331" cy="337060"/>
+              </a:xfrm>
+              <a:prstGeom prst="rect">
+                <a:avLst/>
+              </a:prstGeom>
+            </p:spPr>
+          </p:pic>
+        </p:grpSp>
+        <p:pic>
+          <p:nvPicPr>
+            <p:cNvPr id="1026" name="Picture 2" descr="サンケングループの社会課題に対する考え方">
+              <a:extLst>
+                <a:ext uri="{FF2B5EF4-FFF2-40B4-BE49-F238E27FC236}">
+                  <a16:creationId xmlns:a16="http://schemas.microsoft.com/office/drawing/2014/main" id="{9C059902-3405-6301-4C3F-527BC180FD75}"/>
+                </a:ext>
+              </a:extLst>
+            </p:cNvPr>
+            <p:cNvPicPr>
+              <a:picLocks noChangeAspect="1" noChangeArrowheads="1"/>
+            </p:cNvPicPr>
+            <p:nvPr/>
+          </p:nvPicPr>
+          <p:blipFill>
+            <a:blip r:embed="rId5">
+              <a:extLst>
+                <a:ext uri="{28A0092B-C50C-407E-A947-70E740481C1C}">
+                  <a14:useLocalDpi xmlns:a14="http://schemas.microsoft.com/office/drawing/2010/main" val="0"/>
+                </a:ext>
+              </a:extLst>
+            </a:blip>
+            <a:srcRect/>
+            <a:stretch>
+              <a:fillRect/>
+            </a:stretch>
+          </p:blipFill>
+          <p:spPr bwMode="auto">
+            <a:xfrm>
+              <a:off x="1828799" y="5542382"/>
+              <a:ext cx="1062543" cy="584399"/>
+            </a:xfrm>
+            <a:prstGeom prst="rect">
+              <a:avLst/>
+            </a:prstGeom>
+            <a:noFill/>
+            <a:extLst>
+              <a:ext uri="{909E8E84-426E-40DD-AFC4-6F175D3DCCD1}">
+                <a14:hiddenFill xmlns:a14="http://schemas.microsoft.com/office/drawing/2010/main">
+                  <a:solidFill>
+                    <a:srgbClr val="FFFFFF"/>
+                  </a:solidFill>
+                </a14:hiddenFill>
+              </a:ext>
+            </a:extLst>
+          </p:spPr>
+        </p:pic>
+      </p:grpSp>
+    </p:spTree>
+    <p:extLst>
+      <p:ext uri="{BB962C8B-B14F-4D97-AF65-F5344CB8AC3E}">
+        <p14:creationId xmlns:p14="http://schemas.microsoft.com/office/powerpoint/2010/main" val="1204286947"/>
+      </p:ext>
+    </p:extLst>
+  </p:cSld>
+  <p:clrMapOvr>
+    <a:masterClrMapping/>
+  </p:clrMapOvr>
+</p:sld>
+</file>
+
+<file path=ppt/slides/slide3.xml><?xml version="1.0" encoding="utf-8"?>
+<p:sld xmlns:a="http://schemas.openxmlformats.org/drawingml/2006/main" xmlns:r="http://schemas.openxmlformats.org/officeDocument/2006/relationships" xmlns:p="http://schemas.openxmlformats.org/presentationml/2006/main">
+  <p:cSld>
+    <p:bg>
+      <p:bgPr>
+        <a:solidFill>
+          <a:schemeClr val="bg1"/>
+        </a:solidFill>
+        <a:effectLst/>
+      </p:bgPr>
+    </p:bg>
+    <p:spTree>
+      <p:nvGrpSpPr>
+        <p:cNvPr id="1" name="">
+          <a:extLst>
+            <a:ext uri="{FF2B5EF4-FFF2-40B4-BE49-F238E27FC236}">
+              <a16:creationId xmlns:a16="http://schemas.microsoft.com/office/drawing/2014/main" id="{10FA9847-2E45-7A6B-7E3F-640B4D667B43}"/>
+            </a:ext>
+          </a:extLst>
+        </p:cNvPr>
+        <p:cNvGrpSpPr/>
+        <p:nvPr/>
+      </p:nvGrpSpPr>
+      <p:grpSpPr>
+        <a:xfrm>
+          <a:off x="0" y="0"/>
+          <a:ext cx="0" cy="0"/>
+          <a:chOff x="0" y="0"/>
+          <a:chExt cx="0" cy="0"/>
+        </a:xfrm>
+      </p:grpSpPr>
+      <p:sp useBgFill="1">
+        <p:nvSpPr>
+          <p:cNvPr id="17" name="Rectangle 19">
+            <a:extLst>
+              <a:ext uri="{FF2B5EF4-FFF2-40B4-BE49-F238E27FC236}">
+                <a16:creationId xmlns:a16="http://schemas.microsoft.com/office/drawing/2014/main" id="{B0F091FF-9DDE-FE54-EAA5-D8E8293C2EE7}"/>
+              </a:ext>
+              <a:ext uri="{C183D7F6-B498-43B3-948B-1728B52AA6E4}">
+                <adec:decorative xmlns:adec="http://schemas.microsoft.com/office/drawing/2017/decorative" val="1"/>
+              </a:ext>
+            </a:extLst>
+          </p:cNvPr>
+          <p:cNvSpPr>
+            <a:spLocks noGrp="1" noRot="1" noChangeAspect="1" noMove="1" noResize="1" noEditPoints="1" noAdjustHandles="1" noChangeArrowheads="1" noChangeShapeType="1" noTextEdit="1"/>
+          </p:cNvSpPr>
+          <p:nvPr>
+            <p:extLst>
+              <p:ext uri="{386F3935-93C4-4BCD-93E2-E3B085C9AB24}">
+                <p16:designElem xmlns:p16="http://schemas.microsoft.com/office/powerpoint/2015/main" val="1"/>
+              </p:ext>
+            </p:extLst>
+          </p:nvPr>
+        </p:nvSpPr>
+        <p:spPr bwMode="white">
+          <a:xfrm>
+            <a:off x="0" y="0"/>
+            <a:ext cx="12192000" cy="6858000"/>
+          </a:xfrm>
+          <a:prstGeom prst="rect">
+            <a:avLst/>
+          </a:prstGeom>
+          <a:ln>
+            <a:noFill/>
+          </a:ln>
+        </p:spPr>
+        <p:style>
+          <a:lnRef idx="2">
+            <a:schemeClr val="accent1">
+              <a:shade val="50000"/>
+            </a:schemeClr>
+          </a:lnRef>
+          <a:fillRef idx="1">
+            <a:schemeClr val="accent1"/>
+          </a:fillRef>
+          <a:effectRef idx="0">
+            <a:schemeClr val="accent1"/>
+          </a:effectRef>
+          <a:fontRef idx="minor">
+            <a:schemeClr val="lt1"/>
+          </a:fontRef>
+        </p:style>
+        <p:txBody>
+          <a:bodyPr rtlCol="0" anchor="ctr"/>
+          <a:lstStyle>
+            <a:defPPr>
+              <a:defRPr lang="en-US"/>
+            </a:defPPr>
+            <a:lvl1pPr marL="0" algn="l" defTabSz="914400" rtl="0" eaLnBrk="1" latinLnBrk="0" hangingPunct="1">
+              <a:defRPr sz="1800" kern="1200">
+                <a:solidFill>
+                  <a:schemeClr val="lt1"/>
+                </a:solidFill>
+                <a:latin typeface="+mn-lt"/>
+                <a:ea typeface="+mn-ea"/>
+                <a:cs typeface="+mn-cs"/>
+              </a:defRPr>
+            </a:lvl1pPr>
+            <a:lvl2pPr marL="457200" algn="l" defTabSz="914400" rtl="0" eaLnBrk="1" latinLnBrk="0" hangingPunct="1">
+              <a:defRPr sz="1800" kern="1200">
+                <a:solidFill>
+                  <a:schemeClr val="lt1"/>
+                </a:solidFill>
+                <a:latin typeface="+mn-lt"/>
+                <a:ea typeface="+mn-ea"/>
+                <a:cs typeface="+mn-cs"/>
+              </a:defRPr>
+            </a:lvl2pPr>
+            <a:lvl3pPr marL="914400" algn="l" defTabSz="914400" rtl="0" eaLnBrk="1" latinLnBrk="0" hangingPunct="1">
+              <a:defRPr sz="1800" kern="1200">
+                <a:solidFill>
+                  <a:schemeClr val="lt1"/>
+                </a:solidFill>
+                <a:latin typeface="+mn-lt"/>
+                <a:ea typeface="+mn-ea"/>
+                <a:cs typeface="+mn-cs"/>
+              </a:defRPr>
+            </a:lvl3pPr>
+            <a:lvl4pPr marL="1371600" algn="l" defTabSz="914400" rtl="0" eaLnBrk="1" latinLnBrk="0" hangingPunct="1">
+              <a:defRPr sz="1800" kern="1200">
+                <a:solidFill>
+                  <a:schemeClr val="lt1"/>
+                </a:solidFill>
+                <a:latin typeface="+mn-lt"/>
+                <a:ea typeface="+mn-ea"/>
+                <a:cs typeface="+mn-cs"/>
+              </a:defRPr>
+            </a:lvl4pPr>
+            <a:lvl5pPr marL="1828800" algn="l" defTabSz="914400" rtl="0" eaLnBrk="1" latinLnBrk="0" hangingPunct="1">
+              <a:defRPr sz="1800" kern="1200">
+                <a:solidFill>
+                  <a:schemeClr val="lt1"/>
+                </a:solidFill>
+                <a:latin typeface="+mn-lt"/>
+                <a:ea typeface="+mn-ea"/>
+                <a:cs typeface="+mn-cs"/>
+              </a:defRPr>
+            </a:lvl5pPr>
+            <a:lvl6pPr marL="2286000" algn="l" defTabSz="914400" rtl="0" eaLnBrk="1" latinLnBrk="0" hangingPunct="1">
+              <a:defRPr sz="1800" kern="1200">
+                <a:solidFill>
+                  <a:schemeClr val="lt1"/>
+                </a:solidFill>
+                <a:latin typeface="+mn-lt"/>
+                <a:ea typeface="+mn-ea"/>
+                <a:cs typeface="+mn-cs"/>
+              </a:defRPr>
+            </a:lvl6pPr>
+            <a:lvl7pPr marL="2743200" algn="l" defTabSz="914400" rtl="0" eaLnBrk="1" latinLnBrk="0" hangingPunct="1">
+              <a:defRPr sz="1800" kern="1200">
+                <a:solidFill>
+                  <a:schemeClr val="lt1"/>
+                </a:solidFill>
+                <a:latin typeface="+mn-lt"/>
+                <a:ea typeface="+mn-ea"/>
+                <a:cs typeface="+mn-cs"/>
+              </a:defRPr>
+            </a:lvl7pPr>
+            <a:lvl8pPr marL="3200400" algn="l" defTabSz="914400" rtl="0" eaLnBrk="1" latinLnBrk="0" hangingPunct="1">
+              <a:defRPr sz="1800" kern="1200">
+                <a:solidFill>
+                  <a:schemeClr val="lt1"/>
+                </a:solidFill>
+                <a:latin typeface="+mn-lt"/>
+                <a:ea typeface="+mn-ea"/>
+                <a:cs typeface="+mn-cs"/>
+              </a:defRPr>
+            </a:lvl8pPr>
+            <a:lvl9pPr marL="3657600" algn="l" defTabSz="914400" rtl="0" eaLnBrk="1" latinLnBrk="0" hangingPunct="1">
+              <a:defRPr sz="1800" kern="1200">
+                <a:solidFill>
+                  <a:schemeClr val="lt1"/>
+                </a:solidFill>
+                <a:latin typeface="+mn-lt"/>
+                <a:ea typeface="+mn-ea"/>
+                <a:cs typeface="+mn-cs"/>
+              </a:defRPr>
+            </a:lvl9pPr>
+          </a:lstStyle>
+          <a:p>
+            <a:pPr algn="ctr"/>
+            <a:endParaRPr lang="en-US" dirty="0"/>
+          </a:p>
+        </p:txBody>
+      </p:sp>
+      <p:sp>
+        <p:nvSpPr>
+          <p:cNvPr id="18" name="Arc 21">
+            <a:extLst>
+              <a:ext uri="{FF2B5EF4-FFF2-40B4-BE49-F238E27FC236}">
+                <a16:creationId xmlns:a16="http://schemas.microsoft.com/office/drawing/2014/main" id="{BC4FD76E-CB36-64A8-FEF3-91A63E706A99}"/>
+              </a:ext>
+              <a:ext uri="{C183D7F6-B498-43B3-948B-1728B52AA6E4}">
+                <adec:decorative xmlns:adec="http://schemas.microsoft.com/office/drawing/2017/decorative" val="1"/>
+              </a:ext>
+            </a:extLst>
+          </p:cNvPr>
+          <p:cNvSpPr>
+            <a:spLocks noGrp="1" noRot="1" noChangeAspect="1" noMove="1" noResize="1" noEditPoints="1" noAdjustHandles="1" noChangeArrowheads="1" noChangeShapeType="1" noTextEdit="1"/>
+          </p:cNvSpPr>
+          <p:nvPr>
+            <p:extLst>
+              <p:ext uri="{386F3935-93C4-4BCD-93E2-E3B085C9AB24}">
+                <p16:designElem xmlns:p16="http://schemas.microsoft.com/office/powerpoint/2015/main" val="1"/>
+              </p:ext>
+            </p:extLst>
+          </p:nvPr>
+        </p:nvSpPr>
+        <p:spPr>
+          <a:xfrm rot="3967198" flipH="1">
+            <a:off x="8631348" y="490493"/>
+            <a:ext cx="2987899" cy="2987899"/>
+          </a:xfrm>
+          <a:prstGeom prst="arc">
+            <a:avLst>
+              <a:gd name="adj1" fmla="val 14441841"/>
+              <a:gd name="adj2" fmla="val 0"/>
+            </a:avLst>
+          </a:prstGeom>
+          <a:ln w="127000" cap="rnd">
+            <a:solidFill>
+              <a:schemeClr val="accent4"/>
+            </a:solidFill>
+            <a:prstDash val="dash"/>
+            <a:miter lim="800000"/>
+          </a:ln>
+        </p:spPr>
+        <p:style>
+          <a:lnRef idx="1">
+            <a:schemeClr val="accent1"/>
+          </a:lnRef>
+          <a:fillRef idx="0">
+            <a:schemeClr val="accent1"/>
+          </a:fillRef>
+          <a:effectRef idx="0">
+            <a:schemeClr val="accent1"/>
+          </a:effectRef>
+          <a:fontRef idx="minor">
+            <a:schemeClr val="tx1"/>
+          </a:fontRef>
+        </p:style>
+        <p:txBody>
+          <a:bodyPr rtlCol="0" anchor="ctr"/>
+          <a:lstStyle/>
+          <a:p>
+            <a:pPr marL="0" marR="0" lvl="0" indent="0" algn="ctr" defTabSz="914400" rtl="0" eaLnBrk="1" fontAlgn="auto" latinLnBrk="0" hangingPunct="1">
+              <a:lnSpc>
+                <a:spcPct val="100000"/>
+              </a:lnSpc>
+              <a:spcBef>
+                <a:spcPts val="0"/>
+              </a:spcBef>
+              <a:spcAft>
+                <a:spcPts val="0"/>
+              </a:spcAft>
+              <a:buClrTx/>
+              <a:buSzTx/>
+              <a:buFontTx/>
+              <a:buNone/>
+              <a:tabLst/>
+              <a:defRPr/>
+            </a:pPr>
+            <a:endParaRPr kumimoji="0" lang="en-US" sz="1800" b="0" i="0" u="none" strike="noStrike" kern="1200" cap="none" spc="0" normalizeH="0" baseline="0" noProof="0" dirty="0">
+              <a:ln>
+                <a:noFill/>
+              </a:ln>
+              <a:solidFill>
+                <a:srgbClr val="000000"/>
+              </a:solidFill>
+              <a:effectLst/>
+              <a:uLnTx/>
+              <a:uFillTx/>
+              <a:latin typeface="Calibri" panose="020F0502020204030204"/>
+              <a:ea typeface="+mn-ea"/>
+              <a:cs typeface="+mn-cs"/>
+            </a:endParaRPr>
+          </a:p>
+        </p:txBody>
+      </p:sp>
+      <p:sp>
+        <p:nvSpPr>
+          <p:cNvPr id="2" name="タイトル 1">
+            <a:extLst>
+              <a:ext uri="{FF2B5EF4-FFF2-40B4-BE49-F238E27FC236}">
+                <a16:creationId xmlns:a16="http://schemas.microsoft.com/office/drawing/2014/main" id="{564CE21D-7256-D075-5195-478CBB75E9A5}"/>
+              </a:ext>
+            </a:extLst>
+          </p:cNvPr>
+          <p:cNvSpPr>
+            <a:spLocks noGrp="1"/>
+          </p:cNvSpPr>
+          <p:nvPr>
+            <p:ph type="title"/>
+          </p:nvPr>
+        </p:nvSpPr>
+        <p:spPr>
+          <a:xfrm>
+            <a:off x="5894962" y="857865"/>
+            <a:ext cx="6297038" cy="1325563"/>
+          </a:xfrm>
+        </p:spPr>
+        <p:txBody>
+          <a:bodyPr>
+            <a:normAutofit/>
+          </a:bodyPr>
+          <a:lstStyle/>
+          <a:p>
+            <a:r>
+              <a:rPr lang="en-US" altLang="ja-JP" dirty="0"/>
+              <a:t>2025</a:t>
+            </a:r>
+            <a:r>
+              <a:rPr lang="ja-JP" altLang="en-US" dirty="0"/>
+              <a:t>年</a:t>
+            </a:r>
+            <a:r>
+              <a:rPr kumimoji="1" lang="ja-JP" altLang="en-US" dirty="0"/>
+              <a:t>の</a:t>
+            </a:r>
+            <a:r>
+              <a:rPr kumimoji="1" lang="en-US" altLang="ja-JP" dirty="0"/>
+              <a:t>OpenMPW</a:t>
+            </a:r>
+            <a:r>
+              <a:rPr kumimoji="1" lang="ja-JP" altLang="en-US" dirty="0"/>
+              <a:t>！</a:t>
+            </a:r>
+          </a:p>
+        </p:txBody>
+      </p:sp>
+      <p:sp>
+        <p:nvSpPr>
+          <p:cNvPr id="19" name="Freeform: Shape 23">
+            <a:extLst>
+              <a:ext uri="{FF2B5EF4-FFF2-40B4-BE49-F238E27FC236}">
+                <a16:creationId xmlns:a16="http://schemas.microsoft.com/office/drawing/2014/main" id="{B9F3CD04-F3B3-735B-78F7-289711AADCC2}"/>
+              </a:ext>
+              <a:ext uri="{C183D7F6-B498-43B3-948B-1728B52AA6E4}">
+                <adec:decorative xmlns:adec="http://schemas.microsoft.com/office/drawing/2017/decorative" val="1"/>
+              </a:ext>
+            </a:extLst>
+          </p:cNvPr>
+          <p:cNvSpPr>
+            <a:spLocks noGrp="1" noRot="1" noChangeAspect="1" noMove="1" noResize="1" noEditPoints="1" noAdjustHandles="1" noChangeArrowheads="1" noChangeShapeType="1" noTextEdit="1"/>
+          </p:cNvSpPr>
+          <p:nvPr>
+            <p:extLst>
+              <p:ext uri="{386F3935-93C4-4BCD-93E2-E3B085C9AB24}">
+                <p16:designElem xmlns:p16="http://schemas.microsoft.com/office/powerpoint/2015/main" val="1"/>
+              </p:ext>
+            </p:extLst>
+          </p:nvPr>
+        </p:nvSpPr>
+        <p:spPr>
+          <a:xfrm flipH="1">
+            <a:off x="0" y="5486400"/>
+            <a:ext cx="2672863" cy="1371600"/>
+          </a:xfrm>
+          <a:custGeom>
+            <a:avLst/>
+            <a:gdLst>
+              <a:gd name="connsiteX0" fmla="*/ 1721734 w 2672863"/>
+              <a:gd name="connsiteY0" fmla="*/ 0 h 1371600"/>
+              <a:gd name="connsiteX1" fmla="*/ 2564444 w 2672863"/>
+              <a:gd name="connsiteY1" fmla="*/ 213382 h 1371600"/>
+              <a:gd name="connsiteX2" fmla="*/ 2672863 w 2672863"/>
+              <a:gd name="connsiteY2" fmla="*/ 279248 h 1371600"/>
+              <a:gd name="connsiteX3" fmla="*/ 2672863 w 2672863"/>
+              <a:gd name="connsiteY3" fmla="*/ 1371600 h 1371600"/>
+              <a:gd name="connsiteX4" fmla="*/ 0 w 2672863"/>
+              <a:gd name="connsiteY4" fmla="*/ 1371600 h 1371600"/>
+              <a:gd name="connsiteX5" fmla="*/ 33268 w 2672863"/>
+              <a:gd name="connsiteY5" fmla="*/ 1242216 h 1371600"/>
+              <a:gd name="connsiteX6" fmla="*/ 1721734 w 2672863"/>
+              <a:gd name="connsiteY6" fmla="*/ 0 h 1371600"/>
+            </a:gdLst>
+            <a:ahLst/>
+            <a:cxnLst>
+              <a:cxn ang="0">
+                <a:pos x="connsiteX0" y="connsiteY0"/>
+              </a:cxn>
+              <a:cxn ang="0">
+                <a:pos x="connsiteX1" y="connsiteY1"/>
+              </a:cxn>
+              <a:cxn ang="0">
+                <a:pos x="connsiteX2" y="connsiteY2"/>
+              </a:cxn>
+              <a:cxn ang="0">
+                <a:pos x="connsiteX3" y="connsiteY3"/>
+              </a:cxn>
+              <a:cxn ang="0">
+                <a:pos x="connsiteX4" y="connsiteY4"/>
+              </a:cxn>
+              <a:cxn ang="0">
+                <a:pos x="connsiteX5" y="connsiteY5"/>
+              </a:cxn>
+              <a:cxn ang="0">
+                <a:pos x="connsiteX6" y="connsiteY6"/>
+              </a:cxn>
+            </a:cxnLst>
+            <a:rect l="l" t="t" r="r" b="b"/>
+            <a:pathLst>
+              <a:path w="2672863" h="1371600">
+                <a:moveTo>
+                  <a:pt x="1721734" y="0"/>
+                </a:moveTo>
+                <a:cubicBezTo>
+                  <a:pt x="2026863" y="0"/>
+                  <a:pt x="2313937" y="77299"/>
+                  <a:pt x="2564444" y="213382"/>
+                </a:cubicBezTo>
+                <a:lnTo>
+                  <a:pt x="2672863" y="279248"/>
+                </a:lnTo>
+                <a:lnTo>
+                  <a:pt x="2672863" y="1371600"/>
+                </a:lnTo>
+                <a:lnTo>
+                  <a:pt x="0" y="1371600"/>
+                </a:lnTo>
+                <a:lnTo>
+                  <a:pt x="33268" y="1242216"/>
+                </a:lnTo>
+                <a:cubicBezTo>
+                  <a:pt x="257110" y="522539"/>
+                  <a:pt x="928399" y="0"/>
+                  <a:pt x="1721734" y="0"/>
+                </a:cubicBezTo>
+                <a:close/>
+              </a:path>
+            </a:pathLst>
+          </a:custGeom>
+          <a:solidFill>
+            <a:schemeClr val="accent4"/>
+          </a:solidFill>
+          <a:ln>
+            <a:noFill/>
+          </a:ln>
+        </p:spPr>
+        <p:style>
+          <a:lnRef idx="2">
+            <a:schemeClr val="accent1">
+              <a:shade val="50000"/>
+            </a:schemeClr>
+          </a:lnRef>
+          <a:fillRef idx="1">
+            <a:schemeClr val="accent1"/>
+          </a:fillRef>
+          <a:effectRef idx="0">
+            <a:schemeClr val="accent1"/>
+          </a:effectRef>
+          <a:fontRef idx="minor">
+            <a:schemeClr val="lt1"/>
+          </a:fontRef>
+        </p:style>
+        <p:txBody>
+          <a:bodyPr wrap="square" rtlCol="0" anchor="ctr">
+            <a:noAutofit/>
+          </a:bodyPr>
+          <a:lstStyle/>
+          <a:p>
+            <a:pPr algn="ctr"/>
+            <a:endParaRPr lang="en-US" dirty="0"/>
+          </a:p>
+        </p:txBody>
+      </p:sp>
+      <p:sp>
+        <p:nvSpPr>
+          <p:cNvPr id="3" name="コンテンツ プレースホルダー 2">
+            <a:extLst>
+              <a:ext uri="{FF2B5EF4-FFF2-40B4-BE49-F238E27FC236}">
+                <a16:creationId xmlns:a16="http://schemas.microsoft.com/office/drawing/2014/main" id="{2C596810-9E2F-E93D-08A5-AD2448A5B7A1}"/>
+              </a:ext>
+            </a:extLst>
+          </p:cNvPr>
+          <p:cNvSpPr>
+            <a:spLocks noGrp="1"/>
+          </p:cNvSpPr>
+          <p:nvPr>
+            <p:ph idx="1"/>
+          </p:nvPr>
+        </p:nvSpPr>
+        <p:spPr>
+          <a:xfrm>
+            <a:off x="5877746" y="2183428"/>
+            <a:ext cx="6206296" cy="3941691"/>
+          </a:xfrm>
+        </p:spPr>
+        <p:txBody>
+          <a:bodyPr>
+            <a:normAutofit/>
+          </a:bodyPr>
+          <a:lstStyle/>
+          <a:p>
+            <a:r>
+              <a:rPr lang="en-US" altLang="ja-JP" dirty="0"/>
+              <a:t>OpenMPW</a:t>
+            </a:r>
+            <a:r>
+              <a:rPr lang="ja-JP" altLang="en-US" dirty="0"/>
+              <a:t>構造のシャトル</a:t>
+            </a:r>
+            <a:endParaRPr lang="en-US" altLang="ja-JP" dirty="0"/>
+          </a:p>
+          <a:p>
+            <a:pPr lvl="1"/>
+            <a:r>
+              <a:rPr kumimoji="1" lang="ja-JP" altLang="en-US" dirty="0"/>
+              <a:t>コミュニティー</a:t>
+            </a:r>
+            <a:endParaRPr kumimoji="1" lang="en-US" altLang="ja-JP" dirty="0"/>
+          </a:p>
+          <a:p>
+            <a:pPr lvl="2"/>
+            <a:r>
+              <a:rPr kumimoji="1" lang="en-US" altLang="ja-JP" dirty="0"/>
+              <a:t>eFabless</a:t>
+            </a:r>
+            <a:r>
+              <a:rPr kumimoji="1" lang="ja-JP" altLang="en-US" dirty="0"/>
+              <a:t>社 ⇔ </a:t>
+            </a:r>
+            <a:r>
+              <a:rPr kumimoji="1" lang="en-US" altLang="ja-JP" dirty="0"/>
+              <a:t>ISHI</a:t>
+            </a:r>
+            <a:r>
+              <a:rPr kumimoji="1" lang="ja-JP" altLang="en-US" dirty="0"/>
+              <a:t>会</a:t>
+            </a:r>
+            <a:endParaRPr lang="en-US" altLang="ja-JP" dirty="0"/>
+          </a:p>
+          <a:p>
+            <a:pPr lvl="1"/>
+            <a:r>
+              <a:rPr lang="ja-JP" altLang="en-US" dirty="0"/>
+              <a:t>スポンサー</a:t>
+            </a:r>
+            <a:endParaRPr lang="en-US" altLang="ja-JP" dirty="0"/>
+          </a:p>
+          <a:p>
+            <a:pPr lvl="2"/>
+            <a:r>
+              <a:rPr lang="en-US" altLang="ja-JP" dirty="0"/>
+              <a:t>Google</a:t>
+            </a:r>
+            <a:r>
+              <a:rPr lang="ja-JP" altLang="en-US" dirty="0"/>
+              <a:t>社 </a:t>
+            </a:r>
+            <a:r>
+              <a:rPr kumimoji="1" lang="ja-JP" altLang="en-US" dirty="0"/>
+              <a:t>⇔ </a:t>
+            </a:r>
+            <a:r>
+              <a:rPr lang="ja-JP" altLang="en-US" dirty="0"/>
+              <a:t>九州大学</a:t>
+            </a:r>
+            <a:endParaRPr lang="en-US" altLang="ja-JP" dirty="0"/>
+          </a:p>
+          <a:p>
+            <a:pPr lvl="1"/>
+            <a:r>
+              <a:rPr kumimoji="1" lang="ja-JP" altLang="en-US" dirty="0"/>
+              <a:t>ファブ：</a:t>
+            </a:r>
+            <a:endParaRPr kumimoji="1" lang="en-US" altLang="ja-JP" dirty="0"/>
+          </a:p>
+          <a:p>
+            <a:pPr lvl="2"/>
+            <a:r>
+              <a:rPr lang="en-US" altLang="ja-JP" dirty="0"/>
+              <a:t>SkywaterPDK</a:t>
+            </a:r>
+            <a:r>
+              <a:rPr kumimoji="1" lang="ja-JP" altLang="en-US" dirty="0"/>
+              <a:t> ⇔ 東海理化</a:t>
+            </a:r>
+            <a:r>
+              <a:rPr kumimoji="1" lang="en-US" altLang="ja-JP" dirty="0"/>
+              <a:t>PDK</a:t>
+            </a:r>
+          </a:p>
+        </p:txBody>
+      </p:sp>
+      <p:pic>
+        <p:nvPicPr>
+          <p:cNvPr id="5" name="Google Shape;188;p35">
+            <a:extLst>
+              <a:ext uri="{FF2B5EF4-FFF2-40B4-BE49-F238E27FC236}">
+                <a16:creationId xmlns:a16="http://schemas.microsoft.com/office/drawing/2014/main" id="{B907AD7D-CC71-B1C1-72D4-A8CC0BAC4633}"/>
+              </a:ext>
+            </a:extLst>
+          </p:cNvPr>
+          <p:cNvPicPr preferRelativeResize="0"/>
+          <p:nvPr/>
+        </p:nvPicPr>
+        <p:blipFill rotWithShape="1">
+          <a:blip r:embed="rId2"/>
+          <a:srcRect r="5355" b="3"/>
+          <a:stretch/>
+        </p:blipFill>
+        <p:spPr>
+          <a:xfrm>
+            <a:off x="1624260" y="214884"/>
+            <a:ext cx="3913979" cy="3011175"/>
+          </a:xfrm>
+          <a:prstGeom prst="rect">
+            <a:avLst/>
+          </a:prstGeom>
+          <a:noFill/>
+        </p:spPr>
+      </p:pic>
+      <p:sp>
+        <p:nvSpPr>
+          <p:cNvPr id="6" name="矢印: 下 5">
+            <a:extLst>
+              <a:ext uri="{FF2B5EF4-FFF2-40B4-BE49-F238E27FC236}">
+                <a16:creationId xmlns:a16="http://schemas.microsoft.com/office/drawing/2014/main" id="{22043D84-2B3B-845E-8FD1-B8D1E08F345E}"/>
+              </a:ext>
+            </a:extLst>
+          </p:cNvPr>
+          <p:cNvSpPr/>
+          <p:nvPr/>
+        </p:nvSpPr>
+        <p:spPr>
+          <a:xfrm>
+            <a:off x="3199548" y="3020750"/>
+            <a:ext cx="1033027" cy="610221"/>
+          </a:xfrm>
+          <a:prstGeom prst="downArrow">
+            <a:avLst/>
+          </a:prstGeom>
+        </p:spPr>
+        <p:style>
+          <a:lnRef idx="1">
+            <a:schemeClr val="accent6"/>
+          </a:lnRef>
+          <a:fillRef idx="2">
+            <a:schemeClr val="accent6"/>
+          </a:fillRef>
+          <a:effectRef idx="1">
+            <a:schemeClr val="accent6"/>
+          </a:effectRef>
+          <a:fontRef idx="minor">
+            <a:schemeClr val="dk1"/>
+          </a:fontRef>
+        </p:style>
+        <p:txBody>
+          <a:bodyPr rtlCol="0" anchor="ctr"/>
+          <a:lstStyle/>
+          <a:p>
+            <a:pPr algn="ctr"/>
+            <a:endParaRPr kumimoji="1" lang="ja-JP" altLang="en-US"/>
+          </a:p>
+        </p:txBody>
+      </p:sp>
+      <p:sp>
+        <p:nvSpPr>
+          <p:cNvPr id="12" name="四角形: 角を丸くする 11">
+            <a:extLst>
+              <a:ext uri="{FF2B5EF4-FFF2-40B4-BE49-F238E27FC236}">
+                <a16:creationId xmlns:a16="http://schemas.microsoft.com/office/drawing/2014/main" id="{D1674C62-D4E0-BAE0-9CEC-8067224FA658}"/>
+              </a:ext>
+            </a:extLst>
+          </p:cNvPr>
+          <p:cNvSpPr/>
+          <p:nvPr/>
+        </p:nvSpPr>
+        <p:spPr>
+          <a:xfrm>
+            <a:off x="5820613" y="5256494"/>
+            <a:ext cx="6320562" cy="1235066"/>
+          </a:xfrm>
+          <a:prstGeom prst="roundRect">
+            <a:avLst/>
+          </a:prstGeom>
+        </p:spPr>
+        <p:style>
+          <a:lnRef idx="0">
+            <a:schemeClr val="accent4"/>
+          </a:lnRef>
+          <a:fillRef idx="3">
+            <a:schemeClr val="accent4"/>
+          </a:fillRef>
+          <a:effectRef idx="3">
+            <a:schemeClr val="accent4"/>
+          </a:effectRef>
+          <a:fontRef idx="minor">
+            <a:schemeClr val="lt1"/>
+          </a:fontRef>
+        </p:style>
+        <p:txBody>
+          <a:bodyPr rtlCol="0" anchor="ctr"/>
+          <a:lstStyle/>
+          <a:p>
+            <a:pPr algn="ctr"/>
+            <a:r>
+              <a:rPr kumimoji="1" lang="en-US" altLang="ja-JP" sz="2400" dirty="0"/>
+              <a:t>ISHI</a:t>
+            </a:r>
+            <a:r>
+              <a:rPr kumimoji="1" lang="ja-JP" altLang="en-US" sz="2400"/>
+              <a:t>会版</a:t>
+            </a:r>
+            <a:r>
+              <a:rPr kumimoji="1" lang="en-US" altLang="ja-JP" sz="2400" dirty="0"/>
+              <a:t>OpenMPW-TR10-2</a:t>
+            </a:r>
+            <a:r>
+              <a:rPr kumimoji="1" lang="ja-JP" altLang="en-US" sz="2400" dirty="0"/>
+              <a:t>として開催！</a:t>
+            </a:r>
+          </a:p>
+        </p:txBody>
+      </p:sp>
+      <p:grpSp>
+        <p:nvGrpSpPr>
+          <p:cNvPr id="14" name="グループ化 13">
+            <a:extLst>
+              <a:ext uri="{FF2B5EF4-FFF2-40B4-BE49-F238E27FC236}">
+                <a16:creationId xmlns:a16="http://schemas.microsoft.com/office/drawing/2014/main" id="{4AB61DAF-68A4-6686-9FB9-0F7FA802845F}"/>
+              </a:ext>
+            </a:extLst>
+          </p:cNvPr>
+          <p:cNvGrpSpPr/>
+          <p:nvPr/>
+        </p:nvGrpSpPr>
+        <p:grpSpPr>
+          <a:xfrm>
+            <a:off x="1699641" y="3630971"/>
+            <a:ext cx="4039244" cy="3042529"/>
+            <a:chOff x="1543363" y="3662239"/>
+            <a:chExt cx="3475151" cy="3211382"/>
+          </a:xfrm>
+        </p:grpSpPr>
+        <p:pic>
+          <p:nvPicPr>
+            <p:cNvPr id="4" name="Google Shape;188;p35">
+              <a:extLst>
+                <a:ext uri="{FF2B5EF4-FFF2-40B4-BE49-F238E27FC236}">
+                  <a16:creationId xmlns:a16="http://schemas.microsoft.com/office/drawing/2014/main" id="{7A8AE85A-FDA7-9A22-F4CF-CA0883A376AC}"/>
+                </a:ext>
+              </a:extLst>
+            </p:cNvPr>
+            <p:cNvPicPr preferRelativeResize="0"/>
+            <p:nvPr/>
+          </p:nvPicPr>
+          <p:blipFill>
+            <a:blip r:embed="rId2"/>
+            <a:stretch>
+              <a:fillRect/>
+            </a:stretch>
+          </p:blipFill>
+          <p:spPr>
+            <a:xfrm>
+              <a:off x="1543363" y="3662239"/>
+              <a:ext cx="3475151" cy="3211382"/>
+            </a:xfrm>
+            <a:prstGeom prst="rect">
+              <a:avLst/>
+            </a:prstGeom>
+            <a:noFill/>
+          </p:spPr>
+        </p:pic>
+        <p:pic>
+          <p:nvPicPr>
+            <p:cNvPr id="8" name="Google Shape;265;p45">
+              <a:extLst>
+                <a:ext uri="{FF2B5EF4-FFF2-40B4-BE49-F238E27FC236}">
+                  <a16:creationId xmlns:a16="http://schemas.microsoft.com/office/drawing/2014/main" id="{5F3AAB6E-A5E3-CA02-0B05-C745CDD71EB0}"/>
+                </a:ext>
+              </a:extLst>
+            </p:cNvPr>
+            <p:cNvPicPr preferRelativeResize="0"/>
+            <p:nvPr/>
+          </p:nvPicPr>
+          <p:blipFill>
+            <a:blip r:embed="rId3"/>
+            <a:stretch>
+              <a:fillRect/>
+            </a:stretch>
+          </p:blipFill>
+          <p:spPr>
+            <a:xfrm>
+              <a:off x="2818016" y="3839848"/>
+              <a:ext cx="888762" cy="731922"/>
+            </a:xfrm>
+            <a:prstGeom prst="rect">
+              <a:avLst/>
+            </a:prstGeom>
+            <a:noFill/>
+          </p:spPr>
+        </p:pic>
+      </p:grpSp>
+      <p:pic>
+        <p:nvPicPr>
+          <p:cNvPr id="10" name="Picture 2" descr="九州大学 Kyushu University">
+            <a:extLst>
+              <a:ext uri="{FF2B5EF4-FFF2-40B4-BE49-F238E27FC236}">
+                <a16:creationId xmlns:a16="http://schemas.microsoft.com/office/drawing/2014/main" id="{35AD5F0E-5C8C-C5A8-319E-F9C7E91E99EB}"/>
+              </a:ext>
+            </a:extLst>
+          </p:cNvPr>
+          <p:cNvPicPr>
+            <a:picLocks noChangeAspect="1" noChangeArrowheads="1"/>
+          </p:cNvPicPr>
+          <p:nvPr/>
+        </p:nvPicPr>
+        <p:blipFill>
+          <a:blip r:embed="rId4">
+            <a:extLst>
+              <a:ext uri="{28A0092B-C50C-407E-A947-70E740481C1C}">
+                <a14:useLocalDpi xmlns:a14="http://schemas.microsoft.com/office/drawing/2010/main" val="0"/>
+              </a:ext>
+            </a:extLst>
+          </a:blip>
+          <a:srcRect/>
+          <a:stretch>
+            <a:fillRect/>
+          </a:stretch>
+        </p:blipFill>
+        <p:spPr bwMode="auto">
+          <a:xfrm>
+            <a:off x="1811677" y="5137429"/>
+            <a:ext cx="1024761" cy="1024761"/>
+          </a:xfrm>
+          <a:prstGeom prst="rect">
+            <a:avLst/>
+          </a:prstGeom>
+          <a:noFill/>
+          <a:extLst>
+            <a:ext uri="{909E8E84-426E-40DD-AFC4-6F175D3DCCD1}">
+              <a14:hiddenFill xmlns:a14="http://schemas.microsoft.com/office/drawing/2010/main">
+                <a:solidFill>
+                  <a:srgbClr val="FFFFFF"/>
+                </a:solidFill>
+              </a14:hiddenFill>
+            </a:ext>
+          </a:extLst>
+        </p:spPr>
+      </p:pic>
+      <p:pic>
+        <p:nvPicPr>
+          <p:cNvPr id="1026" name="Picture 2" descr="株式会社東海理化のプレスリリース｜PR TIMES">
+            <a:extLst>
+              <a:ext uri="{FF2B5EF4-FFF2-40B4-BE49-F238E27FC236}">
+                <a16:creationId xmlns:a16="http://schemas.microsoft.com/office/drawing/2014/main" id="{94518B87-9ED2-DA6E-9A0D-C2BEFD9A2995}"/>
+              </a:ext>
+            </a:extLst>
+          </p:cNvPr>
+          <p:cNvPicPr>
+            <a:picLocks noChangeAspect="1" noChangeArrowheads="1"/>
+          </p:cNvPicPr>
+          <p:nvPr/>
+        </p:nvPicPr>
+        <p:blipFill>
+          <a:blip r:embed="rId5">
+            <a:extLst>
+              <a:ext uri="{28A0092B-C50C-407E-A947-70E740481C1C}">
+                <a14:useLocalDpi xmlns:a14="http://schemas.microsoft.com/office/drawing/2010/main" val="0"/>
+              </a:ext>
+            </a:extLst>
+          </a:blip>
+          <a:srcRect/>
+          <a:stretch>
+            <a:fillRect/>
+          </a:stretch>
+        </p:blipFill>
+        <p:spPr bwMode="auto">
+          <a:xfrm>
+            <a:off x="4433803" y="5624327"/>
+            <a:ext cx="1026975" cy="537864"/>
+          </a:xfrm>
+          <a:prstGeom prst="rect">
+            <a:avLst/>
+          </a:prstGeom>
+          <a:noFill/>
+          <a:extLst>
+            <a:ext uri="{909E8E84-426E-40DD-AFC4-6F175D3DCCD1}">
+              <a14:hiddenFill xmlns:a14="http://schemas.microsoft.com/office/drawing/2010/main">
+                <a:solidFill>
+                  <a:srgbClr val="FFFFFF"/>
+                </a:solidFill>
+              </a14:hiddenFill>
+            </a:ext>
+          </a:extLst>
+        </p:spPr>
+      </p:pic>
+    </p:spTree>
+    <p:extLst>
+      <p:ext uri="{BB962C8B-B14F-4D97-AF65-F5344CB8AC3E}">
+        <p14:creationId xmlns:p14="http://schemas.microsoft.com/office/powerpoint/2010/main" val="940020641"/>
+      </p:ext>
+    </p:extLst>
+  </p:cSld>
+  <p:clrMapOvr>
+    <a:masterClrMapping/>
+  </p:clrMapOvr>
+</p:sld>
+</file>
+
+<file path=ppt/slides/slide4.xml><?xml version="1.0" encoding="utf-8"?>
+<p:sld xmlns:a="http://schemas.openxmlformats.org/drawingml/2006/main" xmlns:r="http://schemas.openxmlformats.org/officeDocument/2006/relationships" xmlns:p="http://schemas.openxmlformats.org/presentationml/2006/main">
+  <p:cSld>
+    <p:bg>
+      <p:bgPr>
+        <a:solidFill>
+          <a:schemeClr val="bg1"/>
+        </a:solidFill>
+        <a:effectLst/>
+      </p:bgPr>
+    </p:bg>
+    <p:spTree>
+      <p:nvGrpSpPr>
+        <p:cNvPr id="1" name="">
+          <a:extLst>
+            <a:ext uri="{FF2B5EF4-FFF2-40B4-BE49-F238E27FC236}">
+              <a16:creationId xmlns:a16="http://schemas.microsoft.com/office/drawing/2014/main" id="{3F53C863-7861-5359-B29D-247C1546D947}"/>
+            </a:ext>
+          </a:extLst>
+        </p:cNvPr>
+        <p:cNvGrpSpPr/>
+        <p:nvPr/>
+      </p:nvGrpSpPr>
+      <p:grpSpPr>
+        <a:xfrm>
+          <a:off x="0" y="0"/>
+          <a:ext cx="0" cy="0"/>
+          <a:chOff x="0" y="0"/>
+          <a:chExt cx="0" cy="0"/>
+        </a:xfrm>
+      </p:grpSpPr>
+      <p:sp useBgFill="1">
+        <p:nvSpPr>
+          <p:cNvPr id="17" name="Rectangle 19">
+            <a:extLst>
+              <a:ext uri="{FF2B5EF4-FFF2-40B4-BE49-F238E27FC236}">
+                <a16:creationId xmlns:a16="http://schemas.microsoft.com/office/drawing/2014/main" id="{9711A98E-4E2C-539D-8DB4-0C7789E00FDE}"/>
+              </a:ext>
+              <a:ext uri="{C183D7F6-B498-43B3-948B-1728B52AA6E4}">
+                <adec:decorative xmlns:adec="http://schemas.microsoft.com/office/drawing/2017/decorative" val="1"/>
+              </a:ext>
+            </a:extLst>
+          </p:cNvPr>
+          <p:cNvSpPr>
+            <a:spLocks noGrp="1" noRot="1" noChangeAspect="1" noMove="1" noResize="1" noEditPoints="1" noAdjustHandles="1" noChangeArrowheads="1" noChangeShapeType="1" noTextEdit="1"/>
+          </p:cNvSpPr>
+          <p:nvPr>
+            <p:extLst>
+              <p:ext uri="{386F3935-93C4-4BCD-93E2-E3B085C9AB24}">
+                <p16:designElem xmlns:p16="http://schemas.microsoft.com/office/powerpoint/2015/main" val="1"/>
+              </p:ext>
+            </p:extLst>
+          </p:nvPr>
+        </p:nvSpPr>
+        <p:spPr bwMode="white">
+          <a:xfrm>
+            <a:off x="0" y="0"/>
+            <a:ext cx="12192000" cy="6858000"/>
+          </a:xfrm>
+          <a:prstGeom prst="rect">
+            <a:avLst/>
+          </a:prstGeom>
+          <a:ln>
+            <a:noFill/>
+          </a:ln>
+        </p:spPr>
+        <p:style>
+          <a:lnRef idx="2">
+            <a:schemeClr val="accent1">
+              <a:shade val="50000"/>
+            </a:schemeClr>
+          </a:lnRef>
+          <a:fillRef idx="1">
+            <a:schemeClr val="accent1"/>
+          </a:fillRef>
+          <a:effectRef idx="0">
+            <a:schemeClr val="accent1"/>
+          </a:effectRef>
+          <a:fontRef idx="minor">
+            <a:schemeClr val="lt1"/>
+          </a:fontRef>
+        </p:style>
+        <p:txBody>
+          <a:bodyPr rtlCol="0" anchor="ctr"/>
+          <a:lstStyle>
+            <a:defPPr>
+              <a:defRPr lang="en-US"/>
+            </a:defPPr>
+            <a:lvl1pPr marL="0" algn="l" defTabSz="914400" rtl="0" eaLnBrk="1" latinLnBrk="0" hangingPunct="1">
+              <a:defRPr sz="1800" kern="1200">
+                <a:solidFill>
+                  <a:schemeClr val="lt1"/>
+                </a:solidFill>
+                <a:latin typeface="+mn-lt"/>
+                <a:ea typeface="+mn-ea"/>
+                <a:cs typeface="+mn-cs"/>
+              </a:defRPr>
+            </a:lvl1pPr>
+            <a:lvl2pPr marL="457200" algn="l" defTabSz="914400" rtl="0" eaLnBrk="1" latinLnBrk="0" hangingPunct="1">
+              <a:defRPr sz="1800" kern="1200">
+                <a:solidFill>
+                  <a:schemeClr val="lt1"/>
+                </a:solidFill>
+                <a:latin typeface="+mn-lt"/>
+                <a:ea typeface="+mn-ea"/>
+                <a:cs typeface="+mn-cs"/>
+              </a:defRPr>
+            </a:lvl2pPr>
+            <a:lvl3pPr marL="914400" algn="l" defTabSz="914400" rtl="0" eaLnBrk="1" latinLnBrk="0" hangingPunct="1">
+              <a:defRPr sz="1800" kern="1200">
+                <a:solidFill>
+                  <a:schemeClr val="lt1"/>
+                </a:solidFill>
+                <a:latin typeface="+mn-lt"/>
+                <a:ea typeface="+mn-ea"/>
+                <a:cs typeface="+mn-cs"/>
+              </a:defRPr>
+            </a:lvl3pPr>
+            <a:lvl4pPr marL="1371600" algn="l" defTabSz="914400" rtl="0" eaLnBrk="1" latinLnBrk="0" hangingPunct="1">
+              <a:defRPr sz="1800" kern="1200">
+                <a:solidFill>
+                  <a:schemeClr val="lt1"/>
+                </a:solidFill>
+                <a:latin typeface="+mn-lt"/>
+                <a:ea typeface="+mn-ea"/>
+                <a:cs typeface="+mn-cs"/>
+              </a:defRPr>
+            </a:lvl4pPr>
+            <a:lvl5pPr marL="1828800" algn="l" defTabSz="914400" rtl="0" eaLnBrk="1" latinLnBrk="0" hangingPunct="1">
+              <a:defRPr sz="1800" kern="1200">
+                <a:solidFill>
+                  <a:schemeClr val="lt1"/>
+                </a:solidFill>
+                <a:latin typeface="+mn-lt"/>
+                <a:ea typeface="+mn-ea"/>
+                <a:cs typeface="+mn-cs"/>
+              </a:defRPr>
+            </a:lvl5pPr>
+            <a:lvl6pPr marL="2286000" algn="l" defTabSz="914400" rtl="0" eaLnBrk="1" latinLnBrk="0" hangingPunct="1">
+              <a:defRPr sz="1800" kern="1200">
+                <a:solidFill>
+                  <a:schemeClr val="lt1"/>
+                </a:solidFill>
+                <a:latin typeface="+mn-lt"/>
+                <a:ea typeface="+mn-ea"/>
+                <a:cs typeface="+mn-cs"/>
+              </a:defRPr>
+            </a:lvl6pPr>
+            <a:lvl7pPr marL="2743200" algn="l" defTabSz="914400" rtl="0" eaLnBrk="1" latinLnBrk="0" hangingPunct="1">
+              <a:defRPr sz="1800" kern="1200">
+                <a:solidFill>
+                  <a:schemeClr val="lt1"/>
+                </a:solidFill>
+                <a:latin typeface="+mn-lt"/>
+                <a:ea typeface="+mn-ea"/>
+                <a:cs typeface="+mn-cs"/>
+              </a:defRPr>
+            </a:lvl7pPr>
+            <a:lvl8pPr marL="3200400" algn="l" defTabSz="914400" rtl="0" eaLnBrk="1" latinLnBrk="0" hangingPunct="1">
+              <a:defRPr sz="1800" kern="1200">
+                <a:solidFill>
+                  <a:schemeClr val="lt1"/>
+                </a:solidFill>
+                <a:latin typeface="+mn-lt"/>
+                <a:ea typeface="+mn-ea"/>
+                <a:cs typeface="+mn-cs"/>
+              </a:defRPr>
+            </a:lvl8pPr>
+            <a:lvl9pPr marL="3657600" algn="l" defTabSz="914400" rtl="0" eaLnBrk="1" latinLnBrk="0" hangingPunct="1">
+              <a:defRPr sz="1800" kern="1200">
+                <a:solidFill>
+                  <a:schemeClr val="lt1"/>
+                </a:solidFill>
+                <a:latin typeface="+mn-lt"/>
+                <a:ea typeface="+mn-ea"/>
+                <a:cs typeface="+mn-cs"/>
+              </a:defRPr>
+            </a:lvl9pPr>
+          </a:lstStyle>
+          <a:p>
+            <a:pPr algn="ctr"/>
+            <a:endParaRPr lang="en-US" dirty="0"/>
+          </a:p>
+        </p:txBody>
+      </p:sp>
+      <p:sp>
+        <p:nvSpPr>
+          <p:cNvPr id="18" name="Arc 21">
+            <a:extLst>
+              <a:ext uri="{FF2B5EF4-FFF2-40B4-BE49-F238E27FC236}">
+                <a16:creationId xmlns:a16="http://schemas.microsoft.com/office/drawing/2014/main" id="{BB5CFB66-D115-AA9C-1F99-CAB323384CFE}"/>
+              </a:ext>
+              <a:ext uri="{C183D7F6-B498-43B3-948B-1728B52AA6E4}">
+                <adec:decorative xmlns:adec="http://schemas.microsoft.com/office/drawing/2017/decorative" val="1"/>
+              </a:ext>
+            </a:extLst>
+          </p:cNvPr>
+          <p:cNvSpPr>
+            <a:spLocks noGrp="1" noRot="1" noChangeAspect="1" noMove="1" noResize="1" noEditPoints="1" noAdjustHandles="1" noChangeArrowheads="1" noChangeShapeType="1" noTextEdit="1"/>
+          </p:cNvSpPr>
+          <p:nvPr>
+            <p:extLst>
+              <p:ext uri="{386F3935-93C4-4BCD-93E2-E3B085C9AB24}">
+                <p16:designElem xmlns:p16="http://schemas.microsoft.com/office/powerpoint/2015/main" val="1"/>
+              </p:ext>
+            </p:extLst>
+          </p:nvPr>
+        </p:nvSpPr>
+        <p:spPr>
+          <a:xfrm rot="3967198" flipH="1">
+            <a:off x="8631348" y="490493"/>
+            <a:ext cx="2987899" cy="2987899"/>
+          </a:xfrm>
+          <a:prstGeom prst="arc">
+            <a:avLst>
+              <a:gd name="adj1" fmla="val 14441841"/>
+              <a:gd name="adj2" fmla="val 0"/>
+            </a:avLst>
+          </a:prstGeom>
+          <a:ln w="127000" cap="rnd">
+            <a:solidFill>
+              <a:schemeClr val="accent4"/>
+            </a:solidFill>
+            <a:prstDash val="dash"/>
+            <a:miter lim="800000"/>
+          </a:ln>
+        </p:spPr>
+        <p:style>
+          <a:lnRef idx="1">
+            <a:schemeClr val="accent1"/>
+          </a:lnRef>
+          <a:fillRef idx="0">
+            <a:schemeClr val="accent1"/>
+          </a:fillRef>
+          <a:effectRef idx="0">
+            <a:schemeClr val="accent1"/>
+          </a:effectRef>
+          <a:fontRef idx="minor">
+            <a:schemeClr val="tx1"/>
+          </a:fontRef>
+        </p:style>
+        <p:txBody>
+          <a:bodyPr rtlCol="0" anchor="ctr"/>
+          <a:lstStyle/>
+          <a:p>
+            <a:pPr marL="0" marR="0" lvl="0" indent="0" algn="ctr" defTabSz="914400" rtl="0" eaLnBrk="1" fontAlgn="auto" latinLnBrk="0" hangingPunct="1">
+              <a:lnSpc>
+                <a:spcPct val="100000"/>
+              </a:lnSpc>
+              <a:spcBef>
+                <a:spcPts val="0"/>
+              </a:spcBef>
+              <a:spcAft>
+                <a:spcPts val="0"/>
+              </a:spcAft>
+              <a:buClrTx/>
+              <a:buSzTx/>
+              <a:buFontTx/>
+              <a:buNone/>
+              <a:tabLst/>
+              <a:defRPr/>
+            </a:pPr>
+            <a:endParaRPr kumimoji="0" lang="en-US" sz="1800" b="0" i="0" u="none" strike="noStrike" kern="1200" cap="none" spc="0" normalizeH="0" baseline="0" noProof="0" dirty="0">
+              <a:ln>
+                <a:noFill/>
+              </a:ln>
+              <a:solidFill>
+                <a:srgbClr val="000000"/>
+              </a:solidFill>
+              <a:effectLst/>
+              <a:uLnTx/>
+              <a:uFillTx/>
+              <a:latin typeface="Calibri" panose="020F0502020204030204"/>
+              <a:ea typeface="+mn-ea"/>
+              <a:cs typeface="+mn-cs"/>
+            </a:endParaRPr>
+          </a:p>
+        </p:txBody>
+      </p:sp>
+      <p:sp>
+        <p:nvSpPr>
+          <p:cNvPr id="2" name="タイトル 1">
+            <a:extLst>
+              <a:ext uri="{FF2B5EF4-FFF2-40B4-BE49-F238E27FC236}">
+                <a16:creationId xmlns:a16="http://schemas.microsoft.com/office/drawing/2014/main" id="{7ED72531-D939-727A-9A67-C40CCC400453}"/>
+              </a:ext>
+            </a:extLst>
+          </p:cNvPr>
+          <p:cNvSpPr>
+            <a:spLocks noGrp="1"/>
+          </p:cNvSpPr>
+          <p:nvPr>
+            <p:ph type="title"/>
+          </p:nvPr>
+        </p:nvSpPr>
+        <p:spPr>
+          <a:xfrm>
+            <a:off x="5894962" y="857865"/>
+            <a:ext cx="6297038" cy="1325563"/>
+          </a:xfrm>
+        </p:spPr>
+        <p:txBody>
+          <a:bodyPr>
+            <a:normAutofit/>
+          </a:bodyPr>
+          <a:lstStyle/>
+          <a:p>
+            <a:r>
+              <a:rPr lang="en-US" altLang="ja-JP" dirty="0"/>
+              <a:t>2025</a:t>
+            </a:r>
+            <a:r>
+              <a:rPr lang="ja-JP" altLang="en-US" dirty="0"/>
+              <a:t>年</a:t>
+            </a:r>
+            <a:r>
+              <a:rPr kumimoji="1" lang="ja-JP" altLang="en-US" dirty="0"/>
+              <a:t>の</a:t>
+            </a:r>
+            <a:r>
+              <a:rPr kumimoji="1" lang="en-US" altLang="ja-JP" dirty="0"/>
+              <a:t>OpenMPW</a:t>
+            </a:r>
+            <a:r>
+              <a:rPr kumimoji="1" lang="ja-JP" altLang="en-US" dirty="0"/>
+              <a:t>！</a:t>
+            </a:r>
+          </a:p>
+        </p:txBody>
+      </p:sp>
+      <p:sp>
+        <p:nvSpPr>
+          <p:cNvPr id="19" name="Freeform: Shape 23">
+            <a:extLst>
+              <a:ext uri="{FF2B5EF4-FFF2-40B4-BE49-F238E27FC236}">
+                <a16:creationId xmlns:a16="http://schemas.microsoft.com/office/drawing/2014/main" id="{8DCF18CF-3296-566A-EC06-667BAF7246FB}"/>
+              </a:ext>
+              <a:ext uri="{C183D7F6-B498-43B3-948B-1728B52AA6E4}">
+                <adec:decorative xmlns:adec="http://schemas.microsoft.com/office/drawing/2017/decorative" val="1"/>
+              </a:ext>
+            </a:extLst>
+          </p:cNvPr>
+          <p:cNvSpPr>
+            <a:spLocks noGrp="1" noRot="1" noChangeAspect="1" noMove="1" noResize="1" noEditPoints="1" noAdjustHandles="1" noChangeArrowheads="1" noChangeShapeType="1" noTextEdit="1"/>
+          </p:cNvSpPr>
+          <p:nvPr>
+            <p:extLst>
+              <p:ext uri="{386F3935-93C4-4BCD-93E2-E3B085C9AB24}">
+                <p16:designElem xmlns:p16="http://schemas.microsoft.com/office/powerpoint/2015/main" val="1"/>
+              </p:ext>
+            </p:extLst>
+          </p:nvPr>
+        </p:nvSpPr>
+        <p:spPr>
+          <a:xfrm flipH="1">
+            <a:off x="0" y="5486400"/>
+            <a:ext cx="2672863" cy="1371600"/>
+          </a:xfrm>
+          <a:custGeom>
+            <a:avLst/>
+            <a:gdLst>
+              <a:gd name="connsiteX0" fmla="*/ 1721734 w 2672863"/>
+              <a:gd name="connsiteY0" fmla="*/ 0 h 1371600"/>
+              <a:gd name="connsiteX1" fmla="*/ 2564444 w 2672863"/>
+              <a:gd name="connsiteY1" fmla="*/ 213382 h 1371600"/>
+              <a:gd name="connsiteX2" fmla="*/ 2672863 w 2672863"/>
+              <a:gd name="connsiteY2" fmla="*/ 279248 h 1371600"/>
+              <a:gd name="connsiteX3" fmla="*/ 2672863 w 2672863"/>
+              <a:gd name="connsiteY3" fmla="*/ 1371600 h 1371600"/>
+              <a:gd name="connsiteX4" fmla="*/ 0 w 2672863"/>
+              <a:gd name="connsiteY4" fmla="*/ 1371600 h 1371600"/>
+              <a:gd name="connsiteX5" fmla="*/ 33268 w 2672863"/>
+              <a:gd name="connsiteY5" fmla="*/ 1242216 h 1371600"/>
+              <a:gd name="connsiteX6" fmla="*/ 1721734 w 2672863"/>
+              <a:gd name="connsiteY6" fmla="*/ 0 h 1371600"/>
+            </a:gdLst>
+            <a:ahLst/>
+            <a:cxnLst>
+              <a:cxn ang="0">
+                <a:pos x="connsiteX0" y="connsiteY0"/>
+              </a:cxn>
+              <a:cxn ang="0">
+                <a:pos x="connsiteX1" y="connsiteY1"/>
+              </a:cxn>
+              <a:cxn ang="0">
+                <a:pos x="connsiteX2" y="connsiteY2"/>
+              </a:cxn>
+              <a:cxn ang="0">
+                <a:pos x="connsiteX3" y="connsiteY3"/>
+              </a:cxn>
+              <a:cxn ang="0">
+                <a:pos x="connsiteX4" y="connsiteY4"/>
+              </a:cxn>
+              <a:cxn ang="0">
+                <a:pos x="connsiteX5" y="connsiteY5"/>
+              </a:cxn>
+              <a:cxn ang="0">
+                <a:pos x="connsiteX6" y="connsiteY6"/>
+              </a:cxn>
+            </a:cxnLst>
+            <a:rect l="l" t="t" r="r" b="b"/>
+            <a:pathLst>
+              <a:path w="2672863" h="1371600">
+                <a:moveTo>
+                  <a:pt x="1721734" y="0"/>
+                </a:moveTo>
+                <a:cubicBezTo>
+                  <a:pt x="2026863" y="0"/>
+                  <a:pt x="2313937" y="77299"/>
+                  <a:pt x="2564444" y="213382"/>
+                </a:cubicBezTo>
+                <a:lnTo>
+                  <a:pt x="2672863" y="279248"/>
+                </a:lnTo>
+                <a:lnTo>
+                  <a:pt x="2672863" y="1371600"/>
+                </a:lnTo>
+                <a:lnTo>
+                  <a:pt x="0" y="1371600"/>
+                </a:lnTo>
+                <a:lnTo>
+                  <a:pt x="33268" y="1242216"/>
+                </a:lnTo>
+                <a:cubicBezTo>
+                  <a:pt x="257110" y="522539"/>
+                  <a:pt x="928399" y="0"/>
+                  <a:pt x="1721734" y="0"/>
+                </a:cubicBezTo>
+                <a:close/>
+              </a:path>
+            </a:pathLst>
+          </a:custGeom>
+          <a:solidFill>
+            <a:schemeClr val="accent4"/>
+          </a:solidFill>
+          <a:ln>
+            <a:noFill/>
+          </a:ln>
+        </p:spPr>
+        <p:style>
+          <a:lnRef idx="2">
+            <a:schemeClr val="accent1">
+              <a:shade val="50000"/>
+            </a:schemeClr>
+          </a:lnRef>
+          <a:fillRef idx="1">
+            <a:schemeClr val="accent1"/>
+          </a:fillRef>
+          <a:effectRef idx="0">
+            <a:schemeClr val="accent1"/>
+          </a:effectRef>
+          <a:fontRef idx="minor">
+            <a:schemeClr val="lt1"/>
+          </a:fontRef>
+        </p:style>
+        <p:txBody>
+          <a:bodyPr wrap="square" rtlCol="0" anchor="ctr">
+            <a:noAutofit/>
+          </a:bodyPr>
+          <a:lstStyle/>
+          <a:p>
+            <a:pPr algn="ctr"/>
+            <a:endParaRPr lang="en-US" dirty="0"/>
+          </a:p>
+        </p:txBody>
+      </p:sp>
+      <p:sp>
+        <p:nvSpPr>
+          <p:cNvPr id="3" name="コンテンツ プレースホルダー 2">
+            <a:extLst>
+              <a:ext uri="{FF2B5EF4-FFF2-40B4-BE49-F238E27FC236}">
+                <a16:creationId xmlns:a16="http://schemas.microsoft.com/office/drawing/2014/main" id="{D389D4F6-8676-A3B4-0F0D-6DDCBF19EE90}"/>
+              </a:ext>
+            </a:extLst>
+          </p:cNvPr>
+          <p:cNvSpPr>
+            <a:spLocks noGrp="1"/>
+          </p:cNvSpPr>
+          <p:nvPr>
+            <p:ph idx="1"/>
+          </p:nvPr>
+        </p:nvSpPr>
+        <p:spPr>
+          <a:xfrm>
+            <a:off x="5877746" y="2183428"/>
+            <a:ext cx="6206296" cy="3941691"/>
+          </a:xfrm>
+        </p:spPr>
+        <p:txBody>
+          <a:bodyPr>
+            <a:normAutofit/>
+          </a:bodyPr>
+          <a:lstStyle/>
+          <a:p>
+            <a:r>
+              <a:rPr lang="en-US" altLang="ja-JP" dirty="0"/>
+              <a:t>OpenMPW</a:t>
+            </a:r>
+            <a:r>
+              <a:rPr lang="ja-JP" altLang="en-US" dirty="0"/>
+              <a:t>構造のシャトル</a:t>
+            </a:r>
+            <a:endParaRPr lang="en-US" altLang="ja-JP" dirty="0"/>
+          </a:p>
+          <a:p>
+            <a:pPr lvl="1"/>
+            <a:r>
+              <a:rPr kumimoji="1" lang="ja-JP" altLang="en-US" dirty="0"/>
+              <a:t>コミュニティー</a:t>
+            </a:r>
+            <a:endParaRPr kumimoji="1" lang="en-US" altLang="ja-JP" dirty="0"/>
+          </a:p>
+          <a:p>
+            <a:pPr lvl="2"/>
+            <a:r>
+              <a:rPr kumimoji="1" lang="en-US" altLang="ja-JP" dirty="0"/>
+              <a:t>eFabless</a:t>
+            </a:r>
+            <a:r>
+              <a:rPr kumimoji="1" lang="ja-JP" altLang="en-US" dirty="0"/>
+              <a:t>社 ⇔ </a:t>
+            </a:r>
+            <a:r>
+              <a:rPr kumimoji="1" lang="en-US" altLang="ja-JP" dirty="0"/>
+              <a:t>ISHI</a:t>
+            </a:r>
+            <a:r>
+              <a:rPr kumimoji="1" lang="ja-JP" altLang="en-US" dirty="0"/>
+              <a:t>会</a:t>
+            </a:r>
+            <a:endParaRPr lang="en-US" altLang="ja-JP" dirty="0"/>
+          </a:p>
+          <a:p>
+            <a:pPr lvl="1"/>
+            <a:r>
+              <a:rPr lang="ja-JP" altLang="en-US" dirty="0"/>
+              <a:t>スポンサー</a:t>
+            </a:r>
+            <a:endParaRPr lang="en-US" altLang="ja-JP" dirty="0"/>
+          </a:p>
+          <a:p>
+            <a:pPr lvl="2"/>
+            <a:r>
+              <a:rPr lang="en-US" altLang="ja-JP" dirty="0"/>
+              <a:t>Google</a:t>
+            </a:r>
+            <a:r>
+              <a:rPr lang="ja-JP" altLang="en-US" dirty="0"/>
+              <a:t>社 </a:t>
+            </a:r>
+            <a:r>
+              <a:rPr kumimoji="1" lang="ja-JP" altLang="en-US" dirty="0"/>
+              <a:t>⇔ </a:t>
+            </a:r>
+            <a:r>
+              <a:rPr lang="ja-JP" altLang="en-US" dirty="0"/>
+              <a:t>九州大学</a:t>
+            </a:r>
+            <a:endParaRPr lang="en-US" altLang="ja-JP" dirty="0"/>
+          </a:p>
+          <a:p>
+            <a:pPr lvl="1"/>
+            <a:r>
+              <a:rPr kumimoji="1" lang="ja-JP" altLang="en-US" dirty="0"/>
+              <a:t>ファブ：</a:t>
+            </a:r>
+            <a:endParaRPr kumimoji="1" lang="en-US" altLang="ja-JP" dirty="0"/>
+          </a:p>
+          <a:p>
+            <a:pPr lvl="2"/>
+            <a:r>
+              <a:rPr lang="en-US" altLang="ja-JP" dirty="0"/>
+              <a:t>SkywaterPDK</a:t>
+            </a:r>
+            <a:r>
+              <a:rPr kumimoji="1" lang="ja-JP" altLang="en-US" dirty="0"/>
+              <a:t> </a:t>
+            </a:r>
+            <a:r>
+              <a:rPr kumimoji="1" lang="ja-JP" altLang="en-US"/>
+              <a:t>⇔ </a:t>
+            </a:r>
+            <a:r>
+              <a:rPr lang="en-US" altLang="ja-JP" dirty="0"/>
+              <a:t>OpenIP62</a:t>
+            </a:r>
+            <a:r>
+              <a:rPr kumimoji="1" lang="en-US" altLang="ja-JP" dirty="0"/>
+              <a:t>(</a:t>
+            </a:r>
+            <a:r>
+              <a:rPr kumimoji="1" lang="ja-JP" altLang="en-US"/>
+              <a:t>東海理化</a:t>
+            </a:r>
+            <a:r>
+              <a:rPr kumimoji="1" lang="en-US" altLang="ja-JP" dirty="0"/>
+              <a:t>)</a:t>
+            </a:r>
+          </a:p>
+        </p:txBody>
+      </p:sp>
+      <p:pic>
+        <p:nvPicPr>
+          <p:cNvPr id="5" name="Google Shape;188;p35">
+            <a:extLst>
+              <a:ext uri="{FF2B5EF4-FFF2-40B4-BE49-F238E27FC236}">
+                <a16:creationId xmlns:a16="http://schemas.microsoft.com/office/drawing/2014/main" id="{BDA8147F-8B0B-1D55-3C75-DAEEE382A21E}"/>
+              </a:ext>
+            </a:extLst>
+          </p:cNvPr>
+          <p:cNvPicPr preferRelativeResize="0"/>
+          <p:nvPr/>
+        </p:nvPicPr>
+        <p:blipFill rotWithShape="1">
+          <a:blip r:embed="rId2"/>
+          <a:srcRect r="5355" b="3"/>
+          <a:stretch/>
+        </p:blipFill>
+        <p:spPr>
+          <a:xfrm>
+            <a:off x="1624260" y="214884"/>
+            <a:ext cx="3913979" cy="3011175"/>
+          </a:xfrm>
+          <a:prstGeom prst="rect">
+            <a:avLst/>
+          </a:prstGeom>
+          <a:noFill/>
+        </p:spPr>
+      </p:pic>
+      <p:sp>
+        <p:nvSpPr>
+          <p:cNvPr id="6" name="矢印: 下 5">
+            <a:extLst>
+              <a:ext uri="{FF2B5EF4-FFF2-40B4-BE49-F238E27FC236}">
+                <a16:creationId xmlns:a16="http://schemas.microsoft.com/office/drawing/2014/main" id="{7222E781-3E3A-277A-E982-930E8624F90B}"/>
+              </a:ext>
+            </a:extLst>
+          </p:cNvPr>
+          <p:cNvSpPr/>
+          <p:nvPr/>
+        </p:nvSpPr>
+        <p:spPr>
+          <a:xfrm>
+            <a:off x="3199548" y="3020750"/>
+            <a:ext cx="1033027" cy="610221"/>
+          </a:xfrm>
+          <a:prstGeom prst="downArrow">
+            <a:avLst/>
+          </a:prstGeom>
+        </p:spPr>
+        <p:style>
+          <a:lnRef idx="1">
+            <a:schemeClr val="accent6"/>
+          </a:lnRef>
+          <a:fillRef idx="2">
+            <a:schemeClr val="accent6"/>
+          </a:fillRef>
+          <a:effectRef idx="1">
+            <a:schemeClr val="accent6"/>
+          </a:effectRef>
+          <a:fontRef idx="minor">
+            <a:schemeClr val="dk1"/>
+          </a:fontRef>
+        </p:style>
+        <p:txBody>
+          <a:bodyPr rtlCol="0" anchor="ctr"/>
+          <a:lstStyle/>
+          <a:p>
+            <a:pPr algn="ctr"/>
+            <a:endParaRPr kumimoji="1" lang="ja-JP" altLang="en-US"/>
+          </a:p>
+        </p:txBody>
+      </p:sp>
+      <p:sp>
+        <p:nvSpPr>
+          <p:cNvPr id="12" name="四角形: 角を丸くする 11">
+            <a:extLst>
+              <a:ext uri="{FF2B5EF4-FFF2-40B4-BE49-F238E27FC236}">
+                <a16:creationId xmlns:a16="http://schemas.microsoft.com/office/drawing/2014/main" id="{02A88107-3D49-B34C-1E7D-13E70FB2CCEF}"/>
+              </a:ext>
+            </a:extLst>
+          </p:cNvPr>
+          <p:cNvSpPr/>
+          <p:nvPr/>
+        </p:nvSpPr>
+        <p:spPr>
+          <a:xfrm>
+            <a:off x="5820613" y="5256494"/>
+            <a:ext cx="6320562" cy="1235066"/>
+          </a:xfrm>
+          <a:prstGeom prst="roundRect">
+            <a:avLst/>
+          </a:prstGeom>
+        </p:spPr>
+        <p:style>
+          <a:lnRef idx="0">
+            <a:schemeClr val="accent4"/>
+          </a:lnRef>
+          <a:fillRef idx="3">
+            <a:schemeClr val="accent4"/>
+          </a:fillRef>
+          <a:effectRef idx="3">
+            <a:schemeClr val="accent4"/>
+          </a:effectRef>
+          <a:fontRef idx="minor">
+            <a:schemeClr val="lt1"/>
+          </a:fontRef>
+        </p:style>
+        <p:txBody>
+          <a:bodyPr rtlCol="0" anchor="ctr"/>
+          <a:lstStyle/>
+          <a:p>
+            <a:pPr algn="ctr"/>
+            <a:r>
+              <a:rPr kumimoji="1" lang="en-US" altLang="ja-JP" sz="2400" dirty="0"/>
+              <a:t>ISHI</a:t>
+            </a:r>
+            <a:r>
+              <a:rPr kumimoji="1" lang="ja-JP" altLang="en-US" sz="2400"/>
+              <a:t>会版</a:t>
+            </a:r>
+            <a:r>
+              <a:rPr kumimoji="1" lang="en-US" altLang="ja-JP" sz="2400" dirty="0"/>
+              <a:t>OpenMPW-TR10-2</a:t>
+            </a:r>
+            <a:r>
+              <a:rPr kumimoji="1" lang="ja-JP" altLang="en-US" sz="2400" dirty="0"/>
+              <a:t>として開催！</a:t>
+            </a:r>
+          </a:p>
+        </p:txBody>
+      </p:sp>
+      <p:grpSp>
+        <p:nvGrpSpPr>
+          <p:cNvPr id="14" name="グループ化 13">
+            <a:extLst>
+              <a:ext uri="{FF2B5EF4-FFF2-40B4-BE49-F238E27FC236}">
+                <a16:creationId xmlns:a16="http://schemas.microsoft.com/office/drawing/2014/main" id="{82507D70-F7A9-655D-12B1-8A4C2CC16DD2}"/>
+              </a:ext>
+            </a:extLst>
+          </p:cNvPr>
+          <p:cNvGrpSpPr/>
+          <p:nvPr/>
+        </p:nvGrpSpPr>
+        <p:grpSpPr>
+          <a:xfrm>
+            <a:off x="1699641" y="3630971"/>
+            <a:ext cx="4039244" cy="3042529"/>
+            <a:chOff x="1543363" y="3662239"/>
+            <a:chExt cx="3475151" cy="3211382"/>
+          </a:xfrm>
+        </p:grpSpPr>
+        <p:pic>
+          <p:nvPicPr>
+            <p:cNvPr id="4" name="Google Shape;188;p35">
+              <a:extLst>
+                <a:ext uri="{FF2B5EF4-FFF2-40B4-BE49-F238E27FC236}">
+                  <a16:creationId xmlns:a16="http://schemas.microsoft.com/office/drawing/2014/main" id="{14C84C69-D5C3-2699-E5F1-1E1C3BDDF59A}"/>
+                </a:ext>
+              </a:extLst>
+            </p:cNvPr>
+            <p:cNvPicPr preferRelativeResize="0"/>
+            <p:nvPr/>
+          </p:nvPicPr>
+          <p:blipFill>
+            <a:blip r:embed="rId2"/>
+            <a:stretch>
+              <a:fillRect/>
+            </a:stretch>
+          </p:blipFill>
+          <p:spPr>
+            <a:xfrm>
+              <a:off x="1543363" y="3662239"/>
+              <a:ext cx="3475151" cy="3211382"/>
+            </a:xfrm>
+            <a:prstGeom prst="rect">
+              <a:avLst/>
+            </a:prstGeom>
+            <a:noFill/>
+          </p:spPr>
+        </p:pic>
+        <p:pic>
+          <p:nvPicPr>
+            <p:cNvPr id="8" name="Google Shape;265;p45">
+              <a:extLst>
+                <a:ext uri="{FF2B5EF4-FFF2-40B4-BE49-F238E27FC236}">
+                  <a16:creationId xmlns:a16="http://schemas.microsoft.com/office/drawing/2014/main" id="{CCA6F654-851B-DC95-4BA3-A9E4B4D9D364}"/>
+                </a:ext>
+              </a:extLst>
+            </p:cNvPr>
+            <p:cNvPicPr preferRelativeResize="0"/>
+            <p:nvPr/>
+          </p:nvPicPr>
+          <p:blipFill>
+            <a:blip r:embed="rId3"/>
+            <a:stretch>
+              <a:fillRect/>
+            </a:stretch>
+          </p:blipFill>
+          <p:spPr>
+            <a:xfrm>
+              <a:off x="2818016" y="3839848"/>
+              <a:ext cx="888762" cy="731922"/>
+            </a:xfrm>
+            <a:prstGeom prst="rect">
+              <a:avLst/>
+            </a:prstGeom>
+            <a:noFill/>
+          </p:spPr>
+        </p:pic>
+      </p:grpSp>
+      <p:pic>
+        <p:nvPicPr>
+          <p:cNvPr id="10" name="Picture 2" descr="九州大学 Kyushu University">
+            <a:extLst>
+              <a:ext uri="{FF2B5EF4-FFF2-40B4-BE49-F238E27FC236}">
+                <a16:creationId xmlns:a16="http://schemas.microsoft.com/office/drawing/2014/main" id="{D20BBA3B-F777-69AB-CCA1-36562EBF284D}"/>
+              </a:ext>
+            </a:extLst>
+          </p:cNvPr>
+          <p:cNvPicPr>
+            <a:picLocks noChangeAspect="1" noChangeArrowheads="1"/>
+          </p:cNvPicPr>
+          <p:nvPr/>
+        </p:nvPicPr>
+        <p:blipFill>
+          <a:blip r:embed="rId4">
+            <a:extLst>
+              <a:ext uri="{28A0092B-C50C-407E-A947-70E740481C1C}">
+                <a14:useLocalDpi xmlns:a14="http://schemas.microsoft.com/office/drawing/2010/main" val="0"/>
+              </a:ext>
+            </a:extLst>
+          </a:blip>
+          <a:srcRect/>
+          <a:stretch>
+            <a:fillRect/>
+          </a:stretch>
+        </p:blipFill>
+        <p:spPr bwMode="auto">
+          <a:xfrm>
+            <a:off x="1811677" y="5137429"/>
+            <a:ext cx="1024761" cy="1024761"/>
+          </a:xfrm>
+          <a:prstGeom prst="rect">
+            <a:avLst/>
+          </a:prstGeom>
+          <a:noFill/>
+          <a:extLst>
+            <a:ext uri="{909E8E84-426E-40DD-AFC4-6F175D3DCCD1}">
+              <a14:hiddenFill xmlns:a14="http://schemas.microsoft.com/office/drawing/2010/main">
+                <a:solidFill>
+                  <a:srgbClr val="FFFFFF"/>
+                </a:solidFill>
+              </a14:hiddenFill>
+            </a:ext>
+          </a:extLst>
+        </p:spPr>
+      </p:pic>
+      <p:pic>
+        <p:nvPicPr>
+          <p:cNvPr id="1026" name="Picture 2" descr="株式会社東海理化のプレスリリース｜PR TIMES">
+            <a:extLst>
+              <a:ext uri="{FF2B5EF4-FFF2-40B4-BE49-F238E27FC236}">
+                <a16:creationId xmlns:a16="http://schemas.microsoft.com/office/drawing/2014/main" id="{EAE2225D-917C-F65D-3AC6-861AF37D2275}"/>
+              </a:ext>
+            </a:extLst>
+          </p:cNvPr>
+          <p:cNvPicPr>
+            <a:picLocks noChangeAspect="1" noChangeArrowheads="1"/>
+          </p:cNvPicPr>
+          <p:nvPr/>
+        </p:nvPicPr>
+        <p:blipFill>
+          <a:blip r:embed="rId5">
+            <a:extLst>
+              <a:ext uri="{28A0092B-C50C-407E-A947-70E740481C1C}">
+                <a14:useLocalDpi xmlns:a14="http://schemas.microsoft.com/office/drawing/2010/main" val="0"/>
+              </a:ext>
+            </a:extLst>
+          </a:blip>
+          <a:srcRect/>
+          <a:stretch>
+            <a:fillRect/>
+          </a:stretch>
+        </p:blipFill>
+        <p:spPr bwMode="auto">
+          <a:xfrm>
+            <a:off x="4433803" y="5624327"/>
+            <a:ext cx="1026975" cy="537864"/>
+          </a:xfrm>
+          <a:prstGeom prst="rect">
+            <a:avLst/>
+          </a:prstGeom>
+          <a:noFill/>
+          <a:extLst>
+            <a:ext uri="{909E8E84-426E-40DD-AFC4-6F175D3DCCD1}">
+              <a14:hiddenFill xmlns:a14="http://schemas.microsoft.com/office/drawing/2010/main">
+                <a:solidFill>
+                  <a:srgbClr val="FFFFFF"/>
+                </a:solidFill>
+              </a14:hiddenFill>
+            </a:ext>
+          </a:extLst>
+        </p:spPr>
+      </p:pic>
+    </p:spTree>
+    <p:extLst>
+      <p:ext uri="{BB962C8B-B14F-4D97-AF65-F5344CB8AC3E}">
+        <p14:creationId xmlns:p14="http://schemas.microsoft.com/office/powerpoint/2010/main" val="3404309810"/>
+      </p:ext>
+    </p:extLst>
+  </p:cSld>
+  <p:clrMapOvr>
+    <a:masterClrMapping/>
+  </p:clrMapOvr>
+</p:sld>
+</file>
+
+<file path=ppt/slides/slide5.xml><?xml version="1.0" encoding="utf-8"?>
+<p:sld xmlns:a="http://schemas.openxmlformats.org/drawingml/2006/main" xmlns:r="http://schemas.openxmlformats.org/officeDocument/2006/relationships" xmlns:p="http://schemas.openxmlformats.org/presentationml/2006/main">
+  <p:cSld>
+    <p:spTree>
+      <p:nvGrpSpPr>
+        <p:cNvPr id="1" name=""/>
+        <p:cNvGrpSpPr/>
+        <p:nvPr/>
+      </p:nvGrpSpPr>
+      <p:grpSpPr>
+        <a:xfrm>
+          <a:off x="0" y="0"/>
+          <a:ext cx="0" cy="0"/>
+          <a:chOff x="0" y="0"/>
+          <a:chExt cx="0" cy="0"/>
+        </a:xfrm>
+      </p:grpSpPr>
+    </p:spTree>
+    <p:extLst>
+      <p:ext uri="{BB962C8B-B14F-4D97-AF65-F5344CB8AC3E}">
+        <p14:creationId xmlns:p14="http://schemas.microsoft.com/office/powerpoint/2010/main" val="428239958"/>
+      </p:ext>
+    </p:extLst>
+  </p:cSld>
+  <p:clrMapOvr>
+    <a:masterClrMapping/>
+  </p:clrMapOvr>
+</p:sld>
+</file>
+
+<file path=ppt/slides/slide6.xml><?xml version="1.0" encoding="utf-8"?>
 <p:sld xmlns:a="http://schemas.openxmlformats.org/drawingml/2006/main" xmlns:r="http://schemas.openxmlformats.org/officeDocument/2006/relationships" xmlns:p="http://schemas.openxmlformats.org/presentationml/2006/main">
   <p:cSld>
     <p:spTree>
@@ -4895,4 +9177,319 @@
     </a:ext>
   </a:extLst>
 </a:theme>
+</file>
+
+<file path=ppt/theme/theme2.xml><?xml version="1.0" encoding="utf-8"?>
+<a:theme xmlns:a="http://schemas.openxmlformats.org/drawingml/2006/main" name="Office テーマ">
+  <a:themeElements>
+    <a:clrScheme name="Office">
+      <a:dk1>
+        <a:sysClr val="windowText" lastClr="000000"/>
+      </a:dk1>
+      <a:lt1>
+        <a:sysClr val="window" lastClr="FFFFFF"/>
+      </a:lt1>
+      <a:dk2>
+        <a:srgbClr val="0E2841"/>
+      </a:dk2>
+      <a:lt2>
+        <a:srgbClr val="E8E8E8"/>
+      </a:lt2>
+      <a:accent1>
+        <a:srgbClr val="156082"/>
+      </a:accent1>
+      <a:accent2>
+        <a:srgbClr val="E97132"/>
+      </a:accent2>
+      <a:accent3>
+        <a:srgbClr val="196B24"/>
+      </a:accent3>
+      <a:accent4>
+        <a:srgbClr val="0F9ED5"/>
+      </a:accent4>
+      <a:accent5>
+        <a:srgbClr val="A02B93"/>
+      </a:accent5>
+      <a:accent6>
+        <a:srgbClr val="4EA72E"/>
+      </a:accent6>
+      <a:hlink>
+        <a:srgbClr val="467886"/>
+      </a:hlink>
+      <a:folHlink>
+        <a:srgbClr val="96607D"/>
+      </a:folHlink>
+    </a:clrScheme>
+    <a:fontScheme name="Office">
+      <a:majorFont>
+        <a:latin typeface="游ゴシック Light" panose="02110004020202020204"/>
+        <a:ea typeface=""/>
+        <a:cs typeface=""/>
+        <a:font script="Jpan" typeface="游ゴシック Light"/>
+        <a:font script="Hang" typeface="맑은 고딕"/>
+        <a:font script="Hans" typeface="等线 Light"/>
+        <a:font script="Hant" typeface="新細明體"/>
+        <a:font script="Arab" typeface="Times New Roman"/>
+        <a:font script="Hebr" typeface="Times New Roman"/>
+        <a:font script="Thai" typeface="Angsana New"/>
+        <a:font script="Ethi" typeface="Nyala"/>
+        <a:font script="Beng" typeface="Vrinda"/>
+        <a:font script="Gujr" typeface="Shruti"/>
+        <a:font script="Khmr" typeface="MoolBoran"/>
+        <a:font script="Knda" typeface="Tunga"/>
+        <a:font script="Guru" typeface="Raavi"/>
+        <a:font script="Cans" typeface="Euphemia"/>
+        <a:font script="Cher" typeface="Plantagenet Cherokee"/>
+        <a:font script="Yiii" typeface="Microsoft Yi Baiti"/>
+        <a:font script="Tibt" typeface="Microsoft Himalaya"/>
+        <a:font script="Thaa" typeface="MV Boli"/>
+        <a:font script="Deva" typeface="Mangal"/>
+        <a:font script="Telu" typeface="Gautami"/>
+        <a:font script="Taml" typeface="Latha"/>
+        <a:font script="Syrc" typeface="Estrangelo Edessa"/>
+        <a:font script="Orya" typeface="Kalinga"/>
+        <a:font script="Mlym" typeface="Kartika"/>
+        <a:font script="Laoo" typeface="DokChampa"/>
+        <a:font script="Sinh" typeface="Iskoola Pota"/>
+        <a:font script="Mong" typeface="Mongolian Baiti"/>
+        <a:font script="Viet" typeface="Times New Roman"/>
+        <a:font script="Uigh" typeface="Microsoft Uighur"/>
+        <a:font script="Geor" typeface="Sylfaen"/>
+        <a:font script="Armn" typeface="Arial"/>
+        <a:font script="Bugi" typeface="Leelawadee UI"/>
+        <a:font script="Bopo" typeface="Microsoft JhengHei"/>
+        <a:font script="Java" typeface="Javanese Text"/>
+        <a:font script="Lisu" typeface="Segoe UI"/>
+        <a:font script="Mymr" typeface="Myanmar Text"/>
+        <a:font script="Nkoo" typeface="Ebrima"/>
+        <a:font script="Olck" typeface="Nirmala UI"/>
+        <a:font script="Osma" typeface="Ebrima"/>
+        <a:font script="Phag" typeface="Phagspa"/>
+        <a:font script="Syrn" typeface="Estrangelo Edessa"/>
+        <a:font script="Syrj" typeface="Estrangelo Edessa"/>
+        <a:font script="Syre" typeface="Estrangelo Edessa"/>
+        <a:font script="Sora" typeface="Nirmala UI"/>
+        <a:font script="Tale" typeface="Microsoft Tai Le"/>
+        <a:font script="Talu" typeface="Microsoft New Tai Lue"/>
+        <a:font script="Tfng" typeface="Ebrima"/>
+      </a:majorFont>
+      <a:minorFont>
+        <a:latin typeface="游ゴシック" panose="02110004020202020204"/>
+        <a:ea typeface=""/>
+        <a:cs typeface=""/>
+        <a:font script="Jpan" typeface="游ゴシック"/>
+        <a:font script="Hang" typeface="맑은 고딕"/>
+        <a:font script="Hans" typeface="等线"/>
+        <a:font script="Hant" typeface="新細明體"/>
+        <a:font script="Arab" typeface="Arial"/>
+        <a:font script="Hebr" typeface="Arial"/>
+        <a:font script="Thai" typeface="Cordia New"/>
+        <a:font script="Ethi" typeface="Nyala"/>
+        <a:font script="Beng" typeface="Vrinda"/>
+        <a:font script="Gujr" typeface="Shruti"/>
+        <a:font script="Khmr" typeface="DaunPenh"/>
+        <a:font script="Knda" typeface="Tunga"/>
+        <a:font script="Guru" typeface="Raavi"/>
+        <a:font script="Cans" typeface="Euphemia"/>
+        <a:font script="Cher" typeface="Plantagenet Cherokee"/>
+        <a:font script="Yiii" typeface="Microsoft Yi Baiti"/>
+        <a:font script="Tibt" typeface="Microsoft Himalaya"/>
+        <a:font script="Thaa" typeface="MV Boli"/>
+        <a:font script="Deva" typeface="Mangal"/>
+        <a:font script="Telu" typeface="Gautami"/>
+        <a:font script="Taml" typeface="Latha"/>
+        <a:font script="Syrc" typeface="Estrangelo Edessa"/>
+        <a:font script="Orya" typeface="Kalinga"/>
+        <a:font script="Mlym" typeface="Kartika"/>
+        <a:font script="Laoo" typeface="DokChampa"/>
+        <a:font script="Sinh" typeface="Iskoola Pota"/>
+        <a:font script="Mong" typeface="Mongolian Baiti"/>
+        <a:font script="Viet" typeface="Arial"/>
+        <a:font script="Uigh" typeface="Microsoft Uighur"/>
+        <a:font script="Geor" typeface="Sylfaen"/>
+        <a:font script="Armn" typeface="Arial"/>
+        <a:font script="Bugi" typeface="Leelawadee UI"/>
+        <a:font script="Bopo" typeface="Microsoft JhengHei"/>
+        <a:font script="Java" typeface="Javanese Text"/>
+        <a:font script="Lisu" typeface="Segoe UI"/>
+        <a:font script="Mymr" typeface="Myanmar Text"/>
+        <a:font script="Nkoo" typeface="Ebrima"/>
+        <a:font script="Olck" typeface="Nirmala UI"/>
+        <a:font script="Osma" typeface="Ebrima"/>
+        <a:font script="Phag" typeface="Phagspa"/>
+        <a:font script="Syrn" typeface="Estrangelo Edessa"/>
+        <a:font script="Syrj" typeface="Estrangelo Edessa"/>
+        <a:font script="Syre" typeface="Estrangelo Edessa"/>
+        <a:font script="Sora" typeface="Nirmala UI"/>
+        <a:font script="Tale" typeface="Microsoft Tai Le"/>
+        <a:font script="Talu" typeface="Microsoft New Tai Lue"/>
+        <a:font script="Tfng" typeface="Ebrima"/>
+      </a:minorFont>
+    </a:fontScheme>
+    <a:fmtScheme name="Office">
+      <a:fillStyleLst>
+        <a:solidFill>
+          <a:schemeClr val="phClr"/>
+        </a:solidFill>
+        <a:gradFill rotWithShape="1">
+          <a:gsLst>
+            <a:gs pos="0">
+              <a:schemeClr val="phClr">
+                <a:lumMod val="110000"/>
+                <a:satMod val="105000"/>
+                <a:tint val="67000"/>
+              </a:schemeClr>
+            </a:gs>
+            <a:gs pos="50000">
+              <a:schemeClr val="phClr">
+                <a:lumMod val="105000"/>
+                <a:satMod val="103000"/>
+                <a:tint val="73000"/>
+              </a:schemeClr>
+            </a:gs>
+            <a:gs pos="100000">
+              <a:schemeClr val="phClr">
+                <a:lumMod val="105000"/>
+                <a:satMod val="109000"/>
+                <a:tint val="81000"/>
+              </a:schemeClr>
+            </a:gs>
+          </a:gsLst>
+          <a:lin ang="5400000" scaled="0"/>
+        </a:gradFill>
+        <a:gradFill rotWithShape="1">
+          <a:gsLst>
+            <a:gs pos="0">
+              <a:schemeClr val="phClr">
+                <a:satMod val="103000"/>
+                <a:lumMod val="102000"/>
+                <a:tint val="94000"/>
+              </a:schemeClr>
+            </a:gs>
+            <a:gs pos="50000">
+              <a:schemeClr val="phClr">
+                <a:satMod val="110000"/>
+                <a:lumMod val="100000"/>
+                <a:shade val="100000"/>
+              </a:schemeClr>
+            </a:gs>
+            <a:gs pos="100000">
+              <a:schemeClr val="phClr">
+                <a:lumMod val="99000"/>
+                <a:satMod val="120000"/>
+                <a:shade val="78000"/>
+              </a:schemeClr>
+            </a:gs>
+          </a:gsLst>
+          <a:lin ang="5400000" scaled="0"/>
+        </a:gradFill>
+      </a:fillStyleLst>
+      <a:lnStyleLst>
+        <a:ln w="12700" cap="flat" cmpd="sng" algn="ctr">
+          <a:solidFill>
+            <a:schemeClr val="phClr"/>
+          </a:solidFill>
+          <a:prstDash val="solid"/>
+          <a:miter lim="800000"/>
+        </a:ln>
+        <a:ln w="19050" cap="flat" cmpd="sng" algn="ctr">
+          <a:solidFill>
+            <a:schemeClr val="phClr"/>
+          </a:solidFill>
+          <a:prstDash val="solid"/>
+          <a:miter lim="800000"/>
+        </a:ln>
+        <a:ln w="25400" cap="flat" cmpd="sng" algn="ctr">
+          <a:solidFill>
+            <a:schemeClr val="phClr"/>
+          </a:solidFill>
+          <a:prstDash val="solid"/>
+          <a:miter lim="800000"/>
+        </a:ln>
+      </a:lnStyleLst>
+      <a:effectStyleLst>
+        <a:effectStyle>
+          <a:effectLst/>
+        </a:effectStyle>
+        <a:effectStyle>
+          <a:effectLst/>
+        </a:effectStyle>
+        <a:effectStyle>
+          <a:effectLst>
+            <a:outerShdw blurRad="57150" dist="19050" dir="5400000" algn="ctr" rotWithShape="0">
+              <a:srgbClr val="000000">
+                <a:alpha val="63000"/>
+              </a:srgbClr>
+            </a:outerShdw>
+          </a:effectLst>
+        </a:effectStyle>
+      </a:effectStyleLst>
+      <a:bgFillStyleLst>
+        <a:solidFill>
+          <a:schemeClr val="phClr"/>
+        </a:solidFill>
+        <a:solidFill>
+          <a:schemeClr val="phClr">
+            <a:tint val="95000"/>
+            <a:satMod val="170000"/>
+          </a:schemeClr>
+        </a:solidFill>
+        <a:gradFill rotWithShape="1">
+          <a:gsLst>
+            <a:gs pos="0">
+              <a:schemeClr val="phClr">
+                <a:tint val="93000"/>
+                <a:satMod val="150000"/>
+                <a:shade val="98000"/>
+                <a:lumMod val="102000"/>
+              </a:schemeClr>
+            </a:gs>
+            <a:gs pos="50000">
+              <a:schemeClr val="phClr">
+                <a:tint val="98000"/>
+                <a:satMod val="130000"/>
+                <a:shade val="90000"/>
+                <a:lumMod val="103000"/>
+              </a:schemeClr>
+            </a:gs>
+            <a:gs pos="100000">
+              <a:schemeClr val="phClr">
+                <a:shade val="63000"/>
+                <a:satMod val="120000"/>
+              </a:schemeClr>
+            </a:gs>
+          </a:gsLst>
+          <a:lin ang="5400000" scaled="0"/>
+        </a:gradFill>
+      </a:bgFillStyleLst>
+    </a:fmtScheme>
+  </a:themeElements>
+  <a:objectDefaults>
+    <a:lnDef>
+      <a:spPr/>
+      <a:bodyPr/>
+      <a:lstStyle/>
+      <a:style>
+        <a:lnRef idx="2">
+          <a:schemeClr val="accent1"/>
+        </a:lnRef>
+        <a:fillRef idx="0">
+          <a:schemeClr val="accent1"/>
+        </a:fillRef>
+        <a:effectRef idx="1">
+          <a:schemeClr val="accent1"/>
+        </a:effectRef>
+        <a:fontRef idx="minor">
+          <a:schemeClr val="tx1"/>
+        </a:fontRef>
+      </a:style>
+    </a:lnDef>
+  </a:objectDefaults>
+  <a:extraClrSchemeLst/>
+  <a:extLst>
+    <a:ext uri="{05A4C25C-085E-4340-85A3-A5531E510DB2}">
+      <thm15:themeFamily xmlns:thm15="http://schemas.microsoft.com/office/thememl/2012/main" name="Office Theme" id="{2E142A2C-CD16-42D6-873A-C26D2A0506FA}" vid="{1BDDFF52-6CD6-40A5-AB3C-68EB2F1E4D0A}"/>
+    </a:ext>
+  </a:extLst>
+</a:theme>
 </file>